--- a/adk-architecture.pptx
+++ b/adk-architecture.pptx
@@ -7,9 +7,11 @@
   <p:sldIdLst>
     <p:sldId id="256" r:id="rId2"/>
     <p:sldId id="257" r:id="rId3"/>
+    <p:sldId id="258" r:id="rId4"/>
+    <p:sldId id="259" r:id="rId5"/>
   </p:sldIdLst>
   <p:notesMasterIdLst>
-    <p:notesMasterId r:id="rId4"/>
+    <p:notesMasterId r:id="rId6"/>
   </p:notesMasterIdLst>
   <p:sldSz cx="12192000" cy="6858000"/>
   <p:notesSz cx="6858000" cy="12192000"/>
@@ -633,6 +635,182 @@
 </p:notes>
 </file>
 
+<file path=ppt/notesSlides/notesSlide3.xml><?xml version="1.0" encoding="utf-8"?>
+<p:notes xmlns:a="http://schemas.openxmlformats.org/drawingml/2006/main" xmlns:r="http://schemas.openxmlformats.org/officeDocument/2006/relationships" xmlns:p="http://schemas.openxmlformats.org/presentationml/2006/main">
+  <p:cSld>
+    <p:spTree>
+      <p:nvGrpSpPr>
+        <p:cNvPr id="1" name=""/>
+        <p:cNvGrpSpPr/>
+        <p:nvPr/>
+      </p:nvGrpSpPr>
+      <p:grpSpPr>
+        <a:xfrm>
+          <a:off x="0" y="0"/>
+          <a:ext cx="0" cy="0"/>
+          <a:chOff x="0" y="0"/>
+          <a:chExt cx="0" cy="0"/>
+        </a:xfrm>
+      </p:grpSpPr>
+      <p:sp>
+        <p:nvSpPr>
+          <p:cNvPr id="2" name="Slide Image Placeholder 1"/>
+          <p:cNvSpPr>
+            <a:spLocks noGrp="1" noRot="1" noChangeAspect="1"/>
+          </p:cNvSpPr>
+          <p:nvPr>
+            <p:ph type="sldImg"/>
+          </p:nvPr>
+        </p:nvSpPr>
+        <p:spPr/>
+      </p:sp>
+      <p:sp>
+        <p:nvSpPr>
+          <p:cNvPr id="3" name="Notes Placeholder 2"/>
+          <p:cNvSpPr>
+            <a:spLocks noGrp="1"/>
+          </p:cNvSpPr>
+          <p:nvPr>
+            <p:ph type="body" idx="1"/>
+          </p:nvPr>
+        </p:nvSpPr>
+        <p:spPr/>
+        <p:txBody>
+          <a:bodyPr/>
+          <a:lstStyle/>
+          <a:p>
+            <a:r>
+              <a:rPr lang="en-US" dirty="0"/>
+              <a:t>Comparison slide. Ten dimensions, side by side. Starred cells show a framework advantage. Claude merchant agent wins on: write safety (four hard gates), skills system (six structured flows), dedicated analysis delegate, and cross-session memory. Gemini ADK wins on: framework-native session state, automatic sub-agent routing (zero boilerplate), before/after callbacks (no manual prompt building each turn), and Knowledge Graph grounding. Neither is universally better — choose based on safety requirements and ecosystem.</a:t>
+            </a:r>
+            <a:endParaRPr lang="en-US" dirty="0"/>
+          </a:p>
+        </p:txBody>
+      </p:sp>
+      <p:sp>
+        <p:nvSpPr>
+          <p:cNvPr id="4" name="Slide Number Placeholder 3"/>
+          <p:cNvSpPr>
+            <a:spLocks noGrp="1"/>
+          </p:cNvSpPr>
+          <p:nvPr>
+            <p:ph type="sldNum" sz="quarter" idx="10"/>
+          </p:nvPr>
+        </p:nvSpPr>
+        <p:spPr/>
+        <p:txBody>
+          <a:bodyPr/>
+          <a:lstStyle/>
+          <a:p>
+            <a:fld id="{F7021451-1387-4CA6-816F-3879F97B5CBC}" type="slidenum">
+              <a:rPr lang="en-US"/>
+              <a:t>3</a:t>
+            </a:fld>
+            <a:endParaRPr lang="en-US"/>
+          </a:p>
+        </p:txBody>
+      </p:sp>
+    </p:spTree>
+    <p:extLst>
+      <p:ext uri="{BB962C8B-B14F-4D97-AF65-F5344CB8AC3E}">
+        <p14:creationId xmlns:p14="http://schemas.microsoft.com/office/powerpoint/2010/main" val="1024086991"/>
+      </p:ext>
+    </p:extLst>
+  </p:cSld>
+  <p:clrMapOvr>
+    <a:masterClrMapping/>
+  </p:clrMapOvr>
+</p:notes>
+</file>
+
+<file path=ppt/notesSlides/notesSlide4.xml><?xml version="1.0" encoding="utf-8"?>
+<p:notes xmlns:a="http://schemas.openxmlformats.org/drawingml/2006/main" xmlns:r="http://schemas.openxmlformats.org/officeDocument/2006/relationships" xmlns:p="http://schemas.openxmlformats.org/presentationml/2006/main">
+  <p:cSld>
+    <p:spTree>
+      <p:nvGrpSpPr>
+        <p:cNvPr id="1" name=""/>
+        <p:cNvGrpSpPr/>
+        <p:nvPr/>
+      </p:nvGrpSpPr>
+      <p:grpSpPr>
+        <a:xfrm>
+          <a:off x="0" y="0"/>
+          <a:ext cx="0" cy="0"/>
+          <a:chOff x="0" y="0"/>
+          <a:chExt cx="0" cy="0"/>
+        </a:xfrm>
+      </p:grpSpPr>
+      <p:sp>
+        <p:nvSpPr>
+          <p:cNvPr id="2" name="Slide Image Placeholder 1"/>
+          <p:cNvSpPr>
+            <a:spLocks noGrp="1" noRot="1" noChangeAspect="1"/>
+          </p:cNvSpPr>
+          <p:nvPr>
+            <p:ph type="sldImg"/>
+          </p:nvPr>
+        </p:nvSpPr>
+        <p:spPr/>
+      </p:sp>
+      <p:sp>
+        <p:nvSpPr>
+          <p:cNvPr id="3" name="Notes Placeholder 2"/>
+          <p:cNvSpPr>
+            <a:spLocks noGrp="1"/>
+          </p:cNvSpPr>
+          <p:nvPr>
+            <p:ph type="body" idx="1"/>
+          </p:nvPr>
+        </p:nvSpPr>
+        <p:spPr/>
+        <p:txBody>
+          <a:bodyPr/>
+          <a:lstStyle/>
+          <a:p>
+            <a:r>
+              <a:rPr lang="en-US" dirty="0"/>
+              <a:t>Decision guidance. Not a verdict — both agents do the same job (read SFCC, stage writes, stream to the browser). The choice is which ecosystem and which trade-offs fit the deployment. Claude wins on audit-grade write safety and structured skill governance. Gemini ADK wins on framework-managed state and zero-boilerplate multi-agent wiring. The bottom callout is critical: both share the same backend and staging contract, so switching is feasible without a ground-up rewrite.</a:t>
+            </a:r>
+            <a:endParaRPr lang="en-US" dirty="0"/>
+          </a:p>
+        </p:txBody>
+      </p:sp>
+      <p:sp>
+        <p:nvSpPr>
+          <p:cNvPr id="4" name="Slide Number Placeholder 3"/>
+          <p:cNvSpPr>
+            <a:spLocks noGrp="1"/>
+          </p:cNvSpPr>
+          <p:nvPr>
+            <p:ph type="sldNum" sz="quarter" idx="10"/>
+          </p:nvPr>
+        </p:nvSpPr>
+        <p:spPr/>
+        <p:txBody>
+          <a:bodyPr/>
+          <a:lstStyle/>
+          <a:p>
+            <a:fld id="{F7021451-1387-4CA6-816F-3879F97B5CBC}" type="slidenum">
+              <a:rPr lang="en-US"/>
+              <a:t>4</a:t>
+            </a:fld>
+            <a:endParaRPr lang="en-US"/>
+          </a:p>
+        </p:txBody>
+      </p:sp>
+    </p:spTree>
+    <p:extLst>
+      <p:ext uri="{BB962C8B-B14F-4D97-AF65-F5344CB8AC3E}">
+        <p14:creationId xmlns:p14="http://schemas.microsoft.com/office/powerpoint/2010/main" val="1024086991"/>
+      </p:ext>
+    </p:extLst>
+  </p:cSld>
+  <p:clrMapOvr>
+    <a:masterClrMapping/>
+  </p:clrMapOvr>
+</p:notes>
+</file>
+
 <file path=ppt/slideLayouts/slideLayout1.xml><?xml version="1.0" encoding="utf-8"?>
 <p:sldLayout xmlns:a="http://schemas.openxmlformats.org/drawingml/2006/main" xmlns:r="http://schemas.openxmlformats.org/officeDocument/2006/relationships" xmlns:p="http://schemas.openxmlformats.org/presentationml/2006/main" preserve="1">
   <p:cSld name="DEFAULT">
@@ -3743,7 +3921,7 @@
                 <a:ea typeface="Calibri" pitchFamily="34" charset="-122"/>
                 <a:cs typeface="Calibri" pitchFamily="34" charset="-120"/>
               </a:rPr>
-              <a:t>✦  Gemini Flash  (gemini-3.8-flash)</a:t>
+              <a:t>✦  Gemini Flash  (gemini-2.0-flash)</a:t>
             </a:r>
             <a:endParaRPr lang="en-US" sz="1300" dirty="0"/>
           </a:p>
@@ -3861,34 +4039,7 @@
       </p:sp>
       <p:sp>
         <p:nvSpPr>
-          <p:cNvPr id="82" name="Shape 80"/>
-          <p:cNvSpPr/>
-          <p:nvPr/>
-        </p:nvSpPr>
-        <p:spPr>
-          <a:xfrm>
-            <a:off x="228600" y="6510528"/>
-            <a:ext cx="2377440" cy="219456"/>
-          </a:xfrm>
-          <a:prstGeom prst="roundRect">
-            <a:avLst>
-              <a:gd name="adj" fmla="val 16667"/>
-            </a:avLst>
-          </a:prstGeom>
-          <a:solidFill>
-            <a:srgbClr val="0C1824"/>
-          </a:solidFill>
-          <a:ln w="25400">
-            <a:solidFill>
-              <a:srgbClr val="0C1824"/>
-            </a:solidFill>
-            <a:prstDash val="solid"/>
-          </a:ln>
-        </p:spPr>
-      </p:sp>
-      <p:sp>
-        <p:nvSpPr>
-          <p:cNvPr id="83" name="Text 81"/>
+          <p:cNvPr id="82" name="Text 80"/>
           <p:cNvSpPr txBox="1"/>
           <p:nvPr/>
         </p:nvSpPr>
@@ -3930,41 +4081,14 @@
       </p:sp>
       <p:sp>
         <p:nvSpPr>
-          <p:cNvPr id="84" name="Shape 82"/>
-          <p:cNvSpPr/>
-          <p:nvPr/>
-        </p:nvSpPr>
-        <p:spPr>
-          <a:xfrm>
-            <a:off x="3291840" y="6510528"/>
-            <a:ext cx="4023360" cy="219456"/>
-          </a:xfrm>
-          <a:prstGeom prst="roundRect">
-            <a:avLst>
-              <a:gd name="adj" fmla="val 16667"/>
-            </a:avLst>
-          </a:prstGeom>
-          <a:solidFill>
-            <a:srgbClr val="0C1824"/>
-          </a:solidFill>
-          <a:ln w="25400">
-            <a:solidFill>
-              <a:srgbClr val="0C1824"/>
-            </a:solidFill>
-            <a:prstDash val="solid"/>
-          </a:ln>
-        </p:spPr>
-      </p:sp>
-      <p:sp>
-        <p:nvSpPr>
-          <p:cNvPr id="85" name="Text 83"/>
+          <p:cNvPr id="83" name="Text 81"/>
           <p:cNvSpPr txBox="1"/>
           <p:nvPr/>
         </p:nvSpPr>
         <p:spPr>
           <a:xfrm>
             <a:off x="3328416" y="6510528"/>
-            <a:ext cx="3950208" cy="219456"/>
+            <a:ext cx="8138160" cy="219456"/>
           </a:xfrm>
           <a:prstGeom prst="rect">
             <a:avLst/>
@@ -5738,6 +5862,5357 @@
               <a:t>Browser: AssistantPanel renders text + change_preview cards in real time</a:t>
             </a:r>
             <a:endParaRPr lang="en-US" sz="950" dirty="0"/>
+          </a:p>
+        </p:txBody>
+      </p:sp>
+    </p:spTree>
+  </p:cSld>
+  <p:clrMapOvr>
+    <a:masterClrMapping/>
+  </p:clrMapOvr>
+</p:sld>
+</file>
+
+<file path=ppt/slides/slide3.xml><?xml version="1.0" encoding="utf-8"?>
+<p:sld xmlns:a="http://schemas.openxmlformats.org/drawingml/2006/main" xmlns:r="http://schemas.openxmlformats.org/officeDocument/2006/relationships" xmlns:p="http://schemas.openxmlformats.org/presentationml/2006/main">
+  <p:cSld name="Slide 3">
+    <p:bg>
+      <p:bgPr>
+        <a:solidFill>
+          <a:srgbClr val="060E18"/>
+        </a:solidFill>
+      </p:bgPr>
+    </p:bg>
+    <p:spTree>
+      <p:nvGrpSpPr>
+        <p:cNvPr id="1" name=""/>
+        <p:cNvGrpSpPr/>
+        <p:nvPr/>
+      </p:nvGrpSpPr>
+      <p:grpSpPr>
+        <a:xfrm>
+          <a:off x="0" y="0"/>
+          <a:ext cx="0" cy="0"/>
+          <a:chOff x="0" y="0"/>
+          <a:chExt cx="0" cy="0"/>
+        </a:xfrm>
+      </p:grpSpPr>
+      <p:sp>
+        <p:nvSpPr>
+          <p:cNvPr id="2" name="Text 0"/>
+          <p:cNvSpPr txBox="1"/>
+          <p:nvPr/>
+        </p:nvSpPr>
+        <p:spPr>
+          <a:xfrm>
+            <a:off x="365760" y="91440"/>
+            <a:ext cx="11430000" cy="420624"/>
+          </a:xfrm>
+          <a:prstGeom prst="rect">
+            <a:avLst/>
+          </a:prstGeom>
+          <a:noFill/>
+          <a:ln/>
+        </p:spPr>
+        <p:txBody>
+          <a:bodyPr wrap="square" lIns="0" tIns="0" rIns="0" bIns="0" rtlCol="0" anchor="ctr"/>
+          <a:lstStyle/>
+          <a:p>
+            <a:pPr algn="l" indent="0" marL="0">
+              <a:lnSpc>
+                <a:spcPct val="110000"/>
+              </a:lnSpc>
+              <a:buNone/>
+            </a:pPr>
+            <a:r>
+              <a:rPr lang="en-US" sz="2200" b="1" dirty="0">
+                <a:solidFill>
+                  <a:srgbClr val="FFFFFF"/>
+                </a:solidFill>
+                <a:latin typeface="Cambria" pitchFamily="34" charset="0"/>
+                <a:ea typeface="Cambria" pitchFamily="34" charset="-122"/>
+                <a:cs typeface="Cambria" pitchFamily="34" charset="-120"/>
+              </a:rPr>
+              <a:t>Gemini ADK vs Claude — Merchant Agent Comparison</a:t>
+            </a:r>
+            <a:endParaRPr lang="en-US" sz="2200" dirty="0"/>
+          </a:p>
+        </p:txBody>
+      </p:sp>
+      <p:sp>
+        <p:nvSpPr>
+          <p:cNvPr id="3" name="Shape 1"/>
+          <p:cNvSpPr/>
+          <p:nvPr/>
+        </p:nvSpPr>
+        <p:spPr>
+          <a:xfrm>
+            <a:off x="2706624" y="585216"/>
+            <a:ext cx="4206240" cy="475488"/>
+          </a:xfrm>
+          <a:prstGeom prst="roundRect">
+            <a:avLst>
+              <a:gd name="adj" fmla="val 19231"/>
+            </a:avLst>
+          </a:prstGeom>
+          <a:solidFill>
+            <a:srgbClr val="1A0E3A"/>
+          </a:solidFill>
+          <a:ln w="25400">
+            <a:solidFill>
+              <a:srgbClr val="6B4EFF"/>
+            </a:solidFill>
+            <a:prstDash val="solid"/>
+          </a:ln>
+        </p:spPr>
+      </p:sp>
+      <p:sp>
+        <p:nvSpPr>
+          <p:cNvPr id="4" name="Text 2"/>
+          <p:cNvSpPr txBox="1"/>
+          <p:nvPr/>
+        </p:nvSpPr>
+        <p:spPr>
+          <a:xfrm>
+            <a:off x="2706624" y="585216"/>
+            <a:ext cx="4206240" cy="475488"/>
+          </a:xfrm>
+          <a:prstGeom prst="rect">
+            <a:avLst/>
+          </a:prstGeom>
+          <a:noFill/>
+          <a:ln/>
+        </p:spPr>
+        <p:txBody>
+          <a:bodyPr wrap="square" lIns="0" tIns="0" rIns="0" bIns="0" rtlCol="0" anchor="ctr"/>
+          <a:lstStyle/>
+          <a:p>
+            <a:pPr algn="ctr" indent="0" marL="0">
+              <a:lnSpc>
+                <a:spcPct val="110000"/>
+              </a:lnSpc>
+              <a:buNone/>
+            </a:pPr>
+            <a:r>
+              <a:rPr lang="en-US" sz="1500" b="1" dirty="0">
+                <a:solidFill>
+                  <a:srgbClr val="6B4EFF"/>
+                </a:solidFill>
+                <a:latin typeface="Calibri" pitchFamily="34" charset="0"/>
+                <a:ea typeface="Calibri" pitchFamily="34" charset="-122"/>
+                <a:cs typeface="Calibri" pitchFamily="34" charset="-120"/>
+              </a:rPr>
+              <a:t>Claude Merchant Agent</a:t>
+            </a:r>
+            <a:endParaRPr lang="en-US" sz="1500" dirty="0"/>
+          </a:p>
+        </p:txBody>
+      </p:sp>
+      <p:sp>
+        <p:nvSpPr>
+          <p:cNvPr id="5" name="Shape 3"/>
+          <p:cNvSpPr/>
+          <p:nvPr/>
+        </p:nvSpPr>
+        <p:spPr>
+          <a:xfrm>
+            <a:off x="7114032" y="585216"/>
+            <a:ext cx="4206240" cy="475488"/>
+          </a:xfrm>
+          <a:prstGeom prst="roundRect">
+            <a:avLst>
+              <a:gd name="adj" fmla="val 19231"/>
+            </a:avLst>
+          </a:prstGeom>
+          <a:solidFill>
+            <a:srgbClr val="051B3A"/>
+          </a:solidFill>
+          <a:ln w="25400">
+            <a:solidFill>
+              <a:srgbClr val="1A73E8"/>
+            </a:solidFill>
+            <a:prstDash val="solid"/>
+          </a:ln>
+        </p:spPr>
+      </p:sp>
+      <p:sp>
+        <p:nvSpPr>
+          <p:cNvPr id="6" name="Text 4"/>
+          <p:cNvSpPr txBox="1"/>
+          <p:nvPr/>
+        </p:nvSpPr>
+        <p:spPr>
+          <a:xfrm>
+            <a:off x="7114032" y="585216"/>
+            <a:ext cx="4206240" cy="475488"/>
+          </a:xfrm>
+          <a:prstGeom prst="rect">
+            <a:avLst/>
+          </a:prstGeom>
+          <a:noFill/>
+          <a:ln/>
+        </p:spPr>
+        <p:txBody>
+          <a:bodyPr wrap="square" lIns="0" tIns="0" rIns="0" bIns="0" rtlCol="0" anchor="ctr"/>
+          <a:lstStyle/>
+          <a:p>
+            <a:pPr algn="ctr" indent="0" marL="0">
+              <a:lnSpc>
+                <a:spcPct val="110000"/>
+              </a:lnSpc>
+              <a:buNone/>
+            </a:pPr>
+            <a:r>
+              <a:rPr lang="en-US" sz="1500" b="1" dirty="0">
+                <a:solidFill>
+                  <a:srgbClr val="1A73E8"/>
+                </a:solidFill>
+                <a:latin typeface="Calibri" pitchFamily="34" charset="0"/>
+                <a:ea typeface="Calibri" pitchFamily="34" charset="-122"/>
+                <a:cs typeface="Calibri" pitchFamily="34" charset="-120"/>
+              </a:rPr>
+              <a:t>Gemini ADK Agent</a:t>
+            </a:r>
+            <a:endParaRPr lang="en-US" sz="1500" dirty="0"/>
+          </a:p>
+        </p:txBody>
+      </p:sp>
+      <p:sp>
+        <p:nvSpPr>
+          <p:cNvPr id="7" name="Text 5"/>
+          <p:cNvSpPr txBox="1"/>
+          <p:nvPr/>
+        </p:nvSpPr>
+        <p:spPr>
+          <a:xfrm>
+            <a:off x="329184" y="585216"/>
+            <a:ext cx="2286000" cy="475488"/>
+          </a:xfrm>
+          <a:prstGeom prst="rect">
+            <a:avLst/>
+          </a:prstGeom>
+          <a:noFill/>
+          <a:ln/>
+        </p:spPr>
+        <p:txBody>
+          <a:bodyPr wrap="square" lIns="0" tIns="0" rIns="0" bIns="0" rtlCol="0" anchor="ctr"/>
+          <a:lstStyle/>
+          <a:p>
+            <a:pPr algn="l" indent="0" marL="0">
+              <a:lnSpc>
+                <a:spcPct val="110000"/>
+              </a:lnSpc>
+              <a:buNone/>
+            </a:pPr>
+            <a:r>
+              <a:rPr lang="en-US" sz="1100" b="1" dirty="0">
+                <a:solidFill>
+                  <a:srgbClr val="A0B4C8"/>
+                </a:solidFill>
+                <a:latin typeface="Calibri" pitchFamily="34" charset="0"/>
+                <a:ea typeface="Calibri" pitchFamily="34" charset="-122"/>
+                <a:cs typeface="Calibri" pitchFamily="34" charset="-120"/>
+              </a:rPr>
+              <a:t>Dimension</a:t>
+            </a:r>
+            <a:endParaRPr lang="en-US" sz="1100" dirty="0"/>
+          </a:p>
+        </p:txBody>
+      </p:sp>
+      <p:sp>
+        <p:nvSpPr>
+          <p:cNvPr id="8" name="Shape 6"/>
+          <p:cNvSpPr/>
+          <p:nvPr/>
+        </p:nvSpPr>
+        <p:spPr>
+          <a:xfrm>
+            <a:off x="329184" y="1152144"/>
+            <a:ext cx="2286000" cy="530352"/>
+          </a:xfrm>
+          <a:prstGeom prst="roundRect">
+            <a:avLst>
+              <a:gd name="adj" fmla="val 6897"/>
+            </a:avLst>
+          </a:prstGeom>
+          <a:solidFill>
+            <a:srgbClr val="0A1620"/>
+          </a:solidFill>
+          <a:ln w="25400">
+            <a:solidFill>
+              <a:srgbClr val="2A3A50"/>
+            </a:solidFill>
+            <a:prstDash val="solid"/>
+          </a:ln>
+        </p:spPr>
+      </p:sp>
+      <p:sp>
+        <p:nvSpPr>
+          <p:cNvPr id="9" name="Text 7"/>
+          <p:cNvSpPr txBox="1"/>
+          <p:nvPr/>
+        </p:nvSpPr>
+        <p:spPr>
+          <a:xfrm>
+            <a:off x="384048" y="1152144"/>
+            <a:ext cx="2176272" cy="530352"/>
+          </a:xfrm>
+          <a:prstGeom prst="rect">
+            <a:avLst/>
+          </a:prstGeom>
+          <a:noFill/>
+          <a:ln/>
+        </p:spPr>
+        <p:txBody>
+          <a:bodyPr wrap="square" lIns="0" tIns="0" rIns="0" bIns="0" rtlCol="0" anchor="ctr"/>
+          <a:lstStyle/>
+          <a:p>
+            <a:pPr algn="l" indent="0" marL="0">
+              <a:lnSpc>
+                <a:spcPct val="110000"/>
+              </a:lnSpc>
+              <a:buNone/>
+            </a:pPr>
+            <a:r>
+              <a:rPr lang="en-US" sz="1000" b="1" dirty="0">
+                <a:solidFill>
+                  <a:srgbClr val="A0B4C8"/>
+                </a:solidFill>
+                <a:latin typeface="Calibri" pitchFamily="34" charset="0"/>
+                <a:ea typeface="Calibri" pitchFamily="34" charset="-122"/>
+                <a:cs typeface="Calibri" pitchFamily="34" charset="-120"/>
+              </a:rPr>
+              <a:t>Framework</a:t>
+            </a:r>
+            <a:endParaRPr lang="en-US" sz="1000" dirty="0"/>
+          </a:p>
+        </p:txBody>
+      </p:sp>
+      <p:sp>
+        <p:nvSpPr>
+          <p:cNvPr id="10" name="Shape 8"/>
+          <p:cNvSpPr/>
+          <p:nvPr/>
+        </p:nvSpPr>
+        <p:spPr>
+          <a:xfrm>
+            <a:off x="2706624" y="1152144"/>
+            <a:ext cx="4206240" cy="530352"/>
+          </a:xfrm>
+          <a:prstGeom prst="roundRect">
+            <a:avLst>
+              <a:gd name="adj" fmla="val 6897"/>
+            </a:avLst>
+          </a:prstGeom>
+          <a:solidFill>
+            <a:srgbClr val="0A1620"/>
+          </a:solidFill>
+          <a:ln w="25400">
+            <a:solidFill>
+              <a:srgbClr val="2A3A50"/>
+            </a:solidFill>
+            <a:prstDash val="solid"/>
+          </a:ln>
+        </p:spPr>
+      </p:sp>
+      <p:sp>
+        <p:nvSpPr>
+          <p:cNvPr id="11" name="Text 9"/>
+          <p:cNvSpPr txBox="1"/>
+          <p:nvPr/>
+        </p:nvSpPr>
+        <p:spPr>
+          <a:xfrm>
+            <a:off x="2779776" y="1152144"/>
+            <a:ext cx="4078224" cy="530352"/>
+          </a:xfrm>
+          <a:prstGeom prst="rect">
+            <a:avLst/>
+          </a:prstGeom>
+          <a:noFill/>
+          <a:ln/>
+        </p:spPr>
+        <p:txBody>
+          <a:bodyPr wrap="square" lIns="0" tIns="0" rIns="0" bIns="0" rtlCol="0" anchor="ctr"/>
+          <a:lstStyle/>
+          <a:p>
+            <a:pPr algn="l" indent="0" marL="0">
+              <a:lnSpc>
+                <a:spcPct val="110000"/>
+              </a:lnSpc>
+              <a:buNone/>
+            </a:pPr>
+            <a:r>
+              <a:rPr lang="en-US" sz="900" dirty="0">
+                <a:solidFill>
+                  <a:srgbClr val="A0B4C8"/>
+                </a:solidFill>
+                <a:latin typeface="Calibri" pitchFamily="34" charset="0"/>
+                <a:ea typeface="Calibri" pitchFamily="34" charset="-122"/>
+                <a:cs typeface="Calibri" pitchFamily="34" charset="-120"/>
+              </a:rPr>
+              <a:t>Anthropic SDK</a:t>
+            </a:r>
+            <a:endParaRPr lang="en-US" sz="900" dirty="0"/>
+          </a:p>
+          <a:p>
+            <a:pPr algn="l" indent="0" marL="0">
+              <a:lnSpc>
+                <a:spcPct val="110000"/>
+              </a:lnSpc>
+              <a:buNone/>
+            </a:pPr>
+            <a:r>
+              <a:rPr lang="en-US" sz="900" dirty="0">
+                <a:solidFill>
+                  <a:srgbClr val="A0B4C8"/>
+                </a:solidFill>
+                <a:latin typeface="Calibri" pitchFamily="34" charset="0"/>
+                <a:ea typeface="Calibri" pitchFamily="34" charset="-122"/>
+                <a:cs typeface="Calibri" pitchFamily="34" charset="-120"/>
+              </a:rPr>
+              <a:t>3 paths: Messages API · Agent SDK · Managed Agents</a:t>
+            </a:r>
+            <a:endParaRPr lang="en-US" sz="900" dirty="0"/>
+          </a:p>
+        </p:txBody>
+      </p:sp>
+      <p:sp>
+        <p:nvSpPr>
+          <p:cNvPr id="12" name="Shape 10"/>
+          <p:cNvSpPr/>
+          <p:nvPr/>
+        </p:nvSpPr>
+        <p:spPr>
+          <a:xfrm>
+            <a:off x="7114032" y="1152144"/>
+            <a:ext cx="4206240" cy="530352"/>
+          </a:xfrm>
+          <a:prstGeom prst="roundRect">
+            <a:avLst>
+              <a:gd name="adj" fmla="val 6897"/>
+            </a:avLst>
+          </a:prstGeom>
+          <a:solidFill>
+            <a:srgbClr val="0A1620"/>
+          </a:solidFill>
+          <a:ln w="25400">
+            <a:solidFill>
+              <a:srgbClr val="2A3A50"/>
+            </a:solidFill>
+            <a:prstDash val="solid"/>
+          </a:ln>
+        </p:spPr>
+      </p:sp>
+      <p:sp>
+        <p:nvSpPr>
+          <p:cNvPr id="13" name="Text 11"/>
+          <p:cNvSpPr txBox="1"/>
+          <p:nvPr/>
+        </p:nvSpPr>
+        <p:spPr>
+          <a:xfrm>
+            <a:off x="7187184" y="1152144"/>
+            <a:ext cx="4078224" cy="530352"/>
+          </a:xfrm>
+          <a:prstGeom prst="rect">
+            <a:avLst/>
+          </a:prstGeom>
+          <a:noFill/>
+          <a:ln/>
+        </p:spPr>
+        <p:txBody>
+          <a:bodyPr wrap="square" lIns="0" tIns="0" rIns="0" bIns="0" rtlCol="0" anchor="ctr"/>
+          <a:lstStyle/>
+          <a:p>
+            <a:pPr algn="l" indent="0" marL="0">
+              <a:lnSpc>
+                <a:spcPct val="110000"/>
+              </a:lnSpc>
+              <a:buNone/>
+            </a:pPr>
+            <a:r>
+              <a:rPr lang="en-US" sz="900" dirty="0">
+                <a:solidFill>
+                  <a:srgbClr val="A0B4C8"/>
+                </a:solidFill>
+                <a:latin typeface="Calibri" pitchFamily="34" charset="0"/>
+                <a:ea typeface="Calibri" pitchFamily="34" charset="-122"/>
+                <a:cs typeface="Calibri" pitchFamily="34" charset="-120"/>
+              </a:rPr>
+              <a:t>Google ADK v2.10.0</a:t>
+            </a:r>
+            <a:endParaRPr lang="en-US" sz="900" dirty="0"/>
+          </a:p>
+          <a:p>
+            <a:pPr algn="l" indent="0" marL="0">
+              <a:lnSpc>
+                <a:spcPct val="110000"/>
+              </a:lnSpc>
+              <a:buNone/>
+            </a:pPr>
+            <a:r>
+              <a:rPr lang="en-US" sz="900" dirty="0">
+                <a:solidFill>
+                  <a:srgbClr val="A0B4C8"/>
+                </a:solidFill>
+                <a:latin typeface="Calibri" pitchFamily="34" charset="0"/>
+                <a:ea typeface="Calibri" pitchFamily="34" charset="-122"/>
+                <a:cs typeface="Calibri" pitchFamily="34" charset="-120"/>
+              </a:rPr>
+              <a:t>Single path: Agent + Runner + InMemorySessionService</a:t>
+            </a:r>
+            <a:endParaRPr lang="en-US" sz="900" dirty="0"/>
+          </a:p>
+        </p:txBody>
+      </p:sp>
+      <p:sp>
+        <p:nvSpPr>
+          <p:cNvPr id="14" name="Shape 12"/>
+          <p:cNvSpPr/>
+          <p:nvPr/>
+        </p:nvSpPr>
+        <p:spPr>
+          <a:xfrm>
+            <a:off x="329184" y="1719072"/>
+            <a:ext cx="2286000" cy="530352"/>
+          </a:xfrm>
+          <a:prstGeom prst="roundRect">
+            <a:avLst>
+              <a:gd name="adj" fmla="val 6897"/>
+            </a:avLst>
+          </a:prstGeom>
+          <a:solidFill>
+            <a:srgbClr val="0D1E2C"/>
+          </a:solidFill>
+          <a:ln w="25400">
+            <a:solidFill>
+              <a:srgbClr val="2A3A50"/>
+            </a:solidFill>
+            <a:prstDash val="solid"/>
+          </a:ln>
+        </p:spPr>
+      </p:sp>
+      <p:sp>
+        <p:nvSpPr>
+          <p:cNvPr id="15" name="Text 13"/>
+          <p:cNvSpPr txBox="1"/>
+          <p:nvPr/>
+        </p:nvSpPr>
+        <p:spPr>
+          <a:xfrm>
+            <a:off x="384048" y="1719072"/>
+            <a:ext cx="2176272" cy="530352"/>
+          </a:xfrm>
+          <a:prstGeom prst="rect">
+            <a:avLst/>
+          </a:prstGeom>
+          <a:noFill/>
+          <a:ln/>
+        </p:spPr>
+        <p:txBody>
+          <a:bodyPr wrap="square" lIns="0" tIns="0" rIns="0" bIns="0" rtlCol="0" anchor="ctr"/>
+          <a:lstStyle/>
+          <a:p>
+            <a:pPr algn="l" indent="0" marL="0">
+              <a:lnSpc>
+                <a:spcPct val="110000"/>
+              </a:lnSpc>
+              <a:buNone/>
+            </a:pPr>
+            <a:r>
+              <a:rPr lang="en-US" sz="1000" b="1" dirty="0">
+                <a:solidFill>
+                  <a:srgbClr val="A0B4C8"/>
+                </a:solidFill>
+                <a:latin typeface="Calibri" pitchFamily="34" charset="0"/>
+                <a:ea typeface="Calibri" pitchFamily="34" charset="-122"/>
+                <a:cs typeface="Calibri" pitchFamily="34" charset="-120"/>
+              </a:rPr>
+              <a:t>Model</a:t>
+            </a:r>
+            <a:endParaRPr lang="en-US" sz="1000" dirty="0"/>
+          </a:p>
+        </p:txBody>
+      </p:sp>
+      <p:sp>
+        <p:nvSpPr>
+          <p:cNvPr id="16" name="Shape 14"/>
+          <p:cNvSpPr/>
+          <p:nvPr/>
+        </p:nvSpPr>
+        <p:spPr>
+          <a:xfrm>
+            <a:off x="2706624" y="1719072"/>
+            <a:ext cx="4206240" cy="530352"/>
+          </a:xfrm>
+          <a:prstGeom prst="roundRect">
+            <a:avLst>
+              <a:gd name="adj" fmla="val 6897"/>
+            </a:avLst>
+          </a:prstGeom>
+          <a:solidFill>
+            <a:srgbClr val="0D1E2C"/>
+          </a:solidFill>
+          <a:ln w="25400">
+            <a:solidFill>
+              <a:srgbClr val="2A3A50"/>
+            </a:solidFill>
+            <a:prstDash val="solid"/>
+          </a:ln>
+        </p:spPr>
+      </p:sp>
+      <p:sp>
+        <p:nvSpPr>
+          <p:cNvPr id="17" name="Text 15"/>
+          <p:cNvSpPr txBox="1"/>
+          <p:nvPr/>
+        </p:nvSpPr>
+        <p:spPr>
+          <a:xfrm>
+            <a:off x="2779776" y="1719072"/>
+            <a:ext cx="4078224" cy="530352"/>
+          </a:xfrm>
+          <a:prstGeom prst="rect">
+            <a:avLst/>
+          </a:prstGeom>
+          <a:noFill/>
+          <a:ln/>
+        </p:spPr>
+        <p:txBody>
+          <a:bodyPr wrap="square" lIns="0" tIns="0" rIns="0" bIns="0" rtlCol="0" anchor="ctr"/>
+          <a:lstStyle/>
+          <a:p>
+            <a:pPr algn="l" indent="0" marL="0">
+              <a:lnSpc>
+                <a:spcPct val="110000"/>
+              </a:lnSpc>
+              <a:buNone/>
+            </a:pPr>
+            <a:r>
+              <a:rPr lang="en-US" sz="900" dirty="0">
+                <a:solidFill>
+                  <a:srgbClr val="A0B4C8"/>
+                </a:solidFill>
+                <a:latin typeface="Calibri" pitchFamily="34" charset="0"/>
+                <a:ea typeface="Calibri" pitchFamily="34" charset="-122"/>
+                <a:cs typeface="Calibri" pitchFamily="34" charset="-120"/>
+              </a:rPr>
+              <a:t>Claude Sonnet 4.5 / Opus 4 / Haiku 4.5</a:t>
+            </a:r>
+            <a:endParaRPr lang="en-US" sz="900" dirty="0"/>
+          </a:p>
+          <a:p>
+            <a:pPr algn="l" indent="0" marL="0">
+              <a:lnSpc>
+                <a:spcPct val="110000"/>
+              </a:lnSpc>
+              <a:buNone/>
+            </a:pPr>
+            <a:r>
+              <a:rPr lang="en-US" sz="900" dirty="0">
+                <a:solidFill>
+                  <a:srgbClr val="A0B4C8"/>
+                </a:solidFill>
+                <a:latin typeface="Calibri" pitchFamily="34" charset="0"/>
+                <a:ea typeface="Calibri" pitchFamily="34" charset="-122"/>
+                <a:cs typeface="Calibri" pitchFamily="34" charset="-120"/>
+              </a:rPr>
+              <a:t>Swappable via config</a:t>
+            </a:r>
+            <a:endParaRPr lang="en-US" sz="900" dirty="0"/>
+          </a:p>
+        </p:txBody>
+      </p:sp>
+      <p:sp>
+        <p:nvSpPr>
+          <p:cNvPr id="18" name="Shape 16"/>
+          <p:cNvSpPr/>
+          <p:nvPr/>
+        </p:nvSpPr>
+        <p:spPr>
+          <a:xfrm>
+            <a:off x="7114032" y="1719072"/>
+            <a:ext cx="4206240" cy="530352"/>
+          </a:xfrm>
+          <a:prstGeom prst="roundRect">
+            <a:avLst>
+              <a:gd name="adj" fmla="val 6897"/>
+            </a:avLst>
+          </a:prstGeom>
+          <a:solidFill>
+            <a:srgbClr val="0D1E2C"/>
+          </a:solidFill>
+          <a:ln w="25400">
+            <a:solidFill>
+              <a:srgbClr val="2A3A50"/>
+            </a:solidFill>
+            <a:prstDash val="solid"/>
+          </a:ln>
+        </p:spPr>
+      </p:sp>
+      <p:sp>
+        <p:nvSpPr>
+          <p:cNvPr id="19" name="Text 17"/>
+          <p:cNvSpPr txBox="1"/>
+          <p:nvPr/>
+        </p:nvSpPr>
+        <p:spPr>
+          <a:xfrm>
+            <a:off x="7187184" y="1719072"/>
+            <a:ext cx="4078224" cy="530352"/>
+          </a:xfrm>
+          <a:prstGeom prst="rect">
+            <a:avLst/>
+          </a:prstGeom>
+          <a:noFill/>
+          <a:ln/>
+        </p:spPr>
+        <p:txBody>
+          <a:bodyPr wrap="square" lIns="0" tIns="0" rIns="0" bIns="0" rtlCol="0" anchor="ctr"/>
+          <a:lstStyle/>
+          <a:p>
+            <a:pPr algn="l" indent="0" marL="0">
+              <a:lnSpc>
+                <a:spcPct val="110000"/>
+              </a:lnSpc>
+              <a:buNone/>
+            </a:pPr>
+            <a:r>
+              <a:rPr lang="en-US" sz="900" dirty="0">
+                <a:solidFill>
+                  <a:srgbClr val="A0B4C8"/>
+                </a:solidFill>
+                <a:latin typeface="Calibri" pitchFamily="34" charset="0"/>
+                <a:ea typeface="Calibri" pitchFamily="34" charset="-122"/>
+                <a:cs typeface="Calibri" pitchFamily="34" charset="-120"/>
+              </a:rPr>
+              <a:t>Gemini Flash (gemini-2.0-flash)</a:t>
+            </a:r>
+            <a:endParaRPr lang="en-US" sz="900" dirty="0"/>
+          </a:p>
+          <a:p>
+            <a:pPr algn="l" indent="0" marL="0">
+              <a:lnSpc>
+                <a:spcPct val="110000"/>
+              </a:lnSpc>
+              <a:buNone/>
+            </a:pPr>
+            <a:r>
+              <a:rPr lang="en-US" sz="900" dirty="0">
+                <a:solidFill>
+                  <a:srgbClr val="A0B4C8"/>
+                </a:solidFill>
+                <a:latin typeface="Calibri" pitchFamily="34" charset="0"/>
+                <a:ea typeface="Calibri" pitchFamily="34" charset="-122"/>
+                <a:cs typeface="Calibri" pitchFamily="34" charset="-120"/>
+              </a:rPr>
+              <a:t>Same model for orchestrator + sub-agent</a:t>
+            </a:r>
+            <a:endParaRPr lang="en-US" sz="900" dirty="0"/>
+          </a:p>
+        </p:txBody>
+      </p:sp>
+      <p:sp>
+        <p:nvSpPr>
+          <p:cNvPr id="20" name="Shape 18"/>
+          <p:cNvSpPr/>
+          <p:nvPr/>
+        </p:nvSpPr>
+        <p:spPr>
+          <a:xfrm>
+            <a:off x="329184" y="2286000"/>
+            <a:ext cx="2286000" cy="530352"/>
+          </a:xfrm>
+          <a:prstGeom prst="roundRect">
+            <a:avLst>
+              <a:gd name="adj" fmla="val 6897"/>
+            </a:avLst>
+          </a:prstGeom>
+          <a:solidFill>
+            <a:srgbClr val="0A1620"/>
+          </a:solidFill>
+          <a:ln w="25400">
+            <a:solidFill>
+              <a:srgbClr val="2A3A50"/>
+            </a:solidFill>
+            <a:prstDash val="solid"/>
+          </a:ln>
+        </p:spPr>
+      </p:sp>
+      <p:sp>
+        <p:nvSpPr>
+          <p:cNvPr id="21" name="Text 19"/>
+          <p:cNvSpPr txBox="1"/>
+          <p:nvPr/>
+        </p:nvSpPr>
+        <p:spPr>
+          <a:xfrm>
+            <a:off x="384048" y="2286000"/>
+            <a:ext cx="2176272" cy="530352"/>
+          </a:xfrm>
+          <a:prstGeom prst="rect">
+            <a:avLst/>
+          </a:prstGeom>
+          <a:noFill/>
+          <a:ln/>
+        </p:spPr>
+        <p:txBody>
+          <a:bodyPr wrap="square" lIns="0" tIns="0" rIns="0" bIns="0" rtlCol="0" anchor="ctr"/>
+          <a:lstStyle/>
+          <a:p>
+            <a:pPr algn="l" indent="0" marL="0">
+              <a:lnSpc>
+                <a:spcPct val="110000"/>
+              </a:lnSpc>
+              <a:buNone/>
+            </a:pPr>
+            <a:r>
+              <a:rPr lang="en-US" sz="1000" b="1" dirty="0">
+                <a:solidFill>
+                  <a:srgbClr val="A0B4C8"/>
+                </a:solidFill>
+                <a:latin typeface="Calibri" pitchFamily="34" charset="0"/>
+                <a:ea typeface="Calibri" pitchFamily="34" charset="-122"/>
+                <a:cs typeface="Calibri" pitchFamily="34" charset="-120"/>
+              </a:rPr>
+              <a:t>Prompt</a:t>
+            </a:r>
+            <a:endParaRPr lang="en-US" sz="1000" dirty="0"/>
+          </a:p>
+          <a:p>
+            <a:pPr algn="l" indent="0" marL="0">
+              <a:lnSpc>
+                <a:spcPct val="110000"/>
+              </a:lnSpc>
+              <a:buNone/>
+            </a:pPr>
+            <a:r>
+              <a:rPr lang="en-US" sz="1000" b="1" dirty="0">
+                <a:solidFill>
+                  <a:srgbClr val="A0B4C8"/>
+                </a:solidFill>
+                <a:latin typeface="Calibri" pitchFamily="34" charset="0"/>
+                <a:ea typeface="Calibri" pitchFamily="34" charset="-122"/>
+                <a:cs typeface="Calibri" pitchFamily="34" charset="-120"/>
+              </a:rPr>
+              <a:t>Strategy</a:t>
+            </a:r>
+            <a:endParaRPr lang="en-US" sz="1000" dirty="0"/>
+          </a:p>
+        </p:txBody>
+      </p:sp>
+      <p:sp>
+        <p:nvSpPr>
+          <p:cNvPr id="22" name="Shape 20"/>
+          <p:cNvSpPr/>
+          <p:nvPr/>
+        </p:nvSpPr>
+        <p:spPr>
+          <a:xfrm>
+            <a:off x="2706624" y="2286000"/>
+            <a:ext cx="4206240" cy="530352"/>
+          </a:xfrm>
+          <a:prstGeom prst="roundRect">
+            <a:avLst>
+              <a:gd name="adj" fmla="val 6897"/>
+            </a:avLst>
+          </a:prstGeom>
+          <a:solidFill>
+            <a:srgbClr val="0A1620"/>
+          </a:solidFill>
+          <a:ln w="25400">
+            <a:solidFill>
+              <a:srgbClr val="2A3A50"/>
+            </a:solidFill>
+            <a:prstDash val="solid"/>
+          </a:ln>
+        </p:spPr>
+      </p:sp>
+      <p:sp>
+        <p:nvSpPr>
+          <p:cNvPr id="23" name="Text 21"/>
+          <p:cNvSpPr txBox="1"/>
+          <p:nvPr/>
+        </p:nvSpPr>
+        <p:spPr>
+          <a:xfrm>
+            <a:off x="2779776" y="2286000"/>
+            <a:ext cx="4078224" cy="530352"/>
+          </a:xfrm>
+          <a:prstGeom prst="rect">
+            <a:avLst/>
+          </a:prstGeom>
+          <a:noFill/>
+          <a:ln/>
+        </p:spPr>
+        <p:txBody>
+          <a:bodyPr wrap="square" lIns="0" tIns="0" rIns="0" bIns="0" rtlCol="0" anchor="ctr"/>
+          <a:lstStyle/>
+          <a:p>
+            <a:pPr algn="l" indent="0" marL="0">
+              <a:lnSpc>
+                <a:spcPct val="110000"/>
+              </a:lnSpc>
+              <a:buNone/>
+            </a:pPr>
+            <a:r>
+              <a:rPr lang="en-US" sz="900" dirty="0">
+                <a:solidFill>
+                  <a:srgbClr val="A0B4C8"/>
+                </a:solidFill>
+                <a:latin typeface="Calibri" pitchFamily="34" charset="0"/>
+                <a:ea typeface="Calibri" pitchFamily="34" charset="-122"/>
+                <a:cs typeface="Calibri" pitchFamily="34" charset="-120"/>
+              </a:rPr>
+              <a:t>Static system prompt (Anthropic prompt cache)</a:t>
+            </a:r>
+            <a:endParaRPr lang="en-US" sz="900" dirty="0"/>
+          </a:p>
+          <a:p>
+            <a:pPr algn="l" indent="0" marL="0">
+              <a:lnSpc>
+                <a:spcPct val="110000"/>
+              </a:lnSpc>
+              <a:buNone/>
+            </a:pPr>
+            <a:r>
+              <a:rPr lang="en-US" sz="900" dirty="0">
+                <a:solidFill>
+                  <a:srgbClr val="A0B4C8"/>
+                </a:solidFill>
+                <a:latin typeface="Calibri" pitchFamily="34" charset="0"/>
+                <a:ea typeface="Calibri" pitchFamily="34" charset="-122"/>
+                <a:cs typeface="Calibri" pitchFamily="34" charset="-120"/>
+              </a:rPr>
+              <a:t>+ fenced data block per turn (context_clock)</a:t>
+            </a:r>
+            <a:endParaRPr lang="en-US" sz="900" dirty="0"/>
+          </a:p>
+          <a:p>
+            <a:pPr algn="l" indent="0" marL="0">
+              <a:lnSpc>
+                <a:spcPct val="110000"/>
+              </a:lnSpc>
+              <a:buNone/>
+            </a:pPr>
+            <a:r>
+              <a:rPr lang="en-US" sz="900" dirty="0">
+                <a:solidFill>
+                  <a:srgbClr val="A0B4C8"/>
+                </a:solidFill>
+                <a:latin typeface="Calibri" pitchFamily="34" charset="0"/>
+                <a:ea typeface="Calibri" pitchFamily="34" charset="-122"/>
+                <a:cs typeface="Calibri" pitchFamily="34" charset="-120"/>
+              </a:rPr>
+              <a:t>Same bytes on every turn → cache hit every call</a:t>
+            </a:r>
+            <a:endParaRPr lang="en-US" sz="900" dirty="0"/>
+          </a:p>
+        </p:txBody>
+      </p:sp>
+      <p:sp>
+        <p:nvSpPr>
+          <p:cNvPr id="24" name="Shape 22"/>
+          <p:cNvSpPr/>
+          <p:nvPr/>
+        </p:nvSpPr>
+        <p:spPr>
+          <a:xfrm>
+            <a:off x="7114032" y="2286000"/>
+            <a:ext cx="4206240" cy="530352"/>
+          </a:xfrm>
+          <a:prstGeom prst="roundRect">
+            <a:avLst>
+              <a:gd name="adj" fmla="val 6897"/>
+            </a:avLst>
+          </a:prstGeom>
+          <a:solidFill>
+            <a:srgbClr val="05152A"/>
+          </a:solidFill>
+          <a:ln w="25400">
+            <a:solidFill>
+              <a:srgbClr val="1A73E8"/>
+            </a:solidFill>
+            <a:prstDash val="solid"/>
+          </a:ln>
+        </p:spPr>
+      </p:sp>
+      <p:sp>
+        <p:nvSpPr>
+          <p:cNvPr id="25" name="Text 23"/>
+          <p:cNvSpPr txBox="1"/>
+          <p:nvPr/>
+        </p:nvSpPr>
+        <p:spPr>
+          <a:xfrm>
+            <a:off x="7187184" y="2286000"/>
+            <a:ext cx="4078224" cy="530352"/>
+          </a:xfrm>
+          <a:prstGeom prst="rect">
+            <a:avLst/>
+          </a:prstGeom>
+          <a:noFill/>
+          <a:ln/>
+        </p:spPr>
+        <p:txBody>
+          <a:bodyPr wrap="square" lIns="0" tIns="0" rIns="0" bIns="0" rtlCol="0" anchor="ctr"/>
+          <a:lstStyle/>
+          <a:p>
+            <a:pPr algn="l" indent="0" marL="0">
+              <a:lnSpc>
+                <a:spcPct val="110000"/>
+              </a:lnSpc>
+              <a:buNone/>
+            </a:pPr>
+            <a:r>
+              <a:rPr lang="en-US" sz="900" dirty="0">
+                <a:solidFill>
+                  <a:srgbClr val="90C8FF"/>
+                </a:solidFill>
+                <a:latin typeface="Calibri" pitchFamily="34" charset="0"/>
+                <a:ea typeface="Calibri" pitchFamily="34" charset="-122"/>
+                <a:cs typeface="Calibri" pitchFamily="34" charset="-120"/>
+              </a:rPr>
+              <a:t>before_model_callback injects date + store</a:t>
+            </a:r>
+            <a:endParaRPr lang="en-US" sz="900" dirty="0"/>
+          </a:p>
+          <a:p>
+            <a:pPr algn="l" indent="0" marL="0">
+              <a:lnSpc>
+                <a:spcPct val="110000"/>
+              </a:lnSpc>
+              <a:buNone/>
+            </a:pPr>
+            <a:r>
+              <a:rPr lang="en-US" sz="900" dirty="0">
+                <a:solidFill>
+                  <a:srgbClr val="90C8FF"/>
+                </a:solidFill>
+                <a:latin typeface="Calibri" pitchFamily="34" charset="0"/>
+                <a:ea typeface="Calibri" pitchFamily="34" charset="-122"/>
+                <a:cs typeface="Calibri" pitchFamily="34" charset="-120"/>
+              </a:rPr>
+              <a:t>into system_instruction on EVERY model call</a:t>
+            </a:r>
+            <a:endParaRPr lang="en-US" sz="900" dirty="0"/>
+          </a:p>
+          <a:p>
+            <a:pPr algn="l" indent="0" marL="0">
+              <a:lnSpc>
+                <a:spcPct val="110000"/>
+              </a:lnSpc>
+              <a:buNone/>
+            </a:pPr>
+            <a:r>
+              <a:rPr lang="en-US" sz="900" dirty="0">
+                <a:solidFill>
+                  <a:srgbClr val="90C8FF"/>
+                </a:solidFill>
+                <a:latin typeface="Calibri" pitchFamily="34" charset="0"/>
+                <a:ea typeface="Calibri" pitchFamily="34" charset="-122"/>
+                <a:cs typeface="Calibri" pitchFamily="34" charset="-120"/>
+              </a:rPr>
+              <a:t>Framework hook — no manual string building</a:t>
+            </a:r>
+            <a:endParaRPr lang="en-US" sz="900" dirty="0"/>
+          </a:p>
+        </p:txBody>
+      </p:sp>
+      <p:sp>
+        <p:nvSpPr>
+          <p:cNvPr id="26" name="Shape 24"/>
+          <p:cNvSpPr/>
+          <p:nvPr/>
+        </p:nvSpPr>
+        <p:spPr>
+          <a:xfrm>
+            <a:off x="7114032" y="2286000"/>
+            <a:ext cx="201168" cy="530352"/>
+          </a:xfrm>
+          <a:prstGeom prst="roundRect">
+            <a:avLst>
+              <a:gd name="adj" fmla="val 18182"/>
+            </a:avLst>
+          </a:prstGeom>
+          <a:solidFill>
+            <a:srgbClr val="1A73E8"/>
+          </a:solidFill>
+          <a:ln w="25400">
+            <a:solidFill>
+              <a:srgbClr val="1A73E8"/>
+            </a:solidFill>
+            <a:prstDash val="solid"/>
+          </a:ln>
+        </p:spPr>
+      </p:sp>
+      <p:sp>
+        <p:nvSpPr>
+          <p:cNvPr id="27" name="Text 25"/>
+          <p:cNvSpPr txBox="1"/>
+          <p:nvPr/>
+        </p:nvSpPr>
+        <p:spPr>
+          <a:xfrm>
+            <a:off x="7114032" y="2286000"/>
+            <a:ext cx="201168" cy="530352"/>
+          </a:xfrm>
+          <a:prstGeom prst="rect">
+            <a:avLst/>
+          </a:prstGeom>
+          <a:noFill/>
+          <a:ln/>
+        </p:spPr>
+        <p:txBody>
+          <a:bodyPr wrap="square" lIns="0" tIns="0" rIns="0" bIns="0" rtlCol="0" anchor="ctr"/>
+          <a:lstStyle/>
+          <a:p>
+            <a:pPr algn="ctr" indent="0" marL="0">
+              <a:lnSpc>
+                <a:spcPct val="110000"/>
+              </a:lnSpc>
+              <a:buNone/>
+            </a:pPr>
+            <a:r>
+              <a:rPr lang="en-US" sz="900" b="1" dirty="0">
+                <a:solidFill>
+                  <a:srgbClr val="FFFFFF"/>
+                </a:solidFill>
+                <a:latin typeface="Calibri" pitchFamily="34" charset="0"/>
+                <a:ea typeface="Calibri" pitchFamily="34" charset="-122"/>
+                <a:cs typeface="Calibri" pitchFamily="34" charset="-120"/>
+              </a:rPr>
+              <a:t>★</a:t>
+            </a:r>
+            <a:endParaRPr lang="en-US" sz="900" dirty="0"/>
+          </a:p>
+        </p:txBody>
+      </p:sp>
+      <p:sp>
+        <p:nvSpPr>
+          <p:cNvPr id="28" name="Shape 26"/>
+          <p:cNvSpPr/>
+          <p:nvPr/>
+        </p:nvSpPr>
+        <p:spPr>
+          <a:xfrm>
+            <a:off x="329184" y="2852928"/>
+            <a:ext cx="2286000" cy="530352"/>
+          </a:xfrm>
+          <a:prstGeom prst="roundRect">
+            <a:avLst>
+              <a:gd name="adj" fmla="val 6897"/>
+            </a:avLst>
+          </a:prstGeom>
+          <a:solidFill>
+            <a:srgbClr val="0D1E2C"/>
+          </a:solidFill>
+          <a:ln w="25400">
+            <a:solidFill>
+              <a:srgbClr val="2A3A50"/>
+            </a:solidFill>
+            <a:prstDash val="solid"/>
+          </a:ln>
+        </p:spPr>
+      </p:sp>
+      <p:sp>
+        <p:nvSpPr>
+          <p:cNvPr id="29" name="Text 27"/>
+          <p:cNvSpPr txBox="1"/>
+          <p:nvPr/>
+        </p:nvSpPr>
+        <p:spPr>
+          <a:xfrm>
+            <a:off x="384048" y="2852928"/>
+            <a:ext cx="2176272" cy="530352"/>
+          </a:xfrm>
+          <a:prstGeom prst="rect">
+            <a:avLst/>
+          </a:prstGeom>
+          <a:noFill/>
+          <a:ln/>
+        </p:spPr>
+        <p:txBody>
+          <a:bodyPr wrap="square" lIns="0" tIns="0" rIns="0" bIns="0" rtlCol="0" anchor="ctr"/>
+          <a:lstStyle/>
+          <a:p>
+            <a:pPr algn="l" indent="0" marL="0">
+              <a:lnSpc>
+                <a:spcPct val="110000"/>
+              </a:lnSpc>
+              <a:buNone/>
+            </a:pPr>
+            <a:r>
+              <a:rPr lang="en-US" sz="1000" b="1" dirty="0">
+                <a:solidFill>
+                  <a:srgbClr val="A0B4C8"/>
+                </a:solidFill>
+                <a:latin typeface="Calibri" pitchFamily="34" charset="0"/>
+                <a:ea typeface="Calibri" pitchFamily="34" charset="-122"/>
+                <a:cs typeface="Calibri" pitchFamily="34" charset="-120"/>
+              </a:rPr>
+              <a:t>Session &amp;</a:t>
+            </a:r>
+            <a:endParaRPr lang="en-US" sz="1000" dirty="0"/>
+          </a:p>
+          <a:p>
+            <a:pPr algn="l" indent="0" marL="0">
+              <a:lnSpc>
+                <a:spcPct val="110000"/>
+              </a:lnSpc>
+              <a:buNone/>
+            </a:pPr>
+            <a:r>
+              <a:rPr lang="en-US" sz="1000" b="1" dirty="0">
+                <a:solidFill>
+                  <a:srgbClr val="A0B4C8"/>
+                </a:solidFill>
+                <a:latin typeface="Calibri" pitchFamily="34" charset="0"/>
+                <a:ea typeface="Calibri" pitchFamily="34" charset="-122"/>
+                <a:cs typeface="Calibri" pitchFamily="34" charset="-120"/>
+              </a:rPr>
+              <a:t>State</a:t>
+            </a:r>
+            <a:endParaRPr lang="en-US" sz="1000" dirty="0"/>
+          </a:p>
+        </p:txBody>
+      </p:sp>
+      <p:sp>
+        <p:nvSpPr>
+          <p:cNvPr id="30" name="Shape 28"/>
+          <p:cNvSpPr/>
+          <p:nvPr/>
+        </p:nvSpPr>
+        <p:spPr>
+          <a:xfrm>
+            <a:off x="2706624" y="2852928"/>
+            <a:ext cx="4206240" cy="530352"/>
+          </a:xfrm>
+          <a:prstGeom prst="roundRect">
+            <a:avLst>
+              <a:gd name="adj" fmla="val 6897"/>
+            </a:avLst>
+          </a:prstGeom>
+          <a:solidFill>
+            <a:srgbClr val="0D1E2C"/>
+          </a:solidFill>
+          <a:ln w="25400">
+            <a:solidFill>
+              <a:srgbClr val="2A3A50"/>
+            </a:solidFill>
+            <a:prstDash val="solid"/>
+          </a:ln>
+        </p:spPr>
+      </p:sp>
+      <p:sp>
+        <p:nvSpPr>
+          <p:cNvPr id="31" name="Text 29"/>
+          <p:cNvSpPr txBox="1"/>
+          <p:nvPr/>
+        </p:nvSpPr>
+        <p:spPr>
+          <a:xfrm>
+            <a:off x="2779776" y="2852928"/>
+            <a:ext cx="4078224" cy="530352"/>
+          </a:xfrm>
+          <a:prstGeom prst="rect">
+            <a:avLst/>
+          </a:prstGeom>
+          <a:noFill/>
+          <a:ln/>
+        </p:spPr>
+        <p:txBody>
+          <a:bodyPr wrap="square" lIns="0" tIns="0" rIns="0" bIns="0" rtlCol="0" anchor="ctr"/>
+          <a:lstStyle/>
+          <a:p>
+            <a:pPr algn="l" indent="0" marL="0">
+              <a:lnSpc>
+                <a:spcPct val="110000"/>
+              </a:lnSpc>
+              <a:buNone/>
+            </a:pPr>
+            <a:r>
+              <a:rPr lang="en-US" sz="900" dirty="0">
+                <a:solidFill>
+                  <a:srgbClr val="A0B4C8"/>
+                </a:solidFill>
+                <a:latin typeface="Calibri" pitchFamily="34" charset="0"/>
+                <a:ea typeface="Calibri" pitchFamily="34" charset="-122"/>
+                <a:cs typeface="Calibri" pitchFamily="34" charset="-120"/>
+              </a:rPr>
+              <a:t>MerchantSessionState passed per-request</a:t>
+            </a:r>
+            <a:endParaRPr lang="en-US" sz="900" dirty="0"/>
+          </a:p>
+          <a:p>
+            <a:pPr algn="l" indent="0" marL="0">
+              <a:lnSpc>
+                <a:spcPct val="110000"/>
+              </a:lnSpc>
+              <a:buNone/>
+            </a:pPr>
+            <a:r>
+              <a:rPr lang="en-US" sz="900" dirty="0">
+                <a:solidFill>
+                  <a:srgbClr val="A0B4C8"/>
+                </a:solidFill>
+                <a:latin typeface="Calibri" pitchFamily="34" charset="0"/>
+                <a:ea typeface="Calibri" pitchFamily="34" charset="-122"/>
+                <a:cs typeface="Calibri" pitchFamily="34" charset="-120"/>
+              </a:rPr>
+              <a:t>MERCHANT_FENCE provenance fence per session</a:t>
+            </a:r>
+            <a:endParaRPr lang="en-US" sz="900" dirty="0"/>
+          </a:p>
+          <a:p>
+            <a:pPr algn="l" indent="0" marL="0">
+              <a:lnSpc>
+                <a:spcPct val="110000"/>
+              </a:lnSpc>
+              <a:buNone/>
+            </a:pPr>
+            <a:r>
+              <a:rPr lang="en-US" sz="900" dirty="0">
+                <a:solidFill>
+                  <a:srgbClr val="A0B4C8"/>
+                </a:solidFill>
+                <a:latin typeface="Calibri" pitchFamily="34" charset="0"/>
+                <a:ea typeface="Calibri" pitchFamily="34" charset="-122"/>
+                <a:cs typeface="Calibri" pitchFamily="34" charset="-120"/>
+              </a:rPr>
+              <a:t>No cross-turn persistence by default</a:t>
+            </a:r>
+            <a:endParaRPr lang="en-US" sz="900" dirty="0"/>
+          </a:p>
+        </p:txBody>
+      </p:sp>
+      <p:sp>
+        <p:nvSpPr>
+          <p:cNvPr id="32" name="Shape 30"/>
+          <p:cNvSpPr/>
+          <p:nvPr/>
+        </p:nvSpPr>
+        <p:spPr>
+          <a:xfrm>
+            <a:off x="7114032" y="2852928"/>
+            <a:ext cx="4206240" cy="530352"/>
+          </a:xfrm>
+          <a:prstGeom prst="roundRect">
+            <a:avLst>
+              <a:gd name="adj" fmla="val 6897"/>
+            </a:avLst>
+          </a:prstGeom>
+          <a:solidFill>
+            <a:srgbClr val="05152A"/>
+          </a:solidFill>
+          <a:ln w="25400">
+            <a:solidFill>
+              <a:srgbClr val="1A73E8"/>
+            </a:solidFill>
+            <a:prstDash val="solid"/>
+          </a:ln>
+        </p:spPr>
+      </p:sp>
+      <p:sp>
+        <p:nvSpPr>
+          <p:cNvPr id="33" name="Text 31"/>
+          <p:cNvSpPr txBox="1"/>
+          <p:nvPr/>
+        </p:nvSpPr>
+        <p:spPr>
+          <a:xfrm>
+            <a:off x="7187184" y="2852928"/>
+            <a:ext cx="4078224" cy="530352"/>
+          </a:xfrm>
+          <a:prstGeom prst="rect">
+            <a:avLst/>
+          </a:prstGeom>
+          <a:noFill/>
+          <a:ln/>
+        </p:spPr>
+        <p:txBody>
+          <a:bodyPr wrap="square" lIns="0" tIns="0" rIns="0" bIns="0" rtlCol="0" anchor="ctr"/>
+          <a:lstStyle/>
+          <a:p>
+            <a:pPr algn="l" indent="0" marL="0">
+              <a:lnSpc>
+                <a:spcPct val="110000"/>
+              </a:lnSpc>
+              <a:buNone/>
+            </a:pPr>
+            <a:r>
+              <a:rPr lang="en-US" sz="900" dirty="0">
+                <a:solidFill>
+                  <a:srgbClr val="90C8FF"/>
+                </a:solidFill>
+                <a:latin typeface="Calibri" pitchFamily="34" charset="0"/>
+                <a:ea typeface="Calibri" pitchFamily="34" charset="-122"/>
+                <a:cs typeface="Calibri" pitchFamily="34" charset="-120"/>
+              </a:rPr>
+              <a:t>InMemorySessionService (framework-native)</a:t>
+            </a:r>
+            <a:endParaRPr lang="en-US" sz="900" dirty="0"/>
+          </a:p>
+          <a:p>
+            <a:pPr algn="l" indent="0" marL="0">
+              <a:lnSpc>
+                <a:spcPct val="110000"/>
+              </a:lnSpc>
+              <a:buNone/>
+            </a:pPr>
+            <a:r>
+              <a:rPr lang="en-US" sz="900" dirty="0">
+                <a:solidFill>
+                  <a:srgbClr val="90C8FF"/>
+                </a:solidFill>
+                <a:latin typeface="Calibri" pitchFamily="34" charset="0"/>
+                <a:ea typeface="Calibri" pitchFamily="34" charset="-122"/>
+                <a:cs typeface="Calibri" pitchFamily="34" charset="-120"/>
+              </a:rPr>
+              <a:t>session.state dict persists across turns</a:t>
+            </a:r>
+            <a:endParaRPr lang="en-US" sz="900" dirty="0"/>
+          </a:p>
+          <a:p>
+            <a:pPr algn="l" indent="0" marL="0">
+              <a:lnSpc>
+                <a:spcPct val="110000"/>
+              </a:lnSpc>
+              <a:buNone/>
+            </a:pPr>
+            <a:r>
+              <a:rPr lang="en-US" sz="900" dirty="0">
+                <a:solidFill>
+                  <a:srgbClr val="90C8FF"/>
+                </a:solidFill>
+                <a:latin typeface="Calibri" pitchFamily="34" charset="0"/>
+                <a:ea typeface="Calibri" pitchFamily="34" charset="-122"/>
+                <a:cs typeface="Calibri" pitchFamily="34" charset="-120"/>
+              </a:rPr>
+              <a:t>prime_session() pre-fills state at login</a:t>
+            </a:r>
+            <a:endParaRPr lang="en-US" sz="900" dirty="0"/>
+          </a:p>
+        </p:txBody>
+      </p:sp>
+      <p:sp>
+        <p:nvSpPr>
+          <p:cNvPr id="34" name="Shape 32"/>
+          <p:cNvSpPr/>
+          <p:nvPr/>
+        </p:nvSpPr>
+        <p:spPr>
+          <a:xfrm>
+            <a:off x="7114032" y="2852928"/>
+            <a:ext cx="201168" cy="530352"/>
+          </a:xfrm>
+          <a:prstGeom prst="roundRect">
+            <a:avLst>
+              <a:gd name="adj" fmla="val 18182"/>
+            </a:avLst>
+          </a:prstGeom>
+          <a:solidFill>
+            <a:srgbClr val="1A73E8"/>
+          </a:solidFill>
+          <a:ln w="25400">
+            <a:solidFill>
+              <a:srgbClr val="1A73E8"/>
+            </a:solidFill>
+            <a:prstDash val="solid"/>
+          </a:ln>
+        </p:spPr>
+      </p:sp>
+      <p:sp>
+        <p:nvSpPr>
+          <p:cNvPr id="35" name="Text 33"/>
+          <p:cNvSpPr txBox="1"/>
+          <p:nvPr/>
+        </p:nvSpPr>
+        <p:spPr>
+          <a:xfrm>
+            <a:off x="7114032" y="2852928"/>
+            <a:ext cx="201168" cy="530352"/>
+          </a:xfrm>
+          <a:prstGeom prst="rect">
+            <a:avLst/>
+          </a:prstGeom>
+          <a:noFill/>
+          <a:ln/>
+        </p:spPr>
+        <p:txBody>
+          <a:bodyPr wrap="square" lIns="0" tIns="0" rIns="0" bIns="0" rtlCol="0" anchor="ctr"/>
+          <a:lstStyle/>
+          <a:p>
+            <a:pPr algn="ctr" indent="0" marL="0">
+              <a:lnSpc>
+                <a:spcPct val="110000"/>
+              </a:lnSpc>
+              <a:buNone/>
+            </a:pPr>
+            <a:r>
+              <a:rPr lang="en-US" sz="900" b="1" dirty="0">
+                <a:solidFill>
+                  <a:srgbClr val="FFFFFF"/>
+                </a:solidFill>
+                <a:latin typeface="Calibri" pitchFamily="34" charset="0"/>
+                <a:ea typeface="Calibri" pitchFamily="34" charset="-122"/>
+                <a:cs typeface="Calibri" pitchFamily="34" charset="-120"/>
+              </a:rPr>
+              <a:t>★</a:t>
+            </a:r>
+            <a:endParaRPr lang="en-US" sz="900" dirty="0"/>
+          </a:p>
+        </p:txBody>
+      </p:sp>
+      <p:sp>
+        <p:nvSpPr>
+          <p:cNvPr id="36" name="Shape 34"/>
+          <p:cNvSpPr/>
+          <p:nvPr/>
+        </p:nvSpPr>
+        <p:spPr>
+          <a:xfrm>
+            <a:off x="329184" y="3419856"/>
+            <a:ext cx="2286000" cy="530352"/>
+          </a:xfrm>
+          <a:prstGeom prst="roundRect">
+            <a:avLst>
+              <a:gd name="adj" fmla="val 6897"/>
+            </a:avLst>
+          </a:prstGeom>
+          <a:solidFill>
+            <a:srgbClr val="0A1620"/>
+          </a:solidFill>
+          <a:ln w="25400">
+            <a:solidFill>
+              <a:srgbClr val="2A3A50"/>
+            </a:solidFill>
+            <a:prstDash val="solid"/>
+          </a:ln>
+        </p:spPr>
+      </p:sp>
+      <p:sp>
+        <p:nvSpPr>
+          <p:cNvPr id="37" name="Text 35"/>
+          <p:cNvSpPr txBox="1"/>
+          <p:nvPr/>
+        </p:nvSpPr>
+        <p:spPr>
+          <a:xfrm>
+            <a:off x="384048" y="3419856"/>
+            <a:ext cx="2176272" cy="530352"/>
+          </a:xfrm>
+          <a:prstGeom prst="rect">
+            <a:avLst/>
+          </a:prstGeom>
+          <a:noFill/>
+          <a:ln/>
+        </p:spPr>
+        <p:txBody>
+          <a:bodyPr wrap="square" lIns="0" tIns="0" rIns="0" bIns="0" rtlCol="0" anchor="ctr"/>
+          <a:lstStyle/>
+          <a:p>
+            <a:pPr algn="l" indent="0" marL="0">
+              <a:lnSpc>
+                <a:spcPct val="110000"/>
+              </a:lnSpc>
+              <a:buNone/>
+            </a:pPr>
+            <a:r>
+              <a:rPr lang="en-US" sz="1000" b="1" dirty="0">
+                <a:solidFill>
+                  <a:srgbClr val="A0B4C8"/>
+                </a:solidFill>
+                <a:latin typeface="Calibri" pitchFamily="34" charset="0"/>
+                <a:ea typeface="Calibri" pitchFamily="34" charset="-122"/>
+                <a:cs typeface="Calibri" pitchFamily="34" charset="-120"/>
+              </a:rPr>
+              <a:t>Multi-Agent</a:t>
+            </a:r>
+            <a:endParaRPr lang="en-US" sz="1000" dirty="0"/>
+          </a:p>
+          <a:p>
+            <a:pPr algn="l" indent="0" marL="0">
+              <a:lnSpc>
+                <a:spcPct val="110000"/>
+              </a:lnSpc>
+              <a:buNone/>
+            </a:pPr>
+            <a:r>
+              <a:rPr lang="en-US" sz="1000" b="1" dirty="0">
+                <a:solidFill>
+                  <a:srgbClr val="A0B4C8"/>
+                </a:solidFill>
+                <a:latin typeface="Calibri" pitchFamily="34" charset="0"/>
+                <a:ea typeface="Calibri" pitchFamily="34" charset="-122"/>
+                <a:cs typeface="Calibri" pitchFamily="34" charset="-120"/>
+              </a:rPr>
+              <a:t>Routing</a:t>
+            </a:r>
+            <a:endParaRPr lang="en-US" sz="1000" dirty="0"/>
+          </a:p>
+        </p:txBody>
+      </p:sp>
+      <p:sp>
+        <p:nvSpPr>
+          <p:cNvPr id="38" name="Shape 36"/>
+          <p:cNvSpPr/>
+          <p:nvPr/>
+        </p:nvSpPr>
+        <p:spPr>
+          <a:xfrm>
+            <a:off x="2706624" y="3419856"/>
+            <a:ext cx="4206240" cy="530352"/>
+          </a:xfrm>
+          <a:prstGeom prst="roundRect">
+            <a:avLst>
+              <a:gd name="adj" fmla="val 6897"/>
+            </a:avLst>
+          </a:prstGeom>
+          <a:solidFill>
+            <a:srgbClr val="0A1620"/>
+          </a:solidFill>
+          <a:ln w="25400">
+            <a:solidFill>
+              <a:srgbClr val="2A3A50"/>
+            </a:solidFill>
+            <a:prstDash val="solid"/>
+          </a:ln>
+        </p:spPr>
+      </p:sp>
+      <p:sp>
+        <p:nvSpPr>
+          <p:cNvPr id="39" name="Text 37"/>
+          <p:cNvSpPr txBox="1"/>
+          <p:nvPr/>
+        </p:nvSpPr>
+        <p:spPr>
+          <a:xfrm>
+            <a:off x="2779776" y="3419856"/>
+            <a:ext cx="4078224" cy="530352"/>
+          </a:xfrm>
+          <a:prstGeom prst="rect">
+            <a:avLst/>
+          </a:prstGeom>
+          <a:noFill/>
+          <a:ln/>
+        </p:spPr>
+        <p:txBody>
+          <a:bodyPr wrap="square" lIns="0" tIns="0" rIns="0" bIns="0" rtlCol="0" anchor="ctr"/>
+          <a:lstStyle/>
+          <a:p>
+            <a:pPr algn="l" indent="0" marL="0">
+              <a:lnSpc>
+                <a:spcPct val="110000"/>
+              </a:lnSpc>
+              <a:buNone/>
+            </a:pPr>
+            <a:r>
+              <a:rPr lang="en-US" sz="900" dirty="0">
+                <a:solidFill>
+                  <a:srgbClr val="A0B4C8"/>
+                </a:solidFill>
+                <a:latin typeface="Calibri" pitchFamily="34" charset="0"/>
+                <a:ea typeface="Calibri" pitchFamily="34" charset="-122"/>
+                <a:cs typeface="Calibri" pitchFamily="34" charset="-120"/>
+              </a:rPr>
+              <a:t>AgentTool (explicit tool declaration)</a:t>
+            </a:r>
+            <a:endParaRPr lang="en-US" sz="900" dirty="0"/>
+          </a:p>
+          <a:p>
+            <a:pPr algn="l" indent="0" marL="0">
+              <a:lnSpc>
+                <a:spcPct val="110000"/>
+              </a:lnSpc>
+              <a:buNone/>
+            </a:pPr>
+            <a:r>
+              <a:rPr lang="en-US" sz="900" dirty="0">
+                <a:solidFill>
+                  <a:srgbClr val="A0B4C8"/>
+                </a:solidFill>
+                <a:latin typeface="Calibri" pitchFamily="34" charset="0"/>
+                <a:ea typeface="Calibri" pitchFamily="34" charset="-122"/>
+                <a:cs typeface="Calibri" pitchFamily="34" charset="-120"/>
+              </a:rPr>
+              <a:t>Or Managed Agents system (hosted)</a:t>
+            </a:r>
+            <a:endParaRPr lang="en-US" sz="900" dirty="0"/>
+          </a:p>
+          <a:p>
+            <a:pPr algn="l" indent="0" marL="0">
+              <a:lnSpc>
+                <a:spcPct val="110000"/>
+              </a:lnSpc>
+              <a:buNone/>
+            </a:pPr>
+            <a:r>
+              <a:rPr lang="en-US" sz="900" dirty="0">
+                <a:solidFill>
+                  <a:srgbClr val="A0B4C8"/>
+                </a:solidFill>
+                <a:latin typeface="Calibri" pitchFamily="34" charset="0"/>
+                <a:ea typeface="Calibri" pitchFamily="34" charset="-122"/>
+                <a:cs typeface="Calibri" pitchFamily="34" charset="-120"/>
+              </a:rPr>
+              <a:t>Developer wires routing manually</a:t>
+            </a:r>
+            <a:endParaRPr lang="en-US" sz="900" dirty="0"/>
+          </a:p>
+        </p:txBody>
+      </p:sp>
+      <p:sp>
+        <p:nvSpPr>
+          <p:cNvPr id="40" name="Shape 38"/>
+          <p:cNvSpPr/>
+          <p:nvPr/>
+        </p:nvSpPr>
+        <p:spPr>
+          <a:xfrm>
+            <a:off x="7114032" y="3419856"/>
+            <a:ext cx="4206240" cy="530352"/>
+          </a:xfrm>
+          <a:prstGeom prst="roundRect">
+            <a:avLst>
+              <a:gd name="adj" fmla="val 6897"/>
+            </a:avLst>
+          </a:prstGeom>
+          <a:solidFill>
+            <a:srgbClr val="05152A"/>
+          </a:solidFill>
+          <a:ln w="25400">
+            <a:solidFill>
+              <a:srgbClr val="1A73E8"/>
+            </a:solidFill>
+            <a:prstDash val="solid"/>
+          </a:ln>
+        </p:spPr>
+      </p:sp>
+      <p:sp>
+        <p:nvSpPr>
+          <p:cNvPr id="41" name="Text 39"/>
+          <p:cNvSpPr txBox="1"/>
+          <p:nvPr/>
+        </p:nvSpPr>
+        <p:spPr>
+          <a:xfrm>
+            <a:off x="7187184" y="3419856"/>
+            <a:ext cx="4078224" cy="530352"/>
+          </a:xfrm>
+          <a:prstGeom prst="rect">
+            <a:avLst/>
+          </a:prstGeom>
+          <a:noFill/>
+          <a:ln/>
+        </p:spPr>
+        <p:txBody>
+          <a:bodyPr wrap="square" lIns="0" tIns="0" rIns="0" bIns="0" rtlCol="0" anchor="ctr"/>
+          <a:lstStyle/>
+          <a:p>
+            <a:pPr algn="l" indent="0" marL="0">
+              <a:lnSpc>
+                <a:spcPct val="110000"/>
+              </a:lnSpc>
+              <a:buNone/>
+            </a:pPr>
+            <a:r>
+              <a:rPr lang="en-US" sz="900" dirty="0">
+                <a:solidFill>
+                  <a:srgbClr val="90C8FF"/>
+                </a:solidFill>
+                <a:latin typeface="Calibri" pitchFamily="34" charset="0"/>
+                <a:ea typeface="Calibri" pitchFamily="34" charset="-122"/>
+                <a:cs typeface="Calibri" pitchFamily="34" charset="-120"/>
+              </a:rPr>
+              <a:t>sub_agents=[merch_agent]</a:t>
+            </a:r>
+            <a:endParaRPr lang="en-US" sz="900" dirty="0"/>
+          </a:p>
+          <a:p>
+            <a:pPr algn="l" indent="0" marL="0">
+              <a:lnSpc>
+                <a:spcPct val="110000"/>
+              </a:lnSpc>
+              <a:buNone/>
+            </a:pPr>
+            <a:r>
+              <a:rPr lang="en-US" sz="900" dirty="0">
+                <a:solidFill>
+                  <a:srgbClr val="90C8FF"/>
+                </a:solidFill>
+                <a:latin typeface="Calibri" pitchFamily="34" charset="0"/>
+                <a:ea typeface="Calibri" pitchFamily="34" charset="-122"/>
+                <a:cs typeface="Calibri" pitchFamily="34" charset="-120"/>
+              </a:rPr>
+              <a:t>ADK auto-creates transfer_to_merchandising_agent</a:t>
+            </a:r>
+            <a:endParaRPr lang="en-US" sz="900" dirty="0"/>
+          </a:p>
+          <a:p>
+            <a:pPr algn="l" indent="0" marL="0">
+              <a:lnSpc>
+                <a:spcPct val="110000"/>
+              </a:lnSpc>
+              <a:buNone/>
+            </a:pPr>
+            <a:r>
+              <a:rPr lang="en-US" sz="900" dirty="0">
+                <a:solidFill>
+                  <a:srgbClr val="90C8FF"/>
+                </a:solidFill>
+                <a:latin typeface="Calibri" pitchFamily="34" charset="0"/>
+                <a:ea typeface="Calibri" pitchFamily="34" charset="-122"/>
+                <a:cs typeface="Calibri" pitchFamily="34" charset="-120"/>
+              </a:rPr>
+              <a:t>Framework handles routing — zero boilerplate</a:t>
+            </a:r>
+            <a:endParaRPr lang="en-US" sz="900" dirty="0"/>
+          </a:p>
+        </p:txBody>
+      </p:sp>
+      <p:sp>
+        <p:nvSpPr>
+          <p:cNvPr id="42" name="Shape 40"/>
+          <p:cNvSpPr/>
+          <p:nvPr/>
+        </p:nvSpPr>
+        <p:spPr>
+          <a:xfrm>
+            <a:off x="7114032" y="3419856"/>
+            <a:ext cx="201168" cy="530352"/>
+          </a:xfrm>
+          <a:prstGeom prst="roundRect">
+            <a:avLst>
+              <a:gd name="adj" fmla="val 18182"/>
+            </a:avLst>
+          </a:prstGeom>
+          <a:solidFill>
+            <a:srgbClr val="1A73E8"/>
+          </a:solidFill>
+          <a:ln w="25400">
+            <a:solidFill>
+              <a:srgbClr val="1A73E8"/>
+            </a:solidFill>
+            <a:prstDash val="solid"/>
+          </a:ln>
+        </p:spPr>
+      </p:sp>
+      <p:sp>
+        <p:nvSpPr>
+          <p:cNvPr id="43" name="Text 41"/>
+          <p:cNvSpPr txBox="1"/>
+          <p:nvPr/>
+        </p:nvSpPr>
+        <p:spPr>
+          <a:xfrm>
+            <a:off x="7114032" y="3419856"/>
+            <a:ext cx="201168" cy="530352"/>
+          </a:xfrm>
+          <a:prstGeom prst="rect">
+            <a:avLst/>
+          </a:prstGeom>
+          <a:noFill/>
+          <a:ln/>
+        </p:spPr>
+        <p:txBody>
+          <a:bodyPr wrap="square" lIns="0" tIns="0" rIns="0" bIns="0" rtlCol="0" anchor="ctr"/>
+          <a:lstStyle/>
+          <a:p>
+            <a:pPr algn="ctr" indent="0" marL="0">
+              <a:lnSpc>
+                <a:spcPct val="110000"/>
+              </a:lnSpc>
+              <a:buNone/>
+            </a:pPr>
+            <a:r>
+              <a:rPr lang="en-US" sz="900" b="1" dirty="0">
+                <a:solidFill>
+                  <a:srgbClr val="FFFFFF"/>
+                </a:solidFill>
+                <a:latin typeface="Calibri" pitchFamily="34" charset="0"/>
+                <a:ea typeface="Calibri" pitchFamily="34" charset="-122"/>
+                <a:cs typeface="Calibri" pitchFamily="34" charset="-120"/>
+              </a:rPr>
+              <a:t>★</a:t>
+            </a:r>
+            <a:endParaRPr lang="en-US" sz="900" dirty="0"/>
+          </a:p>
+        </p:txBody>
+      </p:sp>
+      <p:sp>
+        <p:nvSpPr>
+          <p:cNvPr id="44" name="Shape 42"/>
+          <p:cNvSpPr/>
+          <p:nvPr/>
+        </p:nvSpPr>
+        <p:spPr>
+          <a:xfrm>
+            <a:off x="329184" y="3986784"/>
+            <a:ext cx="2286000" cy="530352"/>
+          </a:xfrm>
+          <a:prstGeom prst="roundRect">
+            <a:avLst>
+              <a:gd name="adj" fmla="val 6897"/>
+            </a:avLst>
+          </a:prstGeom>
+          <a:solidFill>
+            <a:srgbClr val="0D1E2C"/>
+          </a:solidFill>
+          <a:ln w="25400">
+            <a:solidFill>
+              <a:srgbClr val="2A3A50"/>
+            </a:solidFill>
+            <a:prstDash val="solid"/>
+          </a:ln>
+        </p:spPr>
+      </p:sp>
+      <p:sp>
+        <p:nvSpPr>
+          <p:cNvPr id="45" name="Text 43"/>
+          <p:cNvSpPr txBox="1"/>
+          <p:nvPr/>
+        </p:nvSpPr>
+        <p:spPr>
+          <a:xfrm>
+            <a:off x="384048" y="3986784"/>
+            <a:ext cx="2176272" cy="530352"/>
+          </a:xfrm>
+          <a:prstGeom prst="rect">
+            <a:avLst/>
+          </a:prstGeom>
+          <a:noFill/>
+          <a:ln/>
+        </p:spPr>
+        <p:txBody>
+          <a:bodyPr wrap="square" lIns="0" tIns="0" rIns="0" bIns="0" rtlCol="0" anchor="ctr"/>
+          <a:lstStyle/>
+          <a:p>
+            <a:pPr algn="l" indent="0" marL="0">
+              <a:lnSpc>
+                <a:spcPct val="110000"/>
+              </a:lnSpc>
+              <a:buNone/>
+            </a:pPr>
+            <a:r>
+              <a:rPr lang="en-US" sz="1000" b="1" dirty="0">
+                <a:solidFill>
+                  <a:srgbClr val="A0B4C8"/>
+                </a:solidFill>
+                <a:latin typeface="Calibri" pitchFamily="34" charset="0"/>
+                <a:ea typeface="Calibri" pitchFamily="34" charset="-122"/>
+                <a:cs typeface="Calibri" pitchFamily="34" charset="-120"/>
+              </a:rPr>
+              <a:t>Write Safety</a:t>
+            </a:r>
+            <a:endParaRPr lang="en-US" sz="1000" dirty="0"/>
+          </a:p>
+          <a:p>
+            <a:pPr algn="l" indent="0" marL="0">
+              <a:lnSpc>
+                <a:spcPct val="110000"/>
+              </a:lnSpc>
+              <a:buNone/>
+            </a:pPr>
+            <a:r>
+              <a:rPr lang="en-US" sz="1000" b="1" dirty="0">
+                <a:solidFill>
+                  <a:srgbClr val="A0B4C8"/>
+                </a:solidFill>
+                <a:latin typeface="Calibri" pitchFamily="34" charset="0"/>
+                <a:ea typeface="Calibri" pitchFamily="34" charset="-122"/>
+                <a:cs typeface="Calibri" pitchFamily="34" charset="-120"/>
+              </a:rPr>
+              <a:t>&amp; Gates</a:t>
+            </a:r>
+            <a:endParaRPr lang="en-US" sz="1000" dirty="0"/>
+          </a:p>
+        </p:txBody>
+      </p:sp>
+      <p:sp>
+        <p:nvSpPr>
+          <p:cNvPr id="46" name="Shape 44"/>
+          <p:cNvSpPr/>
+          <p:nvPr/>
+        </p:nvSpPr>
+        <p:spPr>
+          <a:xfrm>
+            <a:off x="2706624" y="3986784"/>
+            <a:ext cx="4206240" cy="530352"/>
+          </a:xfrm>
+          <a:prstGeom prst="roundRect">
+            <a:avLst>
+              <a:gd name="adj" fmla="val 6897"/>
+            </a:avLst>
+          </a:prstGeom>
+          <a:solidFill>
+            <a:srgbClr val="1A0E3A"/>
+          </a:solidFill>
+          <a:ln w="25400">
+            <a:solidFill>
+              <a:srgbClr val="6B4EFF"/>
+            </a:solidFill>
+            <a:prstDash val="solid"/>
+          </a:ln>
+        </p:spPr>
+      </p:sp>
+      <p:sp>
+        <p:nvSpPr>
+          <p:cNvPr id="47" name="Text 45"/>
+          <p:cNvSpPr txBox="1"/>
+          <p:nvPr/>
+        </p:nvSpPr>
+        <p:spPr>
+          <a:xfrm>
+            <a:off x="2779776" y="3986784"/>
+            <a:ext cx="4078224" cy="530352"/>
+          </a:xfrm>
+          <a:prstGeom prst="rect">
+            <a:avLst/>
+          </a:prstGeom>
+          <a:noFill/>
+          <a:ln/>
+        </p:spPr>
+        <p:txBody>
+          <a:bodyPr wrap="square" lIns="0" tIns="0" rIns="0" bIns="0" rtlCol="0" anchor="ctr"/>
+          <a:lstStyle/>
+          <a:p>
+            <a:pPr algn="l" indent="0" marL="0">
+              <a:lnSpc>
+                <a:spcPct val="110000"/>
+              </a:lnSpc>
+              <a:buNone/>
+            </a:pPr>
+            <a:r>
+              <a:rPr lang="en-US" sz="900" dirty="0">
+                <a:solidFill>
+                  <a:srgbClr val="C0A8FF"/>
+                </a:solidFill>
+                <a:latin typeface="Calibri" pitchFamily="34" charset="0"/>
+                <a:ea typeface="Calibri" pitchFamily="34" charset="-122"/>
+                <a:cs typeface="Calibri" pitchFamily="34" charset="-120"/>
+              </a:rPr>
+              <a:t>4 explicit gates in gates.py:</a:t>
+            </a:r>
+            <a:endParaRPr lang="en-US" sz="900" dirty="0"/>
+          </a:p>
+          <a:p>
+            <a:pPr algn="l" indent="0" marL="0">
+              <a:lnSpc>
+                <a:spcPct val="110000"/>
+              </a:lnSpc>
+              <a:buNone/>
+            </a:pPr>
+            <a:r>
+              <a:rPr lang="en-US" sz="900" dirty="0">
+                <a:solidFill>
+                  <a:srgbClr val="C0A8FF"/>
+                </a:solidFill>
+                <a:latin typeface="Calibri" pitchFamily="34" charset="0"/>
+                <a:ea typeface="Calibri" pitchFamily="34" charset="-122"/>
+                <a:cs typeface="Calibri" pitchFamily="34" charset="-120"/>
+              </a:rPr>
+              <a:t>PROVENANCE · OPTIONS · GUARDRAIL · APPROVAL</a:t>
+            </a:r>
+            <a:endParaRPr lang="en-US" sz="900" dirty="0"/>
+          </a:p>
+          <a:p>
+            <a:pPr algn="l" indent="0" marL="0">
+              <a:lnSpc>
+                <a:spcPct val="110000"/>
+              </a:lnSpc>
+              <a:buNone/>
+            </a:pPr>
+            <a:r>
+              <a:rPr lang="en-US" sz="900" dirty="0">
+                <a:solidFill>
+                  <a:srgbClr val="C0A8FF"/>
+                </a:solidFill>
+                <a:latin typeface="Calibri" pitchFamily="34" charset="0"/>
+                <a:ea typeface="Calibri" pitchFamily="34" charset="-122"/>
+                <a:cs typeface="Calibri" pitchFamily="34" charset="-120"/>
+              </a:rPr>
+              <a:t>Apply blocked unless operator approved in host UI</a:t>
+            </a:r>
+            <a:endParaRPr lang="en-US" sz="900" dirty="0"/>
+          </a:p>
+        </p:txBody>
+      </p:sp>
+      <p:sp>
+        <p:nvSpPr>
+          <p:cNvPr id="48" name="Shape 46"/>
+          <p:cNvSpPr/>
+          <p:nvPr/>
+        </p:nvSpPr>
+        <p:spPr>
+          <a:xfrm>
+            <a:off x="2706624" y="3986784"/>
+            <a:ext cx="201168" cy="530352"/>
+          </a:xfrm>
+          <a:prstGeom prst="roundRect">
+            <a:avLst>
+              <a:gd name="adj" fmla="val 18182"/>
+            </a:avLst>
+          </a:prstGeom>
+          <a:solidFill>
+            <a:srgbClr val="6B4EFF"/>
+          </a:solidFill>
+          <a:ln w="25400">
+            <a:solidFill>
+              <a:srgbClr val="6B4EFF"/>
+            </a:solidFill>
+            <a:prstDash val="solid"/>
+          </a:ln>
+        </p:spPr>
+      </p:sp>
+      <p:sp>
+        <p:nvSpPr>
+          <p:cNvPr id="49" name="Text 47"/>
+          <p:cNvSpPr txBox="1"/>
+          <p:nvPr/>
+        </p:nvSpPr>
+        <p:spPr>
+          <a:xfrm>
+            <a:off x="2706624" y="3986784"/>
+            <a:ext cx="201168" cy="530352"/>
+          </a:xfrm>
+          <a:prstGeom prst="rect">
+            <a:avLst/>
+          </a:prstGeom>
+          <a:noFill/>
+          <a:ln/>
+        </p:spPr>
+        <p:txBody>
+          <a:bodyPr wrap="square" lIns="0" tIns="0" rIns="0" bIns="0" rtlCol="0" anchor="ctr"/>
+          <a:lstStyle/>
+          <a:p>
+            <a:pPr algn="ctr" indent="0" marL="0">
+              <a:lnSpc>
+                <a:spcPct val="110000"/>
+              </a:lnSpc>
+              <a:buNone/>
+            </a:pPr>
+            <a:r>
+              <a:rPr lang="en-US" sz="900" b="1" dirty="0">
+                <a:solidFill>
+                  <a:srgbClr val="FFFFFF"/>
+                </a:solidFill>
+                <a:latin typeface="Calibri" pitchFamily="34" charset="0"/>
+                <a:ea typeface="Calibri" pitchFamily="34" charset="-122"/>
+                <a:cs typeface="Calibri" pitchFamily="34" charset="-120"/>
+              </a:rPr>
+              <a:t>★</a:t>
+            </a:r>
+            <a:endParaRPr lang="en-US" sz="900" dirty="0"/>
+          </a:p>
+        </p:txBody>
+      </p:sp>
+      <p:sp>
+        <p:nvSpPr>
+          <p:cNvPr id="50" name="Shape 48"/>
+          <p:cNvSpPr/>
+          <p:nvPr/>
+        </p:nvSpPr>
+        <p:spPr>
+          <a:xfrm>
+            <a:off x="7114032" y="3986784"/>
+            <a:ext cx="4206240" cy="530352"/>
+          </a:xfrm>
+          <a:prstGeom prst="roundRect">
+            <a:avLst>
+              <a:gd name="adj" fmla="val 6897"/>
+            </a:avLst>
+          </a:prstGeom>
+          <a:solidFill>
+            <a:srgbClr val="0D1E2C"/>
+          </a:solidFill>
+          <a:ln w="25400">
+            <a:solidFill>
+              <a:srgbClr val="2A3A50"/>
+            </a:solidFill>
+            <a:prstDash val="solid"/>
+          </a:ln>
+        </p:spPr>
+      </p:sp>
+      <p:sp>
+        <p:nvSpPr>
+          <p:cNvPr id="51" name="Text 49"/>
+          <p:cNvSpPr txBox="1"/>
+          <p:nvPr/>
+        </p:nvSpPr>
+        <p:spPr>
+          <a:xfrm>
+            <a:off x="7187184" y="3986784"/>
+            <a:ext cx="4078224" cy="530352"/>
+          </a:xfrm>
+          <a:prstGeom prst="rect">
+            <a:avLst/>
+          </a:prstGeom>
+          <a:noFill/>
+          <a:ln/>
+        </p:spPr>
+        <p:txBody>
+          <a:bodyPr wrap="square" lIns="0" tIns="0" rIns="0" bIns="0" rtlCol="0" anchor="ctr"/>
+          <a:lstStyle/>
+          <a:p>
+            <a:pPr algn="l" indent="0" marL="0">
+              <a:lnSpc>
+                <a:spcPct val="110000"/>
+              </a:lnSpc>
+              <a:buNone/>
+            </a:pPr>
+            <a:r>
+              <a:rPr lang="en-US" sz="900" dirty="0">
+                <a:solidFill>
+                  <a:srgbClr val="A0B4C8"/>
+                </a:solidFill>
+                <a:latin typeface="Calibri" pitchFamily="34" charset="0"/>
+                <a:ea typeface="Calibri" pitchFamily="34" charset="-122"/>
+                <a:cs typeface="Calibri" pitchFamily="34" charset="-120"/>
+              </a:rPr>
+              <a:t>Manual staging pattern:</a:t>
+            </a:r>
+            <a:endParaRPr lang="en-US" sz="900" dirty="0"/>
+          </a:p>
+          <a:p>
+            <a:pPr algn="l" indent="0" marL="0">
+              <a:lnSpc>
+                <a:spcPct val="110000"/>
+              </a:lnSpc>
+              <a:buNone/>
+            </a:pPr>
+            <a:r>
+              <a:rPr lang="en-US" sz="900" dirty="0">
+                <a:solidFill>
+                  <a:srgbClr val="A0B4C8"/>
+                </a:solidFill>
+                <a:latin typeface="Calibri" pitchFamily="34" charset="0"/>
+                <a:ea typeface="Calibri" pitchFamily="34" charset="-122"/>
+                <a:cs typeface="Calibri" pitchFamily="34" charset="-120"/>
+              </a:rPr>
+              <a:t>stage_* → operator says approve → apply_change</a:t>
+            </a:r>
+            <a:endParaRPr lang="en-US" sz="900" dirty="0"/>
+          </a:p>
+          <a:p>
+            <a:pPr algn="l" indent="0" marL="0">
+              <a:lnSpc>
+                <a:spcPct val="110000"/>
+              </a:lnSpc>
+              <a:buNone/>
+            </a:pPr>
+            <a:r>
+              <a:rPr lang="en-US" sz="900" dirty="0">
+                <a:solidFill>
+                  <a:srgbClr val="A0B4C8"/>
+                </a:solidFill>
+                <a:latin typeface="Calibri" pitchFamily="34" charset="0"/>
+                <a:ea typeface="Calibri" pitchFamily="34" charset="-122"/>
+                <a:cs typeface="Calibri" pitchFamily="34" charset="-120"/>
+              </a:rPr>
+              <a:t>No framework-level gate enforcement</a:t>
+            </a:r>
+            <a:endParaRPr lang="en-US" sz="900" dirty="0"/>
+          </a:p>
+        </p:txBody>
+      </p:sp>
+      <p:sp>
+        <p:nvSpPr>
+          <p:cNvPr id="52" name="Shape 50"/>
+          <p:cNvSpPr/>
+          <p:nvPr/>
+        </p:nvSpPr>
+        <p:spPr>
+          <a:xfrm>
+            <a:off x="329184" y="4553712"/>
+            <a:ext cx="2286000" cy="530352"/>
+          </a:xfrm>
+          <a:prstGeom prst="roundRect">
+            <a:avLst>
+              <a:gd name="adj" fmla="val 6897"/>
+            </a:avLst>
+          </a:prstGeom>
+          <a:solidFill>
+            <a:srgbClr val="0A1620"/>
+          </a:solidFill>
+          <a:ln w="25400">
+            <a:solidFill>
+              <a:srgbClr val="2A3A50"/>
+            </a:solidFill>
+            <a:prstDash val="solid"/>
+          </a:ln>
+        </p:spPr>
+      </p:sp>
+      <p:sp>
+        <p:nvSpPr>
+          <p:cNvPr id="53" name="Text 51"/>
+          <p:cNvSpPr txBox="1"/>
+          <p:nvPr/>
+        </p:nvSpPr>
+        <p:spPr>
+          <a:xfrm>
+            <a:off x="384048" y="4553712"/>
+            <a:ext cx="2176272" cy="530352"/>
+          </a:xfrm>
+          <a:prstGeom prst="rect">
+            <a:avLst/>
+          </a:prstGeom>
+          <a:noFill/>
+          <a:ln/>
+        </p:spPr>
+        <p:txBody>
+          <a:bodyPr wrap="square" lIns="0" tIns="0" rIns="0" bIns="0" rtlCol="0" anchor="ctr"/>
+          <a:lstStyle/>
+          <a:p>
+            <a:pPr algn="l" indent="0" marL="0">
+              <a:lnSpc>
+                <a:spcPct val="110000"/>
+              </a:lnSpc>
+              <a:buNone/>
+            </a:pPr>
+            <a:r>
+              <a:rPr lang="en-US" sz="1000" b="1" dirty="0">
+                <a:solidFill>
+                  <a:srgbClr val="A0B4C8"/>
+                </a:solidFill>
+                <a:latin typeface="Calibri" pitchFamily="34" charset="0"/>
+                <a:ea typeface="Calibri" pitchFamily="34" charset="-122"/>
+                <a:cs typeface="Calibri" pitchFamily="34" charset="-120"/>
+              </a:rPr>
+              <a:t>Skills &amp;</a:t>
+            </a:r>
+            <a:endParaRPr lang="en-US" sz="1000" dirty="0"/>
+          </a:p>
+          <a:p>
+            <a:pPr algn="l" indent="0" marL="0">
+              <a:lnSpc>
+                <a:spcPct val="110000"/>
+              </a:lnSpc>
+              <a:buNone/>
+            </a:pPr>
+            <a:r>
+              <a:rPr lang="en-US" sz="1000" b="1" dirty="0">
+                <a:solidFill>
+                  <a:srgbClr val="A0B4C8"/>
+                </a:solidFill>
+                <a:latin typeface="Calibri" pitchFamily="34" charset="0"/>
+                <a:ea typeface="Calibri" pitchFamily="34" charset="-122"/>
+                <a:cs typeface="Calibri" pitchFamily="34" charset="-120"/>
+              </a:rPr>
+              <a:t>Flows</a:t>
+            </a:r>
+            <a:endParaRPr lang="en-US" sz="1000" dirty="0"/>
+          </a:p>
+        </p:txBody>
+      </p:sp>
+      <p:sp>
+        <p:nvSpPr>
+          <p:cNvPr id="54" name="Shape 52"/>
+          <p:cNvSpPr/>
+          <p:nvPr/>
+        </p:nvSpPr>
+        <p:spPr>
+          <a:xfrm>
+            <a:off x="2706624" y="4553712"/>
+            <a:ext cx="4206240" cy="530352"/>
+          </a:xfrm>
+          <a:prstGeom prst="roundRect">
+            <a:avLst>
+              <a:gd name="adj" fmla="val 6897"/>
+            </a:avLst>
+          </a:prstGeom>
+          <a:solidFill>
+            <a:srgbClr val="1A0E3A"/>
+          </a:solidFill>
+          <a:ln w="25400">
+            <a:solidFill>
+              <a:srgbClr val="6B4EFF"/>
+            </a:solidFill>
+            <a:prstDash val="solid"/>
+          </a:ln>
+        </p:spPr>
+      </p:sp>
+      <p:sp>
+        <p:nvSpPr>
+          <p:cNvPr id="55" name="Text 53"/>
+          <p:cNvSpPr txBox="1"/>
+          <p:nvPr/>
+        </p:nvSpPr>
+        <p:spPr>
+          <a:xfrm>
+            <a:off x="2779776" y="4553712"/>
+            <a:ext cx="4078224" cy="530352"/>
+          </a:xfrm>
+          <a:prstGeom prst="rect">
+            <a:avLst/>
+          </a:prstGeom>
+          <a:noFill/>
+          <a:ln/>
+        </p:spPr>
+        <p:txBody>
+          <a:bodyPr wrap="square" lIns="0" tIns="0" rIns="0" bIns="0" rtlCol="0" anchor="ctr"/>
+          <a:lstStyle/>
+          <a:p>
+            <a:pPr algn="l" indent="0" marL="0">
+              <a:lnSpc>
+                <a:spcPct val="110000"/>
+              </a:lnSpc>
+              <a:buNone/>
+            </a:pPr>
+            <a:r>
+              <a:rPr lang="en-US" sz="900" dirty="0">
+                <a:solidFill>
+                  <a:srgbClr val="C0A8FF"/>
+                </a:solidFill>
+                <a:latin typeface="Calibri" pitchFamily="34" charset="0"/>
+                <a:ea typeface="Calibri" pitchFamily="34" charset="-122"/>
+                <a:cs typeface="Calibri" pitchFamily="34" charset="-120"/>
+              </a:rPr>
+              <a:t>6 skills per role (SKILL.md per flow)</a:t>
+            </a:r>
+            <a:endParaRPr lang="en-US" sz="900" dirty="0"/>
+          </a:p>
+          <a:p>
+            <a:pPr algn="l" indent="0" marL="0">
+              <a:lnSpc>
+                <a:spcPct val="110000"/>
+              </a:lnSpc>
+              <a:buNone/>
+            </a:pPr>
+            <a:r>
+              <a:rPr lang="en-US" sz="900" dirty="0">
+                <a:solidFill>
+                  <a:srgbClr val="C0A8FF"/>
+                </a:solidFill>
+                <a:latin typeface="Calibri" pitchFamily="34" charset="0"/>
+                <a:ea typeface="Calibri" pitchFamily="34" charset="-122"/>
+                <a:cs typeface="Calibri" pitchFamily="34" charset="-120"/>
+              </a:rPr>
+              <a:t>catalog · inventory · marketing</a:t>
+            </a:r>
+            <a:endParaRPr lang="en-US" sz="900" dirty="0"/>
+          </a:p>
+          <a:p>
+            <a:pPr algn="l" indent="0" marL="0">
+              <a:lnSpc>
+                <a:spcPct val="110000"/>
+              </a:lnSpc>
+              <a:buNone/>
+            </a:pPr>
+            <a:r>
+              <a:rPr lang="en-US" sz="900" dirty="0">
+                <a:solidFill>
+                  <a:srgbClr val="C0A8FF"/>
+                </a:solidFill>
+                <a:latin typeface="Calibri" pitchFamily="34" charset="0"/>
+                <a:ea typeface="Calibri" pitchFamily="34" charset="-122"/>
+                <a:cs typeface="Calibri" pitchFamily="34" charset="-120"/>
+              </a:rPr>
+              <a:t>pricing · performance · merchandising</a:t>
+            </a:r>
+            <a:endParaRPr lang="en-US" sz="900" dirty="0"/>
+          </a:p>
+        </p:txBody>
+      </p:sp>
+      <p:sp>
+        <p:nvSpPr>
+          <p:cNvPr id="56" name="Shape 54"/>
+          <p:cNvSpPr/>
+          <p:nvPr/>
+        </p:nvSpPr>
+        <p:spPr>
+          <a:xfrm>
+            <a:off x="2706624" y="4553712"/>
+            <a:ext cx="201168" cy="530352"/>
+          </a:xfrm>
+          <a:prstGeom prst="roundRect">
+            <a:avLst>
+              <a:gd name="adj" fmla="val 18182"/>
+            </a:avLst>
+          </a:prstGeom>
+          <a:solidFill>
+            <a:srgbClr val="6B4EFF"/>
+          </a:solidFill>
+          <a:ln w="25400">
+            <a:solidFill>
+              <a:srgbClr val="6B4EFF"/>
+            </a:solidFill>
+            <a:prstDash val="solid"/>
+          </a:ln>
+        </p:spPr>
+      </p:sp>
+      <p:sp>
+        <p:nvSpPr>
+          <p:cNvPr id="57" name="Text 55"/>
+          <p:cNvSpPr txBox="1"/>
+          <p:nvPr/>
+        </p:nvSpPr>
+        <p:spPr>
+          <a:xfrm>
+            <a:off x="2706624" y="4553712"/>
+            <a:ext cx="201168" cy="530352"/>
+          </a:xfrm>
+          <a:prstGeom prst="rect">
+            <a:avLst/>
+          </a:prstGeom>
+          <a:noFill/>
+          <a:ln/>
+        </p:spPr>
+        <p:txBody>
+          <a:bodyPr wrap="square" lIns="0" tIns="0" rIns="0" bIns="0" rtlCol="0" anchor="ctr"/>
+          <a:lstStyle/>
+          <a:p>
+            <a:pPr algn="ctr" indent="0" marL="0">
+              <a:lnSpc>
+                <a:spcPct val="110000"/>
+              </a:lnSpc>
+              <a:buNone/>
+            </a:pPr>
+            <a:r>
+              <a:rPr lang="en-US" sz="900" b="1" dirty="0">
+                <a:solidFill>
+                  <a:srgbClr val="FFFFFF"/>
+                </a:solidFill>
+                <a:latin typeface="Calibri" pitchFamily="34" charset="0"/>
+                <a:ea typeface="Calibri" pitchFamily="34" charset="-122"/>
+                <a:cs typeface="Calibri" pitchFamily="34" charset="-120"/>
+              </a:rPr>
+              <a:t>★</a:t>
+            </a:r>
+            <a:endParaRPr lang="en-US" sz="900" dirty="0"/>
+          </a:p>
+        </p:txBody>
+      </p:sp>
+      <p:sp>
+        <p:nvSpPr>
+          <p:cNvPr id="58" name="Shape 56"/>
+          <p:cNvSpPr/>
+          <p:nvPr/>
+        </p:nvSpPr>
+        <p:spPr>
+          <a:xfrm>
+            <a:off x="7114032" y="4553712"/>
+            <a:ext cx="4206240" cy="530352"/>
+          </a:xfrm>
+          <a:prstGeom prst="roundRect">
+            <a:avLst>
+              <a:gd name="adj" fmla="val 6897"/>
+            </a:avLst>
+          </a:prstGeom>
+          <a:solidFill>
+            <a:srgbClr val="0A1620"/>
+          </a:solidFill>
+          <a:ln w="25400">
+            <a:solidFill>
+              <a:srgbClr val="2A3A50"/>
+            </a:solidFill>
+            <a:prstDash val="solid"/>
+          </a:ln>
+        </p:spPr>
+      </p:sp>
+      <p:sp>
+        <p:nvSpPr>
+          <p:cNvPr id="59" name="Text 57"/>
+          <p:cNvSpPr txBox="1"/>
+          <p:nvPr/>
+        </p:nvSpPr>
+        <p:spPr>
+          <a:xfrm>
+            <a:off x="7187184" y="4553712"/>
+            <a:ext cx="4078224" cy="530352"/>
+          </a:xfrm>
+          <a:prstGeom prst="rect">
+            <a:avLst/>
+          </a:prstGeom>
+          <a:noFill/>
+          <a:ln/>
+        </p:spPr>
+        <p:txBody>
+          <a:bodyPr wrap="square" lIns="0" tIns="0" rIns="0" bIns="0" rtlCol="0" anchor="ctr"/>
+          <a:lstStyle/>
+          <a:p>
+            <a:pPr algn="l" indent="0" marL="0">
+              <a:lnSpc>
+                <a:spcPct val="110000"/>
+              </a:lnSpc>
+              <a:buNone/>
+            </a:pPr>
+            <a:r>
+              <a:rPr lang="en-US" sz="900" dirty="0">
+                <a:solidFill>
+                  <a:srgbClr val="A0B4C8"/>
+                </a:solidFill>
+                <a:latin typeface="Calibri" pitchFamily="34" charset="0"/>
+                <a:ea typeface="Calibri" pitchFamily="34" charset="-122"/>
+                <a:cs typeface="Calibri" pitchFamily="34" charset="-120"/>
+              </a:rPr>
+              <a:t>No skills system</a:t>
+            </a:r>
+            <a:endParaRPr lang="en-US" sz="900" dirty="0"/>
+          </a:p>
+          <a:p>
+            <a:pPr algn="l" indent="0" marL="0">
+              <a:lnSpc>
+                <a:spcPct val="110000"/>
+              </a:lnSpc>
+              <a:buNone/>
+            </a:pPr>
+            <a:r>
+              <a:rPr lang="en-US" sz="900" dirty="0">
+                <a:solidFill>
+                  <a:srgbClr val="A0B4C8"/>
+                </a:solidFill>
+                <a:latin typeface="Calibri" pitchFamily="34" charset="0"/>
+                <a:ea typeface="Calibri" pitchFamily="34" charset="-122"/>
+                <a:cs typeface="Calibri" pitchFamily="34" charset="-120"/>
+              </a:rPr>
+              <a:t>Tools directly on agents</a:t>
+            </a:r>
+            <a:endParaRPr lang="en-US" sz="900" dirty="0"/>
+          </a:p>
+          <a:p>
+            <a:pPr algn="l" indent="0" marL="0">
+              <a:lnSpc>
+                <a:spcPct val="110000"/>
+              </a:lnSpc>
+              <a:buNone/>
+            </a:pPr>
+            <a:r>
+              <a:rPr lang="en-US" sz="900" dirty="0">
+                <a:solidFill>
+                  <a:srgbClr val="A0B4C8"/>
+                </a:solidFill>
+                <a:latin typeface="Calibri" pitchFamily="34" charset="0"/>
+                <a:ea typeface="Calibri" pitchFamily="34" charset="-122"/>
+                <a:cs typeface="Calibri" pitchFamily="34" charset="-120"/>
+              </a:rPr>
+              <a:t>Ontology layer + merchandising tools instead</a:t>
+            </a:r>
+            <a:endParaRPr lang="en-US" sz="900" dirty="0"/>
+          </a:p>
+        </p:txBody>
+      </p:sp>
+      <p:sp>
+        <p:nvSpPr>
+          <p:cNvPr id="60" name="Shape 58"/>
+          <p:cNvSpPr/>
+          <p:nvPr/>
+        </p:nvSpPr>
+        <p:spPr>
+          <a:xfrm>
+            <a:off x="329184" y="5120640"/>
+            <a:ext cx="2286000" cy="530352"/>
+          </a:xfrm>
+          <a:prstGeom prst="roundRect">
+            <a:avLst>
+              <a:gd name="adj" fmla="val 6897"/>
+            </a:avLst>
+          </a:prstGeom>
+          <a:solidFill>
+            <a:srgbClr val="0D1E2C"/>
+          </a:solidFill>
+          <a:ln w="25400">
+            <a:solidFill>
+              <a:srgbClr val="2A3A50"/>
+            </a:solidFill>
+            <a:prstDash val="solid"/>
+          </a:ln>
+        </p:spPr>
+      </p:sp>
+      <p:sp>
+        <p:nvSpPr>
+          <p:cNvPr id="61" name="Text 59"/>
+          <p:cNvSpPr txBox="1"/>
+          <p:nvPr/>
+        </p:nvSpPr>
+        <p:spPr>
+          <a:xfrm>
+            <a:off x="384048" y="5120640"/>
+            <a:ext cx="2176272" cy="530352"/>
+          </a:xfrm>
+          <a:prstGeom prst="rect">
+            <a:avLst/>
+          </a:prstGeom>
+          <a:noFill/>
+          <a:ln/>
+        </p:spPr>
+        <p:txBody>
+          <a:bodyPr wrap="square" lIns="0" tIns="0" rIns="0" bIns="0" rtlCol="0" anchor="ctr"/>
+          <a:lstStyle/>
+          <a:p>
+            <a:pPr algn="l" indent="0" marL="0">
+              <a:lnSpc>
+                <a:spcPct val="110000"/>
+              </a:lnSpc>
+              <a:buNone/>
+            </a:pPr>
+            <a:r>
+              <a:rPr lang="en-US" sz="1000" b="1" dirty="0">
+                <a:solidFill>
+                  <a:srgbClr val="A0B4C8"/>
+                </a:solidFill>
+                <a:latin typeface="Calibri" pitchFamily="34" charset="0"/>
+                <a:ea typeface="Calibri" pitchFamily="34" charset="-122"/>
+                <a:cs typeface="Calibri" pitchFamily="34" charset="-120"/>
+              </a:rPr>
+              <a:t>Analysis</a:t>
+            </a:r>
+            <a:endParaRPr lang="en-US" sz="1000" dirty="0"/>
+          </a:p>
+        </p:txBody>
+      </p:sp>
+      <p:sp>
+        <p:nvSpPr>
+          <p:cNvPr id="62" name="Shape 60"/>
+          <p:cNvSpPr/>
+          <p:nvPr/>
+        </p:nvSpPr>
+        <p:spPr>
+          <a:xfrm>
+            <a:off x="2706624" y="5120640"/>
+            <a:ext cx="4206240" cy="530352"/>
+          </a:xfrm>
+          <a:prstGeom prst="roundRect">
+            <a:avLst>
+              <a:gd name="adj" fmla="val 6897"/>
+            </a:avLst>
+          </a:prstGeom>
+          <a:solidFill>
+            <a:srgbClr val="1A0E3A"/>
+          </a:solidFill>
+          <a:ln w="25400">
+            <a:solidFill>
+              <a:srgbClr val="6B4EFF"/>
+            </a:solidFill>
+            <a:prstDash val="solid"/>
+          </a:ln>
+        </p:spPr>
+      </p:sp>
+      <p:sp>
+        <p:nvSpPr>
+          <p:cNvPr id="63" name="Text 61"/>
+          <p:cNvSpPr txBox="1"/>
+          <p:nvPr/>
+        </p:nvSpPr>
+        <p:spPr>
+          <a:xfrm>
+            <a:off x="2779776" y="5120640"/>
+            <a:ext cx="4078224" cy="530352"/>
+          </a:xfrm>
+          <a:prstGeom prst="rect">
+            <a:avLst/>
+          </a:prstGeom>
+          <a:noFill/>
+          <a:ln/>
+        </p:spPr>
+        <p:txBody>
+          <a:bodyPr wrap="square" lIns="0" tIns="0" rIns="0" bIns="0" rtlCol="0" anchor="ctr"/>
+          <a:lstStyle/>
+          <a:p>
+            <a:pPr algn="l" indent="0" marL="0">
+              <a:lnSpc>
+                <a:spcPct val="110000"/>
+              </a:lnSpc>
+              <a:buNone/>
+            </a:pPr>
+            <a:r>
+              <a:rPr lang="en-US" sz="900" dirty="0">
+                <a:solidFill>
+                  <a:srgbClr val="C0A8FF"/>
+                </a:solidFill>
+                <a:latin typeface="Calibri" pitchFamily="34" charset="0"/>
+                <a:ea typeface="Calibri" pitchFamily="34" charset="-122"/>
+                <a:cs typeface="Calibri" pitchFamily="34" charset="-120"/>
+              </a:rPr>
+              <a:t>run_analysis delegate (analysis.py)</a:t>
+            </a:r>
+            <a:endParaRPr lang="en-US" sz="900" dirty="0"/>
+          </a:p>
+          <a:p>
+            <a:pPr algn="l" indent="0" marL="0">
+              <a:lnSpc>
+                <a:spcPct val="110000"/>
+              </a:lnSpc>
+              <a:buNone/>
+            </a:pPr>
+            <a:r>
+              <a:rPr lang="en-US" sz="900" dirty="0">
+                <a:solidFill>
+                  <a:srgbClr val="C0A8FF"/>
+                </a:solidFill>
+                <a:latin typeface="Calibri" pitchFamily="34" charset="0"/>
+                <a:ea typeface="Calibri" pitchFamily="34" charset="-122"/>
+                <a:cs typeface="Calibri" pitchFamily="34" charset="-120"/>
+              </a:rPr>
+              <a:t>SQL-like queries on snapshot data</a:t>
+            </a:r>
+            <a:endParaRPr lang="en-US" sz="900" dirty="0"/>
+          </a:p>
+          <a:p>
+            <a:pPr algn="l" indent="0" marL="0">
+              <a:lnSpc>
+                <a:spcPct val="110000"/>
+              </a:lnSpc>
+              <a:buNone/>
+            </a:pPr>
+            <a:r>
+              <a:rPr lang="en-US" sz="900" dirty="0">
+                <a:solidFill>
+                  <a:srgbClr val="C0A8FF"/>
+                </a:solidFill>
+                <a:latin typeface="Calibri" pitchFamily="34" charset="0"/>
+                <a:ea typeface="Calibri" pitchFamily="34" charset="-122"/>
+                <a:cs typeface="Calibri" pitchFamily="34" charset="-120"/>
+              </a:rPr>
+              <a:t>Renders metrics card in UI</a:t>
+            </a:r>
+            <a:endParaRPr lang="en-US" sz="900" dirty="0"/>
+          </a:p>
+        </p:txBody>
+      </p:sp>
+      <p:sp>
+        <p:nvSpPr>
+          <p:cNvPr id="64" name="Shape 62"/>
+          <p:cNvSpPr/>
+          <p:nvPr/>
+        </p:nvSpPr>
+        <p:spPr>
+          <a:xfrm>
+            <a:off x="2706624" y="5120640"/>
+            <a:ext cx="201168" cy="530352"/>
+          </a:xfrm>
+          <a:prstGeom prst="roundRect">
+            <a:avLst>
+              <a:gd name="adj" fmla="val 18182"/>
+            </a:avLst>
+          </a:prstGeom>
+          <a:solidFill>
+            <a:srgbClr val="6B4EFF"/>
+          </a:solidFill>
+          <a:ln w="25400">
+            <a:solidFill>
+              <a:srgbClr val="6B4EFF"/>
+            </a:solidFill>
+            <a:prstDash val="solid"/>
+          </a:ln>
+        </p:spPr>
+      </p:sp>
+      <p:sp>
+        <p:nvSpPr>
+          <p:cNvPr id="65" name="Text 63"/>
+          <p:cNvSpPr txBox="1"/>
+          <p:nvPr/>
+        </p:nvSpPr>
+        <p:spPr>
+          <a:xfrm>
+            <a:off x="2706624" y="5120640"/>
+            <a:ext cx="201168" cy="530352"/>
+          </a:xfrm>
+          <a:prstGeom prst="rect">
+            <a:avLst/>
+          </a:prstGeom>
+          <a:noFill/>
+          <a:ln/>
+        </p:spPr>
+        <p:txBody>
+          <a:bodyPr wrap="square" lIns="0" tIns="0" rIns="0" bIns="0" rtlCol="0" anchor="ctr"/>
+          <a:lstStyle/>
+          <a:p>
+            <a:pPr algn="ctr" indent="0" marL="0">
+              <a:lnSpc>
+                <a:spcPct val="110000"/>
+              </a:lnSpc>
+              <a:buNone/>
+            </a:pPr>
+            <a:r>
+              <a:rPr lang="en-US" sz="900" b="1" dirty="0">
+                <a:solidFill>
+                  <a:srgbClr val="FFFFFF"/>
+                </a:solidFill>
+                <a:latin typeface="Calibri" pitchFamily="34" charset="0"/>
+                <a:ea typeface="Calibri" pitchFamily="34" charset="-122"/>
+                <a:cs typeface="Calibri" pitchFamily="34" charset="-120"/>
+              </a:rPr>
+              <a:t>★</a:t>
+            </a:r>
+            <a:endParaRPr lang="en-US" sz="900" dirty="0"/>
+          </a:p>
+        </p:txBody>
+      </p:sp>
+      <p:sp>
+        <p:nvSpPr>
+          <p:cNvPr id="66" name="Shape 64"/>
+          <p:cNvSpPr/>
+          <p:nvPr/>
+        </p:nvSpPr>
+        <p:spPr>
+          <a:xfrm>
+            <a:off x="7114032" y="5120640"/>
+            <a:ext cx="4206240" cy="530352"/>
+          </a:xfrm>
+          <a:prstGeom prst="roundRect">
+            <a:avLst>
+              <a:gd name="adj" fmla="val 6897"/>
+            </a:avLst>
+          </a:prstGeom>
+          <a:solidFill>
+            <a:srgbClr val="0D1E2C"/>
+          </a:solidFill>
+          <a:ln w="25400">
+            <a:solidFill>
+              <a:srgbClr val="2A3A50"/>
+            </a:solidFill>
+            <a:prstDash val="solid"/>
+          </a:ln>
+        </p:spPr>
+      </p:sp>
+      <p:sp>
+        <p:nvSpPr>
+          <p:cNvPr id="67" name="Text 65"/>
+          <p:cNvSpPr txBox="1"/>
+          <p:nvPr/>
+        </p:nvSpPr>
+        <p:spPr>
+          <a:xfrm>
+            <a:off x="7187184" y="5120640"/>
+            <a:ext cx="4078224" cy="530352"/>
+          </a:xfrm>
+          <a:prstGeom prst="rect">
+            <a:avLst/>
+          </a:prstGeom>
+          <a:noFill/>
+          <a:ln/>
+        </p:spPr>
+        <p:txBody>
+          <a:bodyPr wrap="square" lIns="0" tIns="0" rIns="0" bIns="0" rtlCol="0" anchor="ctr"/>
+          <a:lstStyle/>
+          <a:p>
+            <a:pPr algn="l" indent="0" marL="0">
+              <a:lnSpc>
+                <a:spcPct val="110000"/>
+              </a:lnSpc>
+              <a:buNone/>
+            </a:pPr>
+            <a:r>
+              <a:rPr lang="en-US" sz="900" dirty="0">
+                <a:solidFill>
+                  <a:srgbClr val="A0B4C8"/>
+                </a:solidFill>
+                <a:latin typeface="Calibri" pitchFamily="34" charset="0"/>
+                <a:ea typeface="Calibri" pitchFamily="34" charset="-122"/>
+                <a:cs typeface="Calibri" pitchFamily="34" charset="-120"/>
+              </a:rPr>
+              <a:t>No dedicated analysis delegate</a:t>
+            </a:r>
+            <a:endParaRPr lang="en-US" sz="900" dirty="0"/>
+          </a:p>
+          <a:p>
+            <a:pPr algn="l" indent="0" marL="0">
+              <a:lnSpc>
+                <a:spcPct val="110000"/>
+              </a:lnSpc>
+              <a:buNone/>
+            </a:pPr>
+            <a:r>
+              <a:rPr lang="en-US" sz="900" dirty="0">
+                <a:solidFill>
+                  <a:srgbClr val="A0B4C8"/>
+                </a:solidFill>
+                <a:latin typeface="Calibri" pitchFamily="34" charset="0"/>
+                <a:ea typeface="Calibri" pitchFamily="34" charset="-122"/>
+                <a:cs typeface="Calibri" pitchFamily="34" charset="-120"/>
+              </a:rPr>
+              <a:t>Gemini reasons from raw tool results</a:t>
+            </a:r>
+            <a:endParaRPr lang="en-US" sz="900" dirty="0"/>
+          </a:p>
+          <a:p>
+            <a:pPr algn="l" indent="0" marL="0">
+              <a:lnSpc>
+                <a:spcPct val="110000"/>
+              </a:lnSpc>
+              <a:buNone/>
+            </a:pPr>
+            <a:r>
+              <a:rPr lang="en-US" sz="900" dirty="0">
+                <a:solidFill>
+                  <a:srgbClr val="A0B4C8"/>
+                </a:solidFill>
+                <a:latin typeface="Calibri" pitchFamily="34" charset="0"/>
+                <a:ea typeface="Calibri" pitchFamily="34" charset="-122"/>
+                <a:cs typeface="Calibri" pitchFamily="34" charset="-120"/>
+              </a:rPr>
+              <a:t>Structured output via JSON response_mime_type</a:t>
+            </a:r>
+            <a:endParaRPr lang="en-US" sz="900" dirty="0"/>
+          </a:p>
+        </p:txBody>
+      </p:sp>
+      <p:sp>
+        <p:nvSpPr>
+          <p:cNvPr id="68" name="Shape 66"/>
+          <p:cNvSpPr/>
+          <p:nvPr/>
+        </p:nvSpPr>
+        <p:spPr>
+          <a:xfrm>
+            <a:off x="329184" y="5687568"/>
+            <a:ext cx="2286000" cy="530352"/>
+          </a:xfrm>
+          <a:prstGeom prst="roundRect">
+            <a:avLst>
+              <a:gd name="adj" fmla="val 6897"/>
+            </a:avLst>
+          </a:prstGeom>
+          <a:solidFill>
+            <a:srgbClr val="0A1620"/>
+          </a:solidFill>
+          <a:ln w="25400">
+            <a:solidFill>
+              <a:srgbClr val="2A3A50"/>
+            </a:solidFill>
+            <a:prstDash val="solid"/>
+          </a:ln>
+        </p:spPr>
+      </p:sp>
+      <p:sp>
+        <p:nvSpPr>
+          <p:cNvPr id="69" name="Text 67"/>
+          <p:cNvSpPr txBox="1"/>
+          <p:nvPr/>
+        </p:nvSpPr>
+        <p:spPr>
+          <a:xfrm>
+            <a:off x="384048" y="5687568"/>
+            <a:ext cx="2176272" cy="530352"/>
+          </a:xfrm>
+          <a:prstGeom prst="rect">
+            <a:avLst/>
+          </a:prstGeom>
+          <a:noFill/>
+          <a:ln/>
+        </p:spPr>
+        <p:txBody>
+          <a:bodyPr wrap="square" lIns="0" tIns="0" rIns="0" bIns="0" rtlCol="0" anchor="ctr"/>
+          <a:lstStyle/>
+          <a:p>
+            <a:pPr algn="l" indent="0" marL="0">
+              <a:lnSpc>
+                <a:spcPct val="110000"/>
+              </a:lnSpc>
+              <a:buNone/>
+            </a:pPr>
+            <a:r>
+              <a:rPr lang="en-US" sz="1000" b="1" dirty="0">
+                <a:solidFill>
+                  <a:srgbClr val="A0B4C8"/>
+                </a:solidFill>
+                <a:latin typeface="Calibri" pitchFamily="34" charset="0"/>
+                <a:ea typeface="Calibri" pitchFamily="34" charset="-122"/>
+                <a:cs typeface="Calibri" pitchFamily="34" charset="-120"/>
+              </a:rPr>
+              <a:t>Knowledge</a:t>
+            </a:r>
+            <a:endParaRPr lang="en-US" sz="1000" dirty="0"/>
+          </a:p>
+          <a:p>
+            <a:pPr algn="l" indent="0" marL="0">
+              <a:lnSpc>
+                <a:spcPct val="110000"/>
+              </a:lnSpc>
+              <a:buNone/>
+            </a:pPr>
+            <a:r>
+              <a:rPr lang="en-US" sz="1000" b="1" dirty="0">
+                <a:solidFill>
+                  <a:srgbClr val="A0B4C8"/>
+                </a:solidFill>
+                <a:latin typeface="Calibri" pitchFamily="34" charset="0"/>
+                <a:ea typeface="Calibri" pitchFamily="34" charset="-122"/>
+                <a:cs typeface="Calibri" pitchFamily="34" charset="-120"/>
+              </a:rPr>
+              <a:t>Graph</a:t>
+            </a:r>
+            <a:endParaRPr lang="en-US" sz="1000" dirty="0"/>
+          </a:p>
+        </p:txBody>
+      </p:sp>
+      <p:sp>
+        <p:nvSpPr>
+          <p:cNvPr id="70" name="Shape 68"/>
+          <p:cNvSpPr/>
+          <p:nvPr/>
+        </p:nvSpPr>
+        <p:spPr>
+          <a:xfrm>
+            <a:off x="2706624" y="5687568"/>
+            <a:ext cx="4206240" cy="530352"/>
+          </a:xfrm>
+          <a:prstGeom prst="roundRect">
+            <a:avLst>
+              <a:gd name="adj" fmla="val 6897"/>
+            </a:avLst>
+          </a:prstGeom>
+          <a:solidFill>
+            <a:srgbClr val="0A1620"/>
+          </a:solidFill>
+          <a:ln w="25400">
+            <a:solidFill>
+              <a:srgbClr val="2A3A50"/>
+            </a:solidFill>
+            <a:prstDash val="solid"/>
+          </a:ln>
+        </p:spPr>
+      </p:sp>
+      <p:sp>
+        <p:nvSpPr>
+          <p:cNvPr id="71" name="Text 69"/>
+          <p:cNvSpPr txBox="1"/>
+          <p:nvPr/>
+        </p:nvSpPr>
+        <p:spPr>
+          <a:xfrm>
+            <a:off x="2779776" y="5687568"/>
+            <a:ext cx="4078224" cy="530352"/>
+          </a:xfrm>
+          <a:prstGeom prst="rect">
+            <a:avLst/>
+          </a:prstGeom>
+          <a:noFill/>
+          <a:ln/>
+        </p:spPr>
+        <p:txBody>
+          <a:bodyPr wrap="square" lIns="0" tIns="0" rIns="0" bIns="0" rtlCol="0" anchor="ctr"/>
+          <a:lstStyle/>
+          <a:p>
+            <a:pPr algn="l" indent="0" marL="0">
+              <a:lnSpc>
+                <a:spcPct val="110000"/>
+              </a:lnSpc>
+              <a:buNone/>
+            </a:pPr>
+            <a:r>
+              <a:rPr lang="en-US" sz="900" dirty="0">
+                <a:solidFill>
+                  <a:srgbClr val="A0B4C8"/>
+                </a:solidFill>
+                <a:latin typeface="Calibri" pitchFamily="34" charset="0"/>
+                <a:ea typeface="Calibri" pitchFamily="34" charset="-122"/>
+                <a:cs typeface="Calibri" pitchFamily="34" charset="-120"/>
+              </a:rPr>
+              <a:t>Not in standard agent</a:t>
+            </a:r>
+            <a:endParaRPr lang="en-US" sz="900" dirty="0"/>
+          </a:p>
+        </p:txBody>
+      </p:sp>
+      <p:sp>
+        <p:nvSpPr>
+          <p:cNvPr id="72" name="Shape 70"/>
+          <p:cNvSpPr/>
+          <p:nvPr/>
+        </p:nvSpPr>
+        <p:spPr>
+          <a:xfrm>
+            <a:off x="7114032" y="5687568"/>
+            <a:ext cx="4206240" cy="530352"/>
+          </a:xfrm>
+          <a:prstGeom prst="roundRect">
+            <a:avLst>
+              <a:gd name="adj" fmla="val 6897"/>
+            </a:avLst>
+          </a:prstGeom>
+          <a:solidFill>
+            <a:srgbClr val="05152A"/>
+          </a:solidFill>
+          <a:ln w="25400">
+            <a:solidFill>
+              <a:srgbClr val="1A73E8"/>
+            </a:solidFill>
+            <a:prstDash val="solid"/>
+          </a:ln>
+        </p:spPr>
+      </p:sp>
+      <p:sp>
+        <p:nvSpPr>
+          <p:cNvPr id="73" name="Text 71"/>
+          <p:cNvSpPr txBox="1"/>
+          <p:nvPr/>
+        </p:nvSpPr>
+        <p:spPr>
+          <a:xfrm>
+            <a:off x="7187184" y="5687568"/>
+            <a:ext cx="4078224" cy="530352"/>
+          </a:xfrm>
+          <a:prstGeom prst="rect">
+            <a:avLst/>
+          </a:prstGeom>
+          <a:noFill/>
+          <a:ln/>
+        </p:spPr>
+        <p:txBody>
+          <a:bodyPr wrap="square" lIns="0" tIns="0" rIns="0" bIns="0" rtlCol="0" anchor="ctr"/>
+          <a:lstStyle/>
+          <a:p>
+            <a:pPr algn="l" indent="0" marL="0">
+              <a:lnSpc>
+                <a:spcPct val="110000"/>
+              </a:lnSpc>
+              <a:buNone/>
+            </a:pPr>
+            <a:r>
+              <a:rPr lang="en-US" sz="900" dirty="0">
+                <a:solidFill>
+                  <a:srgbClr val="90C8FF"/>
+                </a:solidFill>
+                <a:latin typeface="Calibri" pitchFamily="34" charset="0"/>
+                <a:ea typeface="Calibri" pitchFamily="34" charset="-122"/>
+                <a:cs typeface="Calibri" pitchFamily="34" charset="-120"/>
+              </a:rPr>
+              <a:t>Wikidata + Google KG integration</a:t>
+            </a:r>
+            <a:endParaRPr lang="en-US" sz="900" dirty="0"/>
+          </a:p>
+          <a:p>
+            <a:pPr algn="l" indent="0" marL="0">
+              <a:lnSpc>
+                <a:spcPct val="110000"/>
+              </a:lnSpc>
+              <a:buNone/>
+            </a:pPr>
+            <a:r>
+              <a:rPr lang="en-US" sz="900" dirty="0">
+                <a:solidFill>
+                  <a:srgbClr val="90C8FF"/>
+                </a:solidFill>
+                <a:latin typeface="Calibri" pitchFamily="34" charset="0"/>
+                <a:ea typeface="Calibri" pitchFamily="34" charset="-122"/>
+                <a:cs typeface="Calibri" pitchFamily="34" charset="-120"/>
+              </a:rPr>
+              <a:t>lookup_product_entities grounded in KG IDs</a:t>
+            </a:r>
+            <a:endParaRPr lang="en-US" sz="900" dirty="0"/>
+          </a:p>
+          <a:p>
+            <a:pPr algn="l" indent="0" marL="0">
+              <a:lnSpc>
+                <a:spcPct val="110000"/>
+              </a:lnSpc>
+              <a:buNone/>
+            </a:pPr>
+            <a:r>
+              <a:rPr lang="en-US" sz="900" dirty="0">
+                <a:solidFill>
+                  <a:srgbClr val="90C8FF"/>
+                </a:solidFill>
+                <a:latin typeface="Calibri" pitchFamily="34" charset="0"/>
+                <a:ea typeface="Calibri" pitchFamily="34" charset="-122"/>
+                <a:cs typeface="Calibri" pitchFamily="34" charset="-120"/>
+              </a:rPr>
+              <a:t>classify_product_ontology uses KG descriptions</a:t>
+            </a:r>
+            <a:endParaRPr lang="en-US" sz="900" dirty="0"/>
+          </a:p>
+        </p:txBody>
+      </p:sp>
+      <p:sp>
+        <p:nvSpPr>
+          <p:cNvPr id="74" name="Shape 72"/>
+          <p:cNvSpPr/>
+          <p:nvPr/>
+        </p:nvSpPr>
+        <p:spPr>
+          <a:xfrm>
+            <a:off x="7114032" y="5687568"/>
+            <a:ext cx="201168" cy="530352"/>
+          </a:xfrm>
+          <a:prstGeom prst="roundRect">
+            <a:avLst>
+              <a:gd name="adj" fmla="val 18182"/>
+            </a:avLst>
+          </a:prstGeom>
+          <a:solidFill>
+            <a:srgbClr val="1A73E8"/>
+          </a:solidFill>
+          <a:ln w="25400">
+            <a:solidFill>
+              <a:srgbClr val="1A73E8"/>
+            </a:solidFill>
+            <a:prstDash val="solid"/>
+          </a:ln>
+        </p:spPr>
+      </p:sp>
+      <p:sp>
+        <p:nvSpPr>
+          <p:cNvPr id="75" name="Text 73"/>
+          <p:cNvSpPr txBox="1"/>
+          <p:nvPr/>
+        </p:nvSpPr>
+        <p:spPr>
+          <a:xfrm>
+            <a:off x="7114032" y="5687568"/>
+            <a:ext cx="201168" cy="530352"/>
+          </a:xfrm>
+          <a:prstGeom prst="rect">
+            <a:avLst/>
+          </a:prstGeom>
+          <a:noFill/>
+          <a:ln/>
+        </p:spPr>
+        <p:txBody>
+          <a:bodyPr wrap="square" lIns="0" tIns="0" rIns="0" bIns="0" rtlCol="0" anchor="ctr"/>
+          <a:lstStyle/>
+          <a:p>
+            <a:pPr algn="ctr" indent="0" marL="0">
+              <a:lnSpc>
+                <a:spcPct val="110000"/>
+              </a:lnSpc>
+              <a:buNone/>
+            </a:pPr>
+            <a:r>
+              <a:rPr lang="en-US" sz="900" b="1" dirty="0">
+                <a:solidFill>
+                  <a:srgbClr val="FFFFFF"/>
+                </a:solidFill>
+                <a:latin typeface="Calibri" pitchFamily="34" charset="0"/>
+                <a:ea typeface="Calibri" pitchFamily="34" charset="-122"/>
+                <a:cs typeface="Calibri" pitchFamily="34" charset="-120"/>
+              </a:rPr>
+              <a:t>★</a:t>
+            </a:r>
+            <a:endParaRPr lang="en-US" sz="900" dirty="0"/>
+          </a:p>
+        </p:txBody>
+      </p:sp>
+      <p:sp>
+        <p:nvSpPr>
+          <p:cNvPr id="76" name="Shape 74"/>
+          <p:cNvSpPr/>
+          <p:nvPr/>
+        </p:nvSpPr>
+        <p:spPr>
+          <a:xfrm>
+            <a:off x="329184" y="6254496"/>
+            <a:ext cx="2286000" cy="530352"/>
+          </a:xfrm>
+          <a:prstGeom prst="roundRect">
+            <a:avLst>
+              <a:gd name="adj" fmla="val 6897"/>
+            </a:avLst>
+          </a:prstGeom>
+          <a:solidFill>
+            <a:srgbClr val="0D1E2C"/>
+          </a:solidFill>
+          <a:ln w="25400">
+            <a:solidFill>
+              <a:srgbClr val="2A3A50"/>
+            </a:solidFill>
+            <a:prstDash val="solid"/>
+          </a:ln>
+        </p:spPr>
+      </p:sp>
+      <p:sp>
+        <p:nvSpPr>
+          <p:cNvPr id="77" name="Text 75"/>
+          <p:cNvSpPr txBox="1"/>
+          <p:nvPr/>
+        </p:nvSpPr>
+        <p:spPr>
+          <a:xfrm>
+            <a:off x="384048" y="6254496"/>
+            <a:ext cx="2176272" cy="530352"/>
+          </a:xfrm>
+          <a:prstGeom prst="rect">
+            <a:avLst/>
+          </a:prstGeom>
+          <a:noFill/>
+          <a:ln/>
+        </p:spPr>
+        <p:txBody>
+          <a:bodyPr wrap="square" lIns="0" tIns="0" rIns="0" bIns="0" rtlCol="0" anchor="ctr"/>
+          <a:lstStyle/>
+          <a:p>
+            <a:pPr algn="l" indent="0" marL="0">
+              <a:lnSpc>
+                <a:spcPct val="110000"/>
+              </a:lnSpc>
+              <a:buNone/>
+            </a:pPr>
+            <a:r>
+              <a:rPr lang="en-US" sz="1000" b="1" dirty="0">
+                <a:solidFill>
+                  <a:srgbClr val="A0B4C8"/>
+                </a:solidFill>
+                <a:latin typeface="Calibri" pitchFamily="34" charset="0"/>
+                <a:ea typeface="Calibri" pitchFamily="34" charset="-122"/>
+                <a:cs typeface="Calibri" pitchFamily="34" charset="-120"/>
+              </a:rPr>
+              <a:t>Memory</a:t>
+            </a:r>
+            <a:endParaRPr lang="en-US" sz="1000" dirty="0"/>
+          </a:p>
+        </p:txBody>
+      </p:sp>
+      <p:sp>
+        <p:nvSpPr>
+          <p:cNvPr id="78" name="Shape 76"/>
+          <p:cNvSpPr/>
+          <p:nvPr/>
+        </p:nvSpPr>
+        <p:spPr>
+          <a:xfrm>
+            <a:off x="2706624" y="6254496"/>
+            <a:ext cx="4206240" cy="530352"/>
+          </a:xfrm>
+          <a:prstGeom prst="roundRect">
+            <a:avLst>
+              <a:gd name="adj" fmla="val 6897"/>
+            </a:avLst>
+          </a:prstGeom>
+          <a:solidFill>
+            <a:srgbClr val="1A0E3A"/>
+          </a:solidFill>
+          <a:ln w="25400">
+            <a:solidFill>
+              <a:srgbClr val="6B4EFF"/>
+            </a:solidFill>
+            <a:prstDash val="solid"/>
+          </a:ln>
+        </p:spPr>
+      </p:sp>
+      <p:sp>
+        <p:nvSpPr>
+          <p:cNvPr id="79" name="Text 77"/>
+          <p:cNvSpPr txBox="1"/>
+          <p:nvPr/>
+        </p:nvSpPr>
+        <p:spPr>
+          <a:xfrm>
+            <a:off x="2779776" y="6254496"/>
+            <a:ext cx="4078224" cy="530352"/>
+          </a:xfrm>
+          <a:prstGeom prst="rect">
+            <a:avLst/>
+          </a:prstGeom>
+          <a:noFill/>
+          <a:ln/>
+        </p:spPr>
+        <p:txBody>
+          <a:bodyPr wrap="square" lIns="0" tIns="0" rIns="0" bIns="0" rtlCol="0" anchor="ctr"/>
+          <a:lstStyle/>
+          <a:p>
+            <a:pPr algn="l" indent="0" marL="0">
+              <a:lnSpc>
+                <a:spcPct val="110000"/>
+              </a:lnSpc>
+              <a:buNone/>
+            </a:pPr>
+            <a:r>
+              <a:rPr lang="en-US" sz="900" dirty="0">
+                <a:solidFill>
+                  <a:srgbClr val="C0A8FF"/>
+                </a:solidFill>
+                <a:latin typeface="Calibri" pitchFamily="34" charset="0"/>
+                <a:ea typeface="Calibri" pitchFamily="34" charset="-122"/>
+                <a:cs typeface="Calibri" pitchFamily="34" charset="-120"/>
+              </a:rPr>
+              <a:t>memory.py: MemoryFact persisted across sessions</a:t>
+            </a:r>
+            <a:endParaRPr lang="en-US" sz="900" dirty="0"/>
+          </a:p>
+          <a:p>
+            <a:pPr algn="l" indent="0" marL="0">
+              <a:lnSpc>
+                <a:spcPct val="110000"/>
+              </a:lnSpc>
+              <a:buNone/>
+            </a:pPr>
+            <a:r>
+              <a:rPr lang="en-US" sz="900" dirty="0">
+                <a:solidFill>
+                  <a:srgbClr val="C0A8FF"/>
+                </a:solidFill>
+                <a:latin typeface="Calibri" pitchFamily="34" charset="0"/>
+                <a:ea typeface="Calibri" pitchFamily="34" charset="-122"/>
+                <a:cs typeface="Calibri" pitchFamily="34" charset="-120"/>
+              </a:rPr>
+              <a:t>Retrieval injected into fenced data block</a:t>
+            </a:r>
+            <a:endParaRPr lang="en-US" sz="900" dirty="0"/>
+          </a:p>
+        </p:txBody>
+      </p:sp>
+      <p:sp>
+        <p:nvSpPr>
+          <p:cNvPr id="80" name="Shape 78"/>
+          <p:cNvSpPr/>
+          <p:nvPr/>
+        </p:nvSpPr>
+        <p:spPr>
+          <a:xfrm>
+            <a:off x="2706624" y="6254496"/>
+            <a:ext cx="201168" cy="530352"/>
+          </a:xfrm>
+          <a:prstGeom prst="roundRect">
+            <a:avLst>
+              <a:gd name="adj" fmla="val 18182"/>
+            </a:avLst>
+          </a:prstGeom>
+          <a:solidFill>
+            <a:srgbClr val="6B4EFF"/>
+          </a:solidFill>
+          <a:ln w="25400">
+            <a:solidFill>
+              <a:srgbClr val="6B4EFF"/>
+            </a:solidFill>
+            <a:prstDash val="solid"/>
+          </a:ln>
+        </p:spPr>
+      </p:sp>
+      <p:sp>
+        <p:nvSpPr>
+          <p:cNvPr id="81" name="Text 79"/>
+          <p:cNvSpPr txBox="1"/>
+          <p:nvPr/>
+        </p:nvSpPr>
+        <p:spPr>
+          <a:xfrm>
+            <a:off x="2706624" y="6254496"/>
+            <a:ext cx="201168" cy="530352"/>
+          </a:xfrm>
+          <a:prstGeom prst="rect">
+            <a:avLst/>
+          </a:prstGeom>
+          <a:noFill/>
+          <a:ln/>
+        </p:spPr>
+        <p:txBody>
+          <a:bodyPr wrap="square" lIns="0" tIns="0" rIns="0" bIns="0" rtlCol="0" anchor="ctr"/>
+          <a:lstStyle/>
+          <a:p>
+            <a:pPr algn="ctr" indent="0" marL="0">
+              <a:lnSpc>
+                <a:spcPct val="110000"/>
+              </a:lnSpc>
+              <a:buNone/>
+            </a:pPr>
+            <a:r>
+              <a:rPr lang="en-US" sz="900" b="1" dirty="0">
+                <a:solidFill>
+                  <a:srgbClr val="FFFFFF"/>
+                </a:solidFill>
+                <a:latin typeface="Calibri" pitchFamily="34" charset="0"/>
+                <a:ea typeface="Calibri" pitchFamily="34" charset="-122"/>
+                <a:cs typeface="Calibri" pitchFamily="34" charset="-120"/>
+              </a:rPr>
+              <a:t>★</a:t>
+            </a:r>
+            <a:endParaRPr lang="en-US" sz="900" dirty="0"/>
+          </a:p>
+        </p:txBody>
+      </p:sp>
+      <p:sp>
+        <p:nvSpPr>
+          <p:cNvPr id="82" name="Shape 80"/>
+          <p:cNvSpPr/>
+          <p:nvPr/>
+        </p:nvSpPr>
+        <p:spPr>
+          <a:xfrm>
+            <a:off x="7114032" y="6254496"/>
+            <a:ext cx="4206240" cy="530352"/>
+          </a:xfrm>
+          <a:prstGeom prst="roundRect">
+            <a:avLst>
+              <a:gd name="adj" fmla="val 6897"/>
+            </a:avLst>
+          </a:prstGeom>
+          <a:solidFill>
+            <a:srgbClr val="0D1E2C"/>
+          </a:solidFill>
+          <a:ln w="25400">
+            <a:solidFill>
+              <a:srgbClr val="2A3A50"/>
+            </a:solidFill>
+            <a:prstDash val="solid"/>
+          </a:ln>
+        </p:spPr>
+      </p:sp>
+      <p:sp>
+        <p:nvSpPr>
+          <p:cNvPr id="83" name="Text 81"/>
+          <p:cNvSpPr txBox="1"/>
+          <p:nvPr/>
+        </p:nvSpPr>
+        <p:spPr>
+          <a:xfrm>
+            <a:off x="7187184" y="6254496"/>
+            <a:ext cx="4078224" cy="530352"/>
+          </a:xfrm>
+          <a:prstGeom prst="rect">
+            <a:avLst/>
+          </a:prstGeom>
+          <a:noFill/>
+          <a:ln/>
+        </p:spPr>
+        <p:txBody>
+          <a:bodyPr wrap="square" lIns="0" tIns="0" rIns="0" bIns="0" rtlCol="0" anchor="ctr"/>
+          <a:lstStyle/>
+          <a:p>
+            <a:pPr algn="l" indent="0" marL="0">
+              <a:lnSpc>
+                <a:spcPct val="110000"/>
+              </a:lnSpc>
+              <a:buNone/>
+            </a:pPr>
+            <a:r>
+              <a:rPr lang="en-US" sz="900" dirty="0">
+                <a:solidFill>
+                  <a:srgbClr val="A0B4C8"/>
+                </a:solidFill>
+                <a:latin typeface="Calibri" pitchFamily="34" charset="0"/>
+                <a:ea typeface="Calibri" pitchFamily="34" charset="-122"/>
+                <a:cs typeface="Calibri" pitchFamily="34" charset="-120"/>
+              </a:rPr>
+              <a:t>session.state: within session only</a:t>
+            </a:r>
+            <a:endParaRPr lang="en-US" sz="900" dirty="0"/>
+          </a:p>
+          <a:p>
+            <a:pPr algn="l" indent="0" marL="0">
+              <a:lnSpc>
+                <a:spcPct val="110000"/>
+              </a:lnSpc>
+              <a:buNone/>
+            </a:pPr>
+            <a:r>
+              <a:rPr lang="en-US" sz="900" dirty="0">
+                <a:solidFill>
+                  <a:srgbClr val="A0B4C8"/>
+                </a:solidFill>
+                <a:latin typeface="Calibri" pitchFamily="34" charset="0"/>
+                <a:ea typeface="Calibri" pitchFamily="34" charset="-122"/>
+                <a:cs typeface="Calibri" pitchFamily="34" charset="-120"/>
+              </a:rPr>
+              <a:t>prime_session briefing cache (in-process)</a:t>
+            </a:r>
+            <a:endParaRPr lang="en-US" sz="900" dirty="0"/>
+          </a:p>
+          <a:p>
+            <a:pPr algn="l" indent="0" marL="0">
+              <a:lnSpc>
+                <a:spcPct val="110000"/>
+              </a:lnSpc>
+              <a:buNone/>
+            </a:pPr>
+            <a:r>
+              <a:rPr lang="en-US" sz="900" dirty="0">
+                <a:solidFill>
+                  <a:srgbClr val="A0B4C8"/>
+                </a:solidFill>
+                <a:latin typeface="Calibri" pitchFamily="34" charset="0"/>
+                <a:ea typeface="Calibri" pitchFamily="34" charset="-122"/>
+                <a:cs typeface="Calibri" pitchFamily="34" charset="-120"/>
+              </a:rPr>
+              <a:t>No cross-session memory by default</a:t>
+            </a:r>
+            <a:endParaRPr lang="en-US" sz="900" dirty="0"/>
+          </a:p>
+        </p:txBody>
+      </p:sp>
+      <p:sp>
+        <p:nvSpPr>
+          <p:cNvPr id="84" name="Text 82"/>
+          <p:cNvSpPr txBox="1"/>
+          <p:nvPr/>
+        </p:nvSpPr>
+        <p:spPr>
+          <a:xfrm>
+            <a:off x="329184" y="6711696"/>
+            <a:ext cx="11484864" cy="201168"/>
+          </a:xfrm>
+          <a:prstGeom prst="rect">
+            <a:avLst/>
+          </a:prstGeom>
+          <a:noFill/>
+          <a:ln/>
+        </p:spPr>
+        <p:txBody>
+          <a:bodyPr wrap="square" lIns="0" tIns="0" rIns="0" bIns="0" rtlCol="0" anchor="ctr"/>
+          <a:lstStyle/>
+          <a:p>
+            <a:pPr algn="l" indent="0" marL="0">
+              <a:lnSpc>
+                <a:spcPct val="110000"/>
+              </a:lnSpc>
+              <a:buNone/>
+            </a:pPr>
+            <a:r>
+              <a:rPr lang="en-US" sz="850" dirty="0">
+                <a:solidFill>
+                  <a:srgbClr val="4A6070"/>
+                </a:solidFill>
+                <a:latin typeface="Calibri" pitchFamily="34" charset="0"/>
+                <a:ea typeface="Calibri" pitchFamily="34" charset="-122"/>
+                <a:cs typeface="Calibri" pitchFamily="34" charset="-120"/>
+              </a:rPr>
+              <a:t>★ highlighted cell = framework advantage in this dimension  ·  Claude excels at safety gates, skill flows, analysis, memory  ·  Gemini ADK excels at callback hooks, session state, sub-agent routing, Knowledge Graph</a:t>
+            </a:r>
+            <a:endParaRPr lang="en-US" sz="850" dirty="0"/>
+          </a:p>
+        </p:txBody>
+      </p:sp>
+    </p:spTree>
+  </p:cSld>
+  <p:clrMapOvr>
+    <a:masterClrMapping/>
+  </p:clrMapOvr>
+</p:sld>
+</file>
+
+<file path=ppt/slides/slide4.xml><?xml version="1.0" encoding="utf-8"?>
+<p:sld xmlns:a="http://schemas.openxmlformats.org/drawingml/2006/main" xmlns:r="http://schemas.openxmlformats.org/officeDocument/2006/relationships" xmlns:p="http://schemas.openxmlformats.org/presentationml/2006/main">
+  <p:cSld name="Slide 4">
+    <p:bg>
+      <p:bgPr>
+        <a:solidFill>
+          <a:srgbClr val="060E18"/>
+        </a:solidFill>
+      </p:bgPr>
+    </p:bg>
+    <p:spTree>
+      <p:nvGrpSpPr>
+        <p:cNvPr id="1" name=""/>
+        <p:cNvGrpSpPr/>
+        <p:nvPr/>
+      </p:nvGrpSpPr>
+      <p:grpSpPr>
+        <a:xfrm>
+          <a:off x="0" y="0"/>
+          <a:ext cx="0" cy="0"/>
+          <a:chOff x="0" y="0"/>
+          <a:chExt cx="0" cy="0"/>
+        </a:xfrm>
+      </p:grpSpPr>
+      <p:sp>
+        <p:nvSpPr>
+          <p:cNvPr id="2" name="Text 0"/>
+          <p:cNvSpPr txBox="1"/>
+          <p:nvPr/>
+        </p:nvSpPr>
+        <p:spPr>
+          <a:xfrm>
+            <a:off x="365760" y="91440"/>
+            <a:ext cx="11430000" cy="420624"/>
+          </a:xfrm>
+          <a:prstGeom prst="rect">
+            <a:avLst/>
+          </a:prstGeom>
+          <a:noFill/>
+          <a:ln/>
+        </p:spPr>
+        <p:txBody>
+          <a:bodyPr wrap="square" lIns="0" tIns="0" rIns="0" bIns="0" rtlCol="0" anchor="ctr"/>
+          <a:lstStyle/>
+          <a:p>
+            <a:pPr algn="l" indent="0" marL="0">
+              <a:lnSpc>
+                <a:spcPct val="110000"/>
+              </a:lnSpc>
+              <a:buNone/>
+            </a:pPr>
+            <a:r>
+              <a:rPr lang="en-US" sz="2200" b="1" dirty="0">
+                <a:solidFill>
+                  <a:srgbClr val="FFFFFF"/>
+                </a:solidFill>
+                <a:latin typeface="Cambria" pitchFamily="34" charset="0"/>
+                <a:ea typeface="Cambria" pitchFamily="34" charset="-122"/>
+                <a:cs typeface="Cambria" pitchFamily="34" charset="-120"/>
+              </a:rPr>
+              <a:t>When to Choose Each Approach</a:t>
+            </a:r>
+            <a:endParaRPr lang="en-US" sz="2200" dirty="0"/>
+          </a:p>
+        </p:txBody>
+      </p:sp>
+      <p:sp>
+        <p:nvSpPr>
+          <p:cNvPr id="3" name="Text 1"/>
+          <p:cNvSpPr txBox="1"/>
+          <p:nvPr/>
+        </p:nvSpPr>
+        <p:spPr>
+          <a:xfrm>
+            <a:off x="365760" y="530352"/>
+            <a:ext cx="11430000" cy="256032"/>
+          </a:xfrm>
+          <a:prstGeom prst="rect">
+            <a:avLst/>
+          </a:prstGeom>
+          <a:noFill/>
+          <a:ln/>
+        </p:spPr>
+        <p:txBody>
+          <a:bodyPr wrap="square" lIns="0" tIns="0" rIns="0" bIns="0" rtlCol="0" anchor="ctr"/>
+          <a:lstStyle/>
+          <a:p>
+            <a:pPr algn="l" indent="0" marL="0">
+              <a:lnSpc>
+                <a:spcPct val="110000"/>
+              </a:lnSpc>
+              <a:buNone/>
+            </a:pPr>
+            <a:r>
+              <a:rPr lang="en-US" sz="1100" dirty="0">
+                <a:solidFill>
+                  <a:srgbClr val="A0B4C8"/>
+                </a:solidFill>
+                <a:latin typeface="Calibri" pitchFamily="34" charset="0"/>
+                <a:ea typeface="Calibri" pitchFamily="34" charset="-122"/>
+                <a:cs typeface="Calibri" pitchFamily="34" charset="-120"/>
+              </a:rPr>
+              <a:t>Both agents do the same job — choose by which trade-offs match your deployment</a:t>
+            </a:r>
+            <a:endParaRPr lang="en-US" sz="1100" dirty="0"/>
+          </a:p>
+        </p:txBody>
+      </p:sp>
+      <p:sp>
+        <p:nvSpPr>
+          <p:cNvPr id="4" name="Shape 2"/>
+          <p:cNvSpPr/>
+          <p:nvPr/>
+        </p:nvSpPr>
+        <p:spPr>
+          <a:xfrm>
+            <a:off x="329184" y="859536"/>
+            <a:ext cx="5486400" cy="5303520"/>
+          </a:xfrm>
+          <a:prstGeom prst="roundRect">
+            <a:avLst>
+              <a:gd name="adj" fmla="val 2069"/>
+            </a:avLst>
+          </a:prstGeom>
+          <a:solidFill>
+            <a:srgbClr val="1A0E3A"/>
+          </a:solidFill>
+          <a:ln w="25400">
+            <a:solidFill>
+              <a:srgbClr val="6B4EFF"/>
+            </a:solidFill>
+            <a:prstDash val="solid"/>
+          </a:ln>
+        </p:spPr>
+      </p:sp>
+      <p:sp>
+        <p:nvSpPr>
+          <p:cNvPr id="5" name="Text 3"/>
+          <p:cNvSpPr txBox="1"/>
+          <p:nvPr/>
+        </p:nvSpPr>
+        <p:spPr>
+          <a:xfrm>
+            <a:off x="329184" y="877824"/>
+            <a:ext cx="5486400" cy="384048"/>
+          </a:xfrm>
+          <a:prstGeom prst="rect">
+            <a:avLst/>
+          </a:prstGeom>
+          <a:noFill/>
+          <a:ln/>
+        </p:spPr>
+        <p:txBody>
+          <a:bodyPr wrap="square" lIns="0" tIns="0" rIns="0" bIns="0" rtlCol="0" anchor="ctr"/>
+          <a:lstStyle/>
+          <a:p>
+            <a:pPr algn="ctr" indent="0" marL="0">
+              <a:lnSpc>
+                <a:spcPct val="110000"/>
+              </a:lnSpc>
+              <a:buNone/>
+            </a:pPr>
+            <a:r>
+              <a:rPr lang="en-US" sz="1600" b="1" dirty="0">
+                <a:solidFill>
+                  <a:srgbClr val="6B4EFF"/>
+                </a:solidFill>
+                <a:latin typeface="Cambria" pitchFamily="34" charset="0"/>
+                <a:ea typeface="Cambria" pitchFamily="34" charset="-122"/>
+                <a:cs typeface="Cambria" pitchFamily="34" charset="-120"/>
+              </a:rPr>
+              <a:t>Choose Claude when…</a:t>
+            </a:r>
+            <a:endParaRPr lang="en-US" sz="1600" dirty="0"/>
+          </a:p>
+        </p:txBody>
+      </p:sp>
+      <p:sp>
+        <p:nvSpPr>
+          <p:cNvPr id="6" name="Shape 4"/>
+          <p:cNvSpPr/>
+          <p:nvPr/>
+        </p:nvSpPr>
+        <p:spPr>
+          <a:xfrm>
+            <a:off x="475488" y="1353312"/>
+            <a:ext cx="5193792" cy="841248"/>
+          </a:xfrm>
+          <a:prstGeom prst="roundRect">
+            <a:avLst>
+              <a:gd name="adj" fmla="val 7609"/>
+            </a:avLst>
+          </a:prstGeom>
+          <a:solidFill>
+            <a:srgbClr val="12082A"/>
+          </a:solidFill>
+          <a:ln w="25400">
+            <a:solidFill>
+              <a:srgbClr val="4A30A0"/>
+            </a:solidFill>
+            <a:prstDash val="solid"/>
+          </a:ln>
+        </p:spPr>
+      </p:sp>
+      <p:sp>
+        <p:nvSpPr>
+          <p:cNvPr id="7" name="Text 5"/>
+          <p:cNvSpPr txBox="1"/>
+          <p:nvPr/>
+        </p:nvSpPr>
+        <p:spPr>
+          <a:xfrm>
+            <a:off x="640080" y="1408176"/>
+            <a:ext cx="4901184" cy="256032"/>
+          </a:xfrm>
+          <a:prstGeom prst="rect">
+            <a:avLst/>
+          </a:prstGeom>
+          <a:noFill/>
+          <a:ln/>
+        </p:spPr>
+        <p:txBody>
+          <a:bodyPr wrap="square" lIns="0" tIns="0" rIns="0" bIns="0" rtlCol="0" anchor="ctr"/>
+          <a:lstStyle/>
+          <a:p>
+            <a:pPr algn="l" indent="0" marL="0">
+              <a:lnSpc>
+                <a:spcPct val="110000"/>
+              </a:lnSpc>
+              <a:buNone/>
+            </a:pPr>
+            <a:r>
+              <a:rPr lang="en-US" sz="1100" b="1" dirty="0">
+                <a:solidFill>
+                  <a:srgbClr val="C0A8FF"/>
+                </a:solidFill>
+                <a:latin typeface="Calibri" pitchFamily="34" charset="0"/>
+                <a:ea typeface="Calibri" pitchFamily="34" charset="-122"/>
+                <a:cs typeface="Calibri" pitchFamily="34" charset="-120"/>
+              </a:rPr>
+              <a:t>Write safety is non-negotiable</a:t>
+            </a:r>
+            <a:endParaRPr lang="en-US" sz="1100" dirty="0"/>
+          </a:p>
+        </p:txBody>
+      </p:sp>
+      <p:sp>
+        <p:nvSpPr>
+          <p:cNvPr id="8" name="Text 6"/>
+          <p:cNvSpPr txBox="1"/>
+          <p:nvPr/>
+        </p:nvSpPr>
+        <p:spPr>
+          <a:xfrm>
+            <a:off x="640080" y="1682496"/>
+            <a:ext cx="4901184" cy="457200"/>
+          </a:xfrm>
+          <a:prstGeom prst="rect">
+            <a:avLst/>
+          </a:prstGeom>
+          <a:noFill/>
+          <a:ln/>
+        </p:spPr>
+        <p:txBody>
+          <a:bodyPr wrap="square" lIns="0" tIns="0" rIns="0" bIns="0" rtlCol="0" anchor="ctr"/>
+          <a:lstStyle/>
+          <a:p>
+            <a:pPr algn="l" indent="0" marL="0">
+              <a:lnSpc>
+                <a:spcPct val="110000"/>
+              </a:lnSpc>
+              <a:buNone/>
+            </a:pPr>
+            <a:r>
+              <a:rPr lang="en-US" sz="950" dirty="0">
+                <a:solidFill>
+                  <a:srgbClr val="A0B4C8"/>
+                </a:solidFill>
+                <a:latin typeface="Calibri" pitchFamily="34" charset="0"/>
+                <a:ea typeface="Calibri" pitchFamily="34" charset="-122"/>
+                <a:cs typeface="Calibri" pitchFamily="34" charset="-120"/>
+              </a:rPr>
+              <a:t>Four framework-enforced gates (provenance, options,</a:t>
+            </a:r>
+            <a:endParaRPr lang="en-US" sz="950" dirty="0"/>
+          </a:p>
+          <a:p>
+            <a:pPr algn="l" indent="0" marL="0">
+              <a:lnSpc>
+                <a:spcPct val="110000"/>
+              </a:lnSpc>
+              <a:buNone/>
+            </a:pPr>
+            <a:r>
+              <a:rPr lang="en-US" sz="950" dirty="0">
+                <a:solidFill>
+                  <a:srgbClr val="A0B4C8"/>
+                </a:solidFill>
+                <a:latin typeface="Calibri" pitchFamily="34" charset="0"/>
+                <a:ea typeface="Calibri" pitchFamily="34" charset="-122"/>
+                <a:cs typeface="Calibri" pitchFamily="34" charset="-120"/>
+              </a:rPr>
+              <a:t>guardrail, approval) block invalid writes in code,</a:t>
+            </a:r>
+            <a:endParaRPr lang="en-US" sz="950" dirty="0"/>
+          </a:p>
+          <a:p>
+            <a:pPr algn="l" indent="0" marL="0">
+              <a:lnSpc>
+                <a:spcPct val="110000"/>
+              </a:lnSpc>
+              <a:buNone/>
+            </a:pPr>
+            <a:r>
+              <a:rPr lang="en-US" sz="950" dirty="0">
+                <a:solidFill>
+                  <a:srgbClr val="A0B4C8"/>
+                </a:solidFill>
+                <a:latin typeface="Calibri" pitchFamily="34" charset="0"/>
+                <a:ea typeface="Calibri" pitchFamily="34" charset="-122"/>
+                <a:cs typeface="Calibri" pitchFamily="34" charset="-120"/>
+              </a:rPr>
+              <a:t>not just in the prompt.</a:t>
+            </a:r>
+            <a:endParaRPr lang="en-US" sz="950" dirty="0"/>
+          </a:p>
+        </p:txBody>
+      </p:sp>
+      <p:sp>
+        <p:nvSpPr>
+          <p:cNvPr id="9" name="Shape 7"/>
+          <p:cNvSpPr/>
+          <p:nvPr/>
+        </p:nvSpPr>
+        <p:spPr>
+          <a:xfrm>
+            <a:off x="475488" y="2286000"/>
+            <a:ext cx="5193792" cy="841248"/>
+          </a:xfrm>
+          <a:prstGeom prst="roundRect">
+            <a:avLst>
+              <a:gd name="adj" fmla="val 7609"/>
+            </a:avLst>
+          </a:prstGeom>
+          <a:solidFill>
+            <a:srgbClr val="12082A"/>
+          </a:solidFill>
+          <a:ln w="25400">
+            <a:solidFill>
+              <a:srgbClr val="4A30A0"/>
+            </a:solidFill>
+            <a:prstDash val="solid"/>
+          </a:ln>
+        </p:spPr>
+      </p:sp>
+      <p:sp>
+        <p:nvSpPr>
+          <p:cNvPr id="10" name="Text 8"/>
+          <p:cNvSpPr txBox="1"/>
+          <p:nvPr/>
+        </p:nvSpPr>
+        <p:spPr>
+          <a:xfrm>
+            <a:off x="640080" y="2340864"/>
+            <a:ext cx="4901184" cy="256032"/>
+          </a:xfrm>
+          <a:prstGeom prst="rect">
+            <a:avLst/>
+          </a:prstGeom>
+          <a:noFill/>
+          <a:ln/>
+        </p:spPr>
+        <p:txBody>
+          <a:bodyPr wrap="square" lIns="0" tIns="0" rIns="0" bIns="0" rtlCol="0" anchor="ctr"/>
+          <a:lstStyle/>
+          <a:p>
+            <a:pPr algn="l" indent="0" marL="0">
+              <a:lnSpc>
+                <a:spcPct val="110000"/>
+              </a:lnSpc>
+              <a:buNone/>
+            </a:pPr>
+            <a:r>
+              <a:rPr lang="en-US" sz="1100" b="1" dirty="0">
+                <a:solidFill>
+                  <a:srgbClr val="C0A8FF"/>
+                </a:solidFill>
+                <a:latin typeface="Calibri" pitchFamily="34" charset="0"/>
+                <a:ea typeface="Calibri" pitchFamily="34" charset="-122"/>
+                <a:cs typeface="Calibri" pitchFamily="34" charset="-120"/>
+              </a:rPr>
+              <a:t>You need structured skill flows</a:t>
+            </a:r>
+            <a:endParaRPr lang="en-US" sz="1100" dirty="0"/>
+          </a:p>
+        </p:txBody>
+      </p:sp>
+      <p:sp>
+        <p:nvSpPr>
+          <p:cNvPr id="11" name="Text 9"/>
+          <p:cNvSpPr txBox="1"/>
+          <p:nvPr/>
+        </p:nvSpPr>
+        <p:spPr>
+          <a:xfrm>
+            <a:off x="640080" y="2615184"/>
+            <a:ext cx="4901184" cy="457200"/>
+          </a:xfrm>
+          <a:prstGeom prst="rect">
+            <a:avLst/>
+          </a:prstGeom>
+          <a:noFill/>
+          <a:ln/>
+        </p:spPr>
+        <p:txBody>
+          <a:bodyPr wrap="square" lIns="0" tIns="0" rIns="0" bIns="0" rtlCol="0" anchor="ctr"/>
+          <a:lstStyle/>
+          <a:p>
+            <a:pPr algn="l" indent="0" marL="0">
+              <a:lnSpc>
+                <a:spcPct val="110000"/>
+              </a:lnSpc>
+              <a:buNone/>
+            </a:pPr>
+            <a:r>
+              <a:rPr lang="en-US" sz="950" dirty="0">
+                <a:solidFill>
+                  <a:srgbClr val="A0B4C8"/>
+                </a:solidFill>
+                <a:latin typeface="Calibri" pitchFamily="34" charset="0"/>
+                <a:ea typeface="Calibri" pitchFamily="34" charset="-122"/>
+                <a:cs typeface="Calibri" pitchFamily="34" charset="-120"/>
+              </a:rPr>
+              <a:t>Six SKILL.md-defined flows per role give you auditable,</a:t>
+            </a:r>
+            <a:endParaRPr lang="en-US" sz="950" dirty="0"/>
+          </a:p>
+          <a:p>
+            <a:pPr algn="l" indent="0" marL="0">
+              <a:lnSpc>
+                <a:spcPct val="110000"/>
+              </a:lnSpc>
+              <a:buNone/>
+            </a:pPr>
+            <a:r>
+              <a:rPr lang="en-US" sz="950" dirty="0">
+                <a:solidFill>
+                  <a:srgbClr val="A0B4C8"/>
+                </a:solidFill>
+                <a:latin typeface="Calibri" pitchFamily="34" charset="0"/>
+                <a:ea typeface="Calibri" pitchFamily="34" charset="-122"/>
+                <a:cs typeface="Calibri" pitchFamily="34" charset="-120"/>
+              </a:rPr>
+              <a:t>versioned business logic separate from the model prompt.</a:t>
+            </a:r>
+            <a:endParaRPr lang="en-US" sz="950" dirty="0"/>
+          </a:p>
+        </p:txBody>
+      </p:sp>
+      <p:sp>
+        <p:nvSpPr>
+          <p:cNvPr id="12" name="Shape 10"/>
+          <p:cNvSpPr/>
+          <p:nvPr/>
+        </p:nvSpPr>
+        <p:spPr>
+          <a:xfrm>
+            <a:off x="475488" y="3218688"/>
+            <a:ext cx="5193792" cy="841248"/>
+          </a:xfrm>
+          <a:prstGeom prst="roundRect">
+            <a:avLst>
+              <a:gd name="adj" fmla="val 7609"/>
+            </a:avLst>
+          </a:prstGeom>
+          <a:solidFill>
+            <a:srgbClr val="12082A"/>
+          </a:solidFill>
+          <a:ln w="25400">
+            <a:solidFill>
+              <a:srgbClr val="4A30A0"/>
+            </a:solidFill>
+            <a:prstDash val="solid"/>
+          </a:ln>
+        </p:spPr>
+      </p:sp>
+      <p:sp>
+        <p:nvSpPr>
+          <p:cNvPr id="13" name="Text 11"/>
+          <p:cNvSpPr txBox="1"/>
+          <p:nvPr/>
+        </p:nvSpPr>
+        <p:spPr>
+          <a:xfrm>
+            <a:off x="640080" y="3273552"/>
+            <a:ext cx="4901184" cy="256032"/>
+          </a:xfrm>
+          <a:prstGeom prst="rect">
+            <a:avLst/>
+          </a:prstGeom>
+          <a:noFill/>
+          <a:ln/>
+        </p:spPr>
+        <p:txBody>
+          <a:bodyPr wrap="square" lIns="0" tIns="0" rIns="0" bIns="0" rtlCol="0" anchor="ctr"/>
+          <a:lstStyle/>
+          <a:p>
+            <a:pPr algn="l" indent="0" marL="0">
+              <a:lnSpc>
+                <a:spcPct val="110000"/>
+              </a:lnSpc>
+              <a:buNone/>
+            </a:pPr>
+            <a:r>
+              <a:rPr lang="en-US" sz="1100" b="1" dirty="0">
+                <a:solidFill>
+                  <a:srgbClr val="C0A8FF"/>
+                </a:solidFill>
+                <a:latin typeface="Calibri" pitchFamily="34" charset="0"/>
+                <a:ea typeface="Calibri" pitchFamily="34" charset="-122"/>
+                <a:cs typeface="Calibri" pitchFamily="34" charset="-120"/>
+              </a:rPr>
+              <a:t>Advanced analysis is required</a:t>
+            </a:r>
+            <a:endParaRPr lang="en-US" sz="1100" dirty="0"/>
+          </a:p>
+        </p:txBody>
+      </p:sp>
+      <p:sp>
+        <p:nvSpPr>
+          <p:cNvPr id="14" name="Text 12"/>
+          <p:cNvSpPr txBox="1"/>
+          <p:nvPr/>
+        </p:nvSpPr>
+        <p:spPr>
+          <a:xfrm>
+            <a:off x="640080" y="3547872"/>
+            <a:ext cx="4901184" cy="457200"/>
+          </a:xfrm>
+          <a:prstGeom prst="rect">
+            <a:avLst/>
+          </a:prstGeom>
+          <a:noFill/>
+          <a:ln/>
+        </p:spPr>
+        <p:txBody>
+          <a:bodyPr wrap="square" lIns="0" tIns="0" rIns="0" bIns="0" rtlCol="0" anchor="ctr"/>
+          <a:lstStyle/>
+          <a:p>
+            <a:pPr algn="l" indent="0" marL="0">
+              <a:lnSpc>
+                <a:spcPct val="110000"/>
+              </a:lnSpc>
+              <a:buNone/>
+            </a:pPr>
+            <a:r>
+              <a:rPr lang="en-US" sz="950" dirty="0">
+                <a:solidFill>
+                  <a:srgbClr val="A0B4C8"/>
+                </a:solidFill>
+                <a:latin typeface="Calibri" pitchFamily="34" charset="0"/>
+                <a:ea typeface="Calibri" pitchFamily="34" charset="-122"/>
+                <a:cs typeface="Calibri" pitchFamily="34" charset="-120"/>
+              </a:rPr>
+              <a:t>run_analysis delegate computes trend segments and</a:t>
+            </a:r>
+            <a:endParaRPr lang="en-US" sz="950" dirty="0"/>
+          </a:p>
+          <a:p>
+            <a:pPr algn="l" indent="0" marL="0">
+              <a:lnSpc>
+                <a:spcPct val="110000"/>
+              </a:lnSpc>
+              <a:buNone/>
+            </a:pPr>
+            <a:r>
+              <a:rPr lang="en-US" sz="950" dirty="0">
+                <a:solidFill>
+                  <a:srgbClr val="A0B4C8"/>
+                </a:solidFill>
+                <a:latin typeface="Calibri" pitchFamily="34" charset="0"/>
+                <a:ea typeface="Calibri" pitchFamily="34" charset="-122"/>
+                <a:cs typeface="Calibri" pitchFamily="34" charset="-120"/>
+              </a:rPr>
+              <a:t>cross-metric correlations — rendered as metrics cards in the UI.</a:t>
+            </a:r>
+            <a:endParaRPr lang="en-US" sz="950" dirty="0"/>
+          </a:p>
+        </p:txBody>
+      </p:sp>
+      <p:sp>
+        <p:nvSpPr>
+          <p:cNvPr id="15" name="Shape 13"/>
+          <p:cNvSpPr/>
+          <p:nvPr/>
+        </p:nvSpPr>
+        <p:spPr>
+          <a:xfrm>
+            <a:off x="475488" y="4151376"/>
+            <a:ext cx="5193792" cy="841248"/>
+          </a:xfrm>
+          <a:prstGeom prst="roundRect">
+            <a:avLst>
+              <a:gd name="adj" fmla="val 7609"/>
+            </a:avLst>
+          </a:prstGeom>
+          <a:solidFill>
+            <a:srgbClr val="12082A"/>
+          </a:solidFill>
+          <a:ln w="25400">
+            <a:solidFill>
+              <a:srgbClr val="4A30A0"/>
+            </a:solidFill>
+            <a:prstDash val="solid"/>
+          </a:ln>
+        </p:spPr>
+      </p:sp>
+      <p:sp>
+        <p:nvSpPr>
+          <p:cNvPr id="16" name="Text 14"/>
+          <p:cNvSpPr txBox="1"/>
+          <p:nvPr/>
+        </p:nvSpPr>
+        <p:spPr>
+          <a:xfrm>
+            <a:off x="640080" y="4206240"/>
+            <a:ext cx="4901184" cy="256032"/>
+          </a:xfrm>
+          <a:prstGeom prst="rect">
+            <a:avLst/>
+          </a:prstGeom>
+          <a:noFill/>
+          <a:ln/>
+        </p:spPr>
+        <p:txBody>
+          <a:bodyPr wrap="square" lIns="0" tIns="0" rIns="0" bIns="0" rtlCol="0" anchor="ctr"/>
+          <a:lstStyle/>
+          <a:p>
+            <a:pPr algn="l" indent="0" marL="0">
+              <a:lnSpc>
+                <a:spcPct val="110000"/>
+              </a:lnSpc>
+              <a:buNone/>
+            </a:pPr>
+            <a:r>
+              <a:rPr lang="en-US" sz="1100" b="1" dirty="0">
+                <a:solidFill>
+                  <a:srgbClr val="C0A8FF"/>
+                </a:solidFill>
+                <a:latin typeface="Calibri" pitchFamily="34" charset="0"/>
+                <a:ea typeface="Calibri" pitchFamily="34" charset="-122"/>
+                <a:cs typeface="Calibri" pitchFamily="34" charset="-120"/>
+              </a:rPr>
+              <a:t>Cross-session memory matters</a:t>
+            </a:r>
+            <a:endParaRPr lang="en-US" sz="1100" dirty="0"/>
+          </a:p>
+        </p:txBody>
+      </p:sp>
+      <p:sp>
+        <p:nvSpPr>
+          <p:cNvPr id="17" name="Text 15"/>
+          <p:cNvSpPr txBox="1"/>
+          <p:nvPr/>
+        </p:nvSpPr>
+        <p:spPr>
+          <a:xfrm>
+            <a:off x="640080" y="4480560"/>
+            <a:ext cx="4901184" cy="457200"/>
+          </a:xfrm>
+          <a:prstGeom prst="rect">
+            <a:avLst/>
+          </a:prstGeom>
+          <a:noFill/>
+          <a:ln/>
+        </p:spPr>
+        <p:txBody>
+          <a:bodyPr wrap="square" lIns="0" tIns="0" rIns="0" bIns="0" rtlCol="0" anchor="ctr"/>
+          <a:lstStyle/>
+          <a:p>
+            <a:pPr algn="l" indent="0" marL="0">
+              <a:lnSpc>
+                <a:spcPct val="110000"/>
+              </a:lnSpc>
+              <a:buNone/>
+            </a:pPr>
+            <a:r>
+              <a:rPr lang="en-US" sz="950" dirty="0">
+                <a:solidFill>
+                  <a:srgbClr val="A0B4C8"/>
+                </a:solidFill>
+                <a:latin typeface="Calibri" pitchFamily="34" charset="0"/>
+                <a:ea typeface="Calibri" pitchFamily="34" charset="-122"/>
+                <a:cs typeface="Calibri" pitchFamily="34" charset="-120"/>
+              </a:rPr>
+              <a:t>MemoryFact objects persist facts across logins;</a:t>
+            </a:r>
+            <a:endParaRPr lang="en-US" sz="950" dirty="0"/>
+          </a:p>
+          <a:p>
+            <a:pPr algn="l" indent="0" marL="0">
+              <a:lnSpc>
+                <a:spcPct val="110000"/>
+              </a:lnSpc>
+              <a:buNone/>
+            </a:pPr>
+            <a:r>
+              <a:rPr lang="en-US" sz="950" dirty="0">
+                <a:solidFill>
+                  <a:srgbClr val="A0B4C8"/>
+                </a:solidFill>
+                <a:latin typeface="Calibri" pitchFamily="34" charset="0"/>
+                <a:ea typeface="Calibri" pitchFamily="34" charset="-122"/>
+                <a:cs typeface="Calibri" pitchFamily="34" charset="-120"/>
+              </a:rPr>
+              <a:t>injected into each session's fenced data block.</a:t>
+            </a:r>
+            <a:endParaRPr lang="en-US" sz="950" dirty="0"/>
+          </a:p>
+        </p:txBody>
+      </p:sp>
+      <p:sp>
+        <p:nvSpPr>
+          <p:cNvPr id="18" name="Shape 16"/>
+          <p:cNvSpPr/>
+          <p:nvPr/>
+        </p:nvSpPr>
+        <p:spPr>
+          <a:xfrm>
+            <a:off x="475488" y="5084064"/>
+            <a:ext cx="5193792" cy="841248"/>
+          </a:xfrm>
+          <a:prstGeom prst="roundRect">
+            <a:avLst>
+              <a:gd name="adj" fmla="val 7609"/>
+            </a:avLst>
+          </a:prstGeom>
+          <a:solidFill>
+            <a:srgbClr val="12082A"/>
+          </a:solidFill>
+          <a:ln w="25400">
+            <a:solidFill>
+              <a:srgbClr val="4A30A0"/>
+            </a:solidFill>
+            <a:prstDash val="solid"/>
+          </a:ln>
+        </p:spPr>
+      </p:sp>
+      <p:sp>
+        <p:nvSpPr>
+          <p:cNvPr id="19" name="Text 17"/>
+          <p:cNvSpPr txBox="1"/>
+          <p:nvPr/>
+        </p:nvSpPr>
+        <p:spPr>
+          <a:xfrm>
+            <a:off x="640080" y="5138928"/>
+            <a:ext cx="4901184" cy="256032"/>
+          </a:xfrm>
+          <a:prstGeom prst="rect">
+            <a:avLst/>
+          </a:prstGeom>
+          <a:noFill/>
+          <a:ln/>
+        </p:spPr>
+        <p:txBody>
+          <a:bodyPr wrap="square" lIns="0" tIns="0" rIns="0" bIns="0" rtlCol="0" anchor="ctr"/>
+          <a:lstStyle/>
+          <a:p>
+            <a:pPr algn="l" indent="0" marL="0">
+              <a:lnSpc>
+                <a:spcPct val="110000"/>
+              </a:lnSpc>
+              <a:buNone/>
+            </a:pPr>
+            <a:r>
+              <a:rPr lang="en-US" sz="1100" b="1" dirty="0">
+                <a:solidFill>
+                  <a:srgbClr val="C0A8FF"/>
+                </a:solidFill>
+                <a:latin typeface="Calibri" pitchFamily="34" charset="0"/>
+                <a:ea typeface="Calibri" pitchFamily="34" charset="-122"/>
+                <a:cs typeface="Calibri" pitchFamily="34" charset="-120"/>
+              </a:rPr>
+              <a:t>Anthropic ecosystem (MCP, Claude Code)</a:t>
+            </a:r>
+            <a:endParaRPr lang="en-US" sz="1100" dirty="0"/>
+          </a:p>
+        </p:txBody>
+      </p:sp>
+      <p:sp>
+        <p:nvSpPr>
+          <p:cNvPr id="20" name="Text 18"/>
+          <p:cNvSpPr txBox="1"/>
+          <p:nvPr/>
+        </p:nvSpPr>
+        <p:spPr>
+          <a:xfrm>
+            <a:off x="640080" y="5413248"/>
+            <a:ext cx="4901184" cy="457200"/>
+          </a:xfrm>
+          <a:prstGeom prst="rect">
+            <a:avLst/>
+          </a:prstGeom>
+          <a:noFill/>
+          <a:ln/>
+        </p:spPr>
+        <p:txBody>
+          <a:bodyPr wrap="square" lIns="0" tIns="0" rIns="0" bIns="0" rtlCol="0" anchor="ctr"/>
+          <a:lstStyle/>
+          <a:p>
+            <a:pPr algn="l" indent="0" marL="0">
+              <a:lnSpc>
+                <a:spcPct val="110000"/>
+              </a:lnSpc>
+              <a:buNone/>
+            </a:pPr>
+            <a:r>
+              <a:rPr lang="en-US" sz="950" dirty="0">
+                <a:solidFill>
+                  <a:srgbClr val="A0B4C8"/>
+                </a:solidFill>
+                <a:latin typeface="Calibri" pitchFamily="34" charset="0"/>
+                <a:ea typeface="Calibri" pitchFamily="34" charset="-122"/>
+                <a:cs typeface="Calibri" pitchFamily="34" charset="-120"/>
+              </a:rPr>
+              <a:t>Native MCP server, Claude Code plugin, managed agents</a:t>
+            </a:r>
+            <a:endParaRPr lang="en-US" sz="950" dirty="0"/>
+          </a:p>
+          <a:p>
+            <a:pPr algn="l" indent="0" marL="0">
+              <a:lnSpc>
+                <a:spcPct val="110000"/>
+              </a:lnSpc>
+              <a:buNone/>
+            </a:pPr>
+            <a:r>
+              <a:rPr lang="en-US" sz="950" dirty="0">
+                <a:solidFill>
+                  <a:srgbClr val="A0B4C8"/>
+                </a:solidFill>
+                <a:latin typeface="Calibri" pitchFamily="34" charset="0"/>
+                <a:ea typeface="Calibri" pitchFamily="34" charset="-122"/>
+                <a:cs typeface="Calibri" pitchFamily="34" charset="-120"/>
+              </a:rPr>
+              <a:t>hosted on Anthropic infrastructure.</a:t>
+            </a:r>
+            <a:endParaRPr lang="en-US" sz="950" dirty="0"/>
+          </a:p>
+        </p:txBody>
+      </p:sp>
+      <p:sp>
+        <p:nvSpPr>
+          <p:cNvPr id="21" name="Shape 19"/>
+          <p:cNvSpPr/>
+          <p:nvPr/>
+        </p:nvSpPr>
+        <p:spPr>
+          <a:xfrm>
+            <a:off x="6364224" y="859536"/>
+            <a:ext cx="5486400" cy="5303520"/>
+          </a:xfrm>
+          <a:prstGeom prst="roundRect">
+            <a:avLst>
+              <a:gd name="adj" fmla="val 2069"/>
+            </a:avLst>
+          </a:prstGeom>
+          <a:solidFill>
+            <a:srgbClr val="051B3A"/>
+          </a:solidFill>
+          <a:ln w="25400">
+            <a:solidFill>
+              <a:srgbClr val="1A73E8"/>
+            </a:solidFill>
+            <a:prstDash val="solid"/>
+          </a:ln>
+        </p:spPr>
+      </p:sp>
+      <p:sp>
+        <p:nvSpPr>
+          <p:cNvPr id="22" name="Text 20"/>
+          <p:cNvSpPr txBox="1"/>
+          <p:nvPr/>
+        </p:nvSpPr>
+        <p:spPr>
+          <a:xfrm>
+            <a:off x="6364224" y="877824"/>
+            <a:ext cx="5486400" cy="384048"/>
+          </a:xfrm>
+          <a:prstGeom prst="rect">
+            <a:avLst/>
+          </a:prstGeom>
+          <a:noFill/>
+          <a:ln/>
+        </p:spPr>
+        <p:txBody>
+          <a:bodyPr wrap="square" lIns="0" tIns="0" rIns="0" bIns="0" rtlCol="0" anchor="ctr"/>
+          <a:lstStyle/>
+          <a:p>
+            <a:pPr algn="ctr" indent="0" marL="0">
+              <a:lnSpc>
+                <a:spcPct val="110000"/>
+              </a:lnSpc>
+              <a:buNone/>
+            </a:pPr>
+            <a:r>
+              <a:rPr lang="en-US" sz="1600" b="1" dirty="0">
+                <a:solidFill>
+                  <a:srgbClr val="1A73E8"/>
+                </a:solidFill>
+                <a:latin typeface="Cambria" pitchFamily="34" charset="0"/>
+                <a:ea typeface="Cambria" pitchFamily="34" charset="-122"/>
+                <a:cs typeface="Cambria" pitchFamily="34" charset="-120"/>
+              </a:rPr>
+              <a:t>Choose Gemini ADK when…</a:t>
+            </a:r>
+            <a:endParaRPr lang="en-US" sz="1600" dirty="0"/>
+          </a:p>
+        </p:txBody>
+      </p:sp>
+      <p:sp>
+        <p:nvSpPr>
+          <p:cNvPr id="23" name="Shape 21"/>
+          <p:cNvSpPr/>
+          <p:nvPr/>
+        </p:nvSpPr>
+        <p:spPr>
+          <a:xfrm>
+            <a:off x="6510528" y="1353312"/>
+            <a:ext cx="5193792" cy="841248"/>
+          </a:xfrm>
+          <a:prstGeom prst="roundRect">
+            <a:avLst>
+              <a:gd name="adj" fmla="val 7609"/>
+            </a:avLst>
+          </a:prstGeom>
+          <a:solidFill>
+            <a:srgbClr val="04152A"/>
+          </a:solidFill>
+          <a:ln w="25400">
+            <a:solidFill>
+              <a:srgbClr val="1A60C0"/>
+            </a:solidFill>
+            <a:prstDash val="solid"/>
+          </a:ln>
+        </p:spPr>
+      </p:sp>
+      <p:sp>
+        <p:nvSpPr>
+          <p:cNvPr id="24" name="Text 22"/>
+          <p:cNvSpPr txBox="1"/>
+          <p:nvPr/>
+        </p:nvSpPr>
+        <p:spPr>
+          <a:xfrm>
+            <a:off x="6675120" y="1408176"/>
+            <a:ext cx="4901184" cy="256032"/>
+          </a:xfrm>
+          <a:prstGeom prst="rect">
+            <a:avLst/>
+          </a:prstGeom>
+          <a:noFill/>
+          <a:ln/>
+        </p:spPr>
+        <p:txBody>
+          <a:bodyPr wrap="square" lIns="0" tIns="0" rIns="0" bIns="0" rtlCol="0" anchor="ctr"/>
+          <a:lstStyle/>
+          <a:p>
+            <a:pPr algn="l" indent="0" marL="0">
+              <a:lnSpc>
+                <a:spcPct val="110000"/>
+              </a:lnSpc>
+              <a:buNone/>
+            </a:pPr>
+            <a:r>
+              <a:rPr lang="en-US" sz="1100" b="1" dirty="0">
+                <a:solidFill>
+                  <a:srgbClr val="90C8FF"/>
+                </a:solidFill>
+                <a:latin typeface="Calibri" pitchFamily="34" charset="0"/>
+                <a:ea typeface="Calibri" pitchFamily="34" charset="-122"/>
+                <a:cs typeface="Calibri" pitchFamily="34" charset="-120"/>
+              </a:rPr>
+              <a:t>You want framework-managed session state</a:t>
+            </a:r>
+            <a:endParaRPr lang="en-US" sz="1100" dirty="0"/>
+          </a:p>
+        </p:txBody>
+      </p:sp>
+      <p:sp>
+        <p:nvSpPr>
+          <p:cNvPr id="25" name="Text 23"/>
+          <p:cNvSpPr txBox="1"/>
+          <p:nvPr/>
+        </p:nvSpPr>
+        <p:spPr>
+          <a:xfrm>
+            <a:off x="6675120" y="1682496"/>
+            <a:ext cx="4901184" cy="457200"/>
+          </a:xfrm>
+          <a:prstGeom prst="rect">
+            <a:avLst/>
+          </a:prstGeom>
+          <a:noFill/>
+          <a:ln/>
+        </p:spPr>
+        <p:txBody>
+          <a:bodyPr wrap="square" lIns="0" tIns="0" rIns="0" bIns="0" rtlCol="0" anchor="ctr"/>
+          <a:lstStyle/>
+          <a:p>
+            <a:pPr algn="l" indent="0" marL="0">
+              <a:lnSpc>
+                <a:spcPct val="110000"/>
+              </a:lnSpc>
+              <a:buNone/>
+            </a:pPr>
+            <a:r>
+              <a:rPr lang="en-US" sz="950" dirty="0">
+                <a:solidFill>
+                  <a:srgbClr val="A0B4C8"/>
+                </a:solidFill>
+                <a:latin typeface="Calibri" pitchFamily="34" charset="0"/>
+                <a:ea typeface="Calibri" pitchFamily="34" charset="-122"/>
+                <a:cs typeface="Calibri" pitchFamily="34" charset="-120"/>
+              </a:rPr>
+              <a:t>InMemorySessionService + session.state persist data</a:t>
+            </a:r>
+            <a:endParaRPr lang="en-US" sz="950" dirty="0"/>
+          </a:p>
+          <a:p>
+            <a:pPr algn="l" indent="0" marL="0">
+              <a:lnSpc>
+                <a:spcPct val="110000"/>
+              </a:lnSpc>
+              <a:buNone/>
+            </a:pPr>
+            <a:r>
+              <a:rPr lang="en-US" sz="950" dirty="0">
+                <a:solidFill>
+                  <a:srgbClr val="A0B4C8"/>
+                </a:solidFill>
+                <a:latin typeface="Calibri" pitchFamily="34" charset="0"/>
+                <a:ea typeface="Calibri" pitchFamily="34" charset="-122"/>
+                <a:cs typeface="Calibri" pitchFamily="34" charset="-120"/>
+              </a:rPr>
+              <a:t>across turns automatically — no manual plumbing.</a:t>
+            </a:r>
+            <a:endParaRPr lang="en-US" sz="950" dirty="0"/>
+          </a:p>
+        </p:txBody>
+      </p:sp>
+      <p:sp>
+        <p:nvSpPr>
+          <p:cNvPr id="26" name="Shape 24"/>
+          <p:cNvSpPr/>
+          <p:nvPr/>
+        </p:nvSpPr>
+        <p:spPr>
+          <a:xfrm>
+            <a:off x="6510528" y="2286000"/>
+            <a:ext cx="5193792" cy="841248"/>
+          </a:xfrm>
+          <a:prstGeom prst="roundRect">
+            <a:avLst>
+              <a:gd name="adj" fmla="val 7609"/>
+            </a:avLst>
+          </a:prstGeom>
+          <a:solidFill>
+            <a:srgbClr val="04152A"/>
+          </a:solidFill>
+          <a:ln w="25400">
+            <a:solidFill>
+              <a:srgbClr val="1A60C0"/>
+            </a:solidFill>
+            <a:prstDash val="solid"/>
+          </a:ln>
+        </p:spPr>
+      </p:sp>
+      <p:sp>
+        <p:nvSpPr>
+          <p:cNvPr id="27" name="Text 25"/>
+          <p:cNvSpPr txBox="1"/>
+          <p:nvPr/>
+        </p:nvSpPr>
+        <p:spPr>
+          <a:xfrm>
+            <a:off x="6675120" y="2340864"/>
+            <a:ext cx="4901184" cy="256032"/>
+          </a:xfrm>
+          <a:prstGeom prst="rect">
+            <a:avLst/>
+          </a:prstGeom>
+          <a:noFill/>
+          <a:ln/>
+        </p:spPr>
+        <p:txBody>
+          <a:bodyPr wrap="square" lIns="0" tIns="0" rIns="0" bIns="0" rtlCol="0" anchor="ctr"/>
+          <a:lstStyle/>
+          <a:p>
+            <a:pPr algn="l" indent="0" marL="0">
+              <a:lnSpc>
+                <a:spcPct val="110000"/>
+              </a:lnSpc>
+              <a:buNone/>
+            </a:pPr>
+            <a:r>
+              <a:rPr lang="en-US" sz="1100" b="1" dirty="0">
+                <a:solidFill>
+                  <a:srgbClr val="90C8FF"/>
+                </a:solidFill>
+                <a:latin typeface="Calibri" pitchFamily="34" charset="0"/>
+                <a:ea typeface="Calibri" pitchFamily="34" charset="-122"/>
+                <a:cs typeface="Calibri" pitchFamily="34" charset="-120"/>
+              </a:rPr>
+              <a:t>Multi-agent routing should be automatic</a:t>
+            </a:r>
+            <a:endParaRPr lang="en-US" sz="1100" dirty="0"/>
+          </a:p>
+        </p:txBody>
+      </p:sp>
+      <p:sp>
+        <p:nvSpPr>
+          <p:cNvPr id="28" name="Text 26"/>
+          <p:cNvSpPr txBox="1"/>
+          <p:nvPr/>
+        </p:nvSpPr>
+        <p:spPr>
+          <a:xfrm>
+            <a:off x="6675120" y="2615184"/>
+            <a:ext cx="4901184" cy="457200"/>
+          </a:xfrm>
+          <a:prstGeom prst="rect">
+            <a:avLst/>
+          </a:prstGeom>
+          <a:noFill/>
+          <a:ln/>
+        </p:spPr>
+        <p:txBody>
+          <a:bodyPr wrap="square" lIns="0" tIns="0" rIns="0" bIns="0" rtlCol="0" anchor="ctr"/>
+          <a:lstStyle/>
+          <a:p>
+            <a:pPr algn="l" indent="0" marL="0">
+              <a:lnSpc>
+                <a:spcPct val="110000"/>
+              </a:lnSpc>
+              <a:buNone/>
+            </a:pPr>
+            <a:r>
+              <a:rPr lang="en-US" sz="950" dirty="0">
+                <a:solidFill>
+                  <a:srgbClr val="A0B4C8"/>
+                </a:solidFill>
+                <a:latin typeface="Calibri" pitchFamily="34" charset="0"/>
+                <a:ea typeface="Calibri" pitchFamily="34" charset="-122"/>
+                <a:cs typeface="Calibri" pitchFamily="34" charset="-120"/>
+              </a:rPr>
+              <a:t>sub_agents=[] and ADK generates the transfer tool;</a:t>
+            </a:r>
+            <a:endParaRPr lang="en-US" sz="950" dirty="0"/>
+          </a:p>
+          <a:p>
+            <a:pPr algn="l" indent="0" marL="0">
+              <a:lnSpc>
+                <a:spcPct val="110000"/>
+              </a:lnSpc>
+              <a:buNone/>
+            </a:pPr>
+            <a:r>
+              <a:rPr lang="en-US" sz="950" dirty="0">
+                <a:solidFill>
+                  <a:srgbClr val="A0B4C8"/>
+                </a:solidFill>
+                <a:latin typeface="Calibri" pitchFamily="34" charset="0"/>
+                <a:ea typeface="Calibri" pitchFamily="34" charset="-122"/>
+                <a:cs typeface="Calibri" pitchFamily="34" charset="-120"/>
+              </a:rPr>
+              <a:t>no boilerplate routing code to write or maintain.</a:t>
+            </a:r>
+            <a:endParaRPr lang="en-US" sz="950" dirty="0"/>
+          </a:p>
+        </p:txBody>
+      </p:sp>
+      <p:sp>
+        <p:nvSpPr>
+          <p:cNvPr id="29" name="Shape 27"/>
+          <p:cNvSpPr/>
+          <p:nvPr/>
+        </p:nvSpPr>
+        <p:spPr>
+          <a:xfrm>
+            <a:off x="6510528" y="3218688"/>
+            <a:ext cx="5193792" cy="841248"/>
+          </a:xfrm>
+          <a:prstGeom prst="roundRect">
+            <a:avLst>
+              <a:gd name="adj" fmla="val 7609"/>
+            </a:avLst>
+          </a:prstGeom>
+          <a:solidFill>
+            <a:srgbClr val="04152A"/>
+          </a:solidFill>
+          <a:ln w="25400">
+            <a:solidFill>
+              <a:srgbClr val="1A60C0"/>
+            </a:solidFill>
+            <a:prstDash val="solid"/>
+          </a:ln>
+        </p:spPr>
+      </p:sp>
+      <p:sp>
+        <p:nvSpPr>
+          <p:cNvPr id="30" name="Text 28"/>
+          <p:cNvSpPr txBox="1"/>
+          <p:nvPr/>
+        </p:nvSpPr>
+        <p:spPr>
+          <a:xfrm>
+            <a:off x="6675120" y="3273552"/>
+            <a:ext cx="4901184" cy="256032"/>
+          </a:xfrm>
+          <a:prstGeom prst="rect">
+            <a:avLst/>
+          </a:prstGeom>
+          <a:noFill/>
+          <a:ln/>
+        </p:spPr>
+        <p:txBody>
+          <a:bodyPr wrap="square" lIns="0" tIns="0" rIns="0" bIns="0" rtlCol="0" anchor="ctr"/>
+          <a:lstStyle/>
+          <a:p>
+            <a:pPr algn="l" indent="0" marL="0">
+              <a:lnSpc>
+                <a:spcPct val="110000"/>
+              </a:lnSpc>
+              <a:buNone/>
+            </a:pPr>
+            <a:r>
+              <a:rPr lang="en-US" sz="1100" b="1" dirty="0">
+                <a:solidFill>
+                  <a:srgbClr val="90C8FF"/>
+                </a:solidFill>
+                <a:latin typeface="Calibri" pitchFamily="34" charset="0"/>
+                <a:ea typeface="Calibri" pitchFamily="34" charset="-122"/>
+                <a:cs typeface="Calibri" pitchFamily="34" charset="-120"/>
+              </a:rPr>
+              <a:t>Callbacks for cross-cutting concerns</a:t>
+            </a:r>
+            <a:endParaRPr lang="en-US" sz="1100" dirty="0"/>
+          </a:p>
+        </p:txBody>
+      </p:sp>
+      <p:sp>
+        <p:nvSpPr>
+          <p:cNvPr id="31" name="Text 29"/>
+          <p:cNvSpPr txBox="1"/>
+          <p:nvPr/>
+        </p:nvSpPr>
+        <p:spPr>
+          <a:xfrm>
+            <a:off x="6675120" y="3547872"/>
+            <a:ext cx="4901184" cy="457200"/>
+          </a:xfrm>
+          <a:prstGeom prst="rect">
+            <a:avLst/>
+          </a:prstGeom>
+          <a:noFill/>
+          <a:ln/>
+        </p:spPr>
+        <p:txBody>
+          <a:bodyPr wrap="square" lIns="0" tIns="0" rIns="0" bIns="0" rtlCol="0" anchor="ctr"/>
+          <a:lstStyle/>
+          <a:p>
+            <a:pPr algn="l" indent="0" marL="0">
+              <a:lnSpc>
+                <a:spcPct val="110000"/>
+              </a:lnSpc>
+              <a:buNone/>
+            </a:pPr>
+            <a:r>
+              <a:rPr lang="en-US" sz="950" dirty="0">
+                <a:solidFill>
+                  <a:srgbClr val="A0B4C8"/>
+                </a:solidFill>
+                <a:latin typeface="Calibri" pitchFamily="34" charset="0"/>
+                <a:ea typeface="Calibri" pitchFamily="34" charset="-122"/>
+                <a:cs typeface="Calibri" pitchFamily="34" charset="-120"/>
+              </a:rPr>
+              <a:t>before_model_callback / after_tool_callback run on</a:t>
+            </a:r>
+            <a:endParaRPr lang="en-US" sz="950" dirty="0"/>
+          </a:p>
+          <a:p>
+            <a:pPr algn="l" indent="0" marL="0">
+              <a:lnSpc>
+                <a:spcPct val="110000"/>
+              </a:lnSpc>
+              <a:buNone/>
+            </a:pPr>
+            <a:r>
+              <a:rPr lang="en-US" sz="950" dirty="0">
+                <a:solidFill>
+                  <a:srgbClr val="A0B4C8"/>
+                </a:solidFill>
+                <a:latin typeface="Calibri" pitchFamily="34" charset="0"/>
+                <a:ea typeface="Calibri" pitchFamily="34" charset="-122"/>
+                <a:cs typeface="Calibri" pitchFamily="34" charset="-120"/>
+              </a:rPr>
+              <a:t>every agent in the hierarchy — write once, applies everywhere.</a:t>
+            </a:r>
+            <a:endParaRPr lang="en-US" sz="950" dirty="0"/>
+          </a:p>
+        </p:txBody>
+      </p:sp>
+      <p:sp>
+        <p:nvSpPr>
+          <p:cNvPr id="32" name="Shape 30"/>
+          <p:cNvSpPr/>
+          <p:nvPr/>
+        </p:nvSpPr>
+        <p:spPr>
+          <a:xfrm>
+            <a:off x="6510528" y="4151376"/>
+            <a:ext cx="5193792" cy="841248"/>
+          </a:xfrm>
+          <a:prstGeom prst="roundRect">
+            <a:avLst>
+              <a:gd name="adj" fmla="val 7609"/>
+            </a:avLst>
+          </a:prstGeom>
+          <a:solidFill>
+            <a:srgbClr val="04152A"/>
+          </a:solidFill>
+          <a:ln w="25400">
+            <a:solidFill>
+              <a:srgbClr val="1A60C0"/>
+            </a:solidFill>
+            <a:prstDash val="solid"/>
+          </a:ln>
+        </p:spPr>
+      </p:sp>
+      <p:sp>
+        <p:nvSpPr>
+          <p:cNvPr id="33" name="Text 31"/>
+          <p:cNvSpPr txBox="1"/>
+          <p:nvPr/>
+        </p:nvSpPr>
+        <p:spPr>
+          <a:xfrm>
+            <a:off x="6675120" y="4206240"/>
+            <a:ext cx="4901184" cy="256032"/>
+          </a:xfrm>
+          <a:prstGeom prst="rect">
+            <a:avLst/>
+          </a:prstGeom>
+          <a:noFill/>
+          <a:ln/>
+        </p:spPr>
+        <p:txBody>
+          <a:bodyPr wrap="square" lIns="0" tIns="0" rIns="0" bIns="0" rtlCol="0" anchor="ctr"/>
+          <a:lstStyle/>
+          <a:p>
+            <a:pPr algn="l" indent="0" marL="0">
+              <a:lnSpc>
+                <a:spcPct val="110000"/>
+              </a:lnSpc>
+              <a:buNone/>
+            </a:pPr>
+            <a:r>
+              <a:rPr lang="en-US" sz="1100" b="1" dirty="0">
+                <a:solidFill>
+                  <a:srgbClr val="90C8FF"/>
+                </a:solidFill>
+                <a:latin typeface="Calibri" pitchFamily="34" charset="0"/>
+                <a:ea typeface="Calibri" pitchFamily="34" charset="-122"/>
+                <a:cs typeface="Calibri" pitchFamily="34" charset="-120"/>
+              </a:rPr>
+              <a:t>Knowledge Graph grounding is needed</a:t>
+            </a:r>
+            <a:endParaRPr lang="en-US" sz="1100" dirty="0"/>
+          </a:p>
+        </p:txBody>
+      </p:sp>
+      <p:sp>
+        <p:nvSpPr>
+          <p:cNvPr id="34" name="Text 32"/>
+          <p:cNvSpPr txBox="1"/>
+          <p:nvPr/>
+        </p:nvSpPr>
+        <p:spPr>
+          <a:xfrm>
+            <a:off x="6675120" y="4480560"/>
+            <a:ext cx="4901184" cy="457200"/>
+          </a:xfrm>
+          <a:prstGeom prst="rect">
+            <a:avLst/>
+          </a:prstGeom>
+          <a:noFill/>
+          <a:ln/>
+        </p:spPr>
+        <p:txBody>
+          <a:bodyPr wrap="square" lIns="0" tIns="0" rIns="0" bIns="0" rtlCol="0" anchor="ctr"/>
+          <a:lstStyle/>
+          <a:p>
+            <a:pPr algn="l" indent="0" marL="0">
+              <a:lnSpc>
+                <a:spcPct val="110000"/>
+              </a:lnSpc>
+              <a:buNone/>
+            </a:pPr>
+            <a:r>
+              <a:rPr lang="en-US" sz="950" dirty="0">
+                <a:solidFill>
+                  <a:srgbClr val="A0B4C8"/>
+                </a:solidFill>
+                <a:latin typeface="Calibri" pitchFamily="34" charset="0"/>
+                <a:ea typeface="Calibri" pitchFamily="34" charset="-122"/>
+                <a:cs typeface="Calibri" pitchFamily="34" charset="-120"/>
+              </a:rPr>
+              <a:t>classify_product_ontology and lookup_product_entities</a:t>
+            </a:r>
+            <a:endParaRPr lang="en-US" sz="950" dirty="0"/>
+          </a:p>
+          <a:p>
+            <a:pPr algn="l" indent="0" marL="0">
+              <a:lnSpc>
+                <a:spcPct val="110000"/>
+              </a:lnSpc>
+              <a:buNone/>
+            </a:pPr>
+            <a:r>
+              <a:rPr lang="en-US" sz="950" dirty="0">
+                <a:solidFill>
+                  <a:srgbClr val="A0B4C8"/>
+                </a:solidFill>
+                <a:latin typeface="Calibri" pitchFamily="34" charset="0"/>
+                <a:ea typeface="Calibri" pitchFamily="34" charset="-122"/>
+                <a:cs typeface="Calibri" pitchFamily="34" charset="-120"/>
+              </a:rPr>
+              <a:t>hit Wikidata + Google KG for fact-grounded copy.</a:t>
+            </a:r>
+            <a:endParaRPr lang="en-US" sz="950" dirty="0"/>
+          </a:p>
+        </p:txBody>
+      </p:sp>
+      <p:sp>
+        <p:nvSpPr>
+          <p:cNvPr id="35" name="Shape 33"/>
+          <p:cNvSpPr/>
+          <p:nvPr/>
+        </p:nvSpPr>
+        <p:spPr>
+          <a:xfrm>
+            <a:off x="6510528" y="5084064"/>
+            <a:ext cx="5193792" cy="841248"/>
+          </a:xfrm>
+          <a:prstGeom prst="roundRect">
+            <a:avLst>
+              <a:gd name="adj" fmla="val 7609"/>
+            </a:avLst>
+          </a:prstGeom>
+          <a:solidFill>
+            <a:srgbClr val="04152A"/>
+          </a:solidFill>
+          <a:ln w="25400">
+            <a:solidFill>
+              <a:srgbClr val="1A60C0"/>
+            </a:solidFill>
+            <a:prstDash val="solid"/>
+          </a:ln>
+        </p:spPr>
+      </p:sp>
+      <p:sp>
+        <p:nvSpPr>
+          <p:cNvPr id="36" name="Text 34"/>
+          <p:cNvSpPr txBox="1"/>
+          <p:nvPr/>
+        </p:nvSpPr>
+        <p:spPr>
+          <a:xfrm>
+            <a:off x="6675120" y="5138928"/>
+            <a:ext cx="4901184" cy="256032"/>
+          </a:xfrm>
+          <a:prstGeom prst="rect">
+            <a:avLst/>
+          </a:prstGeom>
+          <a:noFill/>
+          <a:ln/>
+        </p:spPr>
+        <p:txBody>
+          <a:bodyPr wrap="square" lIns="0" tIns="0" rIns="0" bIns="0" rtlCol="0" anchor="ctr"/>
+          <a:lstStyle/>
+          <a:p>
+            <a:pPr algn="l" indent="0" marL="0">
+              <a:lnSpc>
+                <a:spcPct val="110000"/>
+              </a:lnSpc>
+              <a:buNone/>
+            </a:pPr>
+            <a:r>
+              <a:rPr lang="en-US" sz="1100" b="1" dirty="0">
+                <a:solidFill>
+                  <a:srgbClr val="90C8FF"/>
+                </a:solidFill>
+                <a:latin typeface="Calibri" pitchFamily="34" charset="0"/>
+                <a:ea typeface="Calibri" pitchFamily="34" charset="-122"/>
+                <a:cs typeface="Calibri" pitchFamily="34" charset="-120"/>
+              </a:rPr>
+              <a:t>Google Cloud / Vertex AI ecosystem</a:t>
+            </a:r>
+            <a:endParaRPr lang="en-US" sz="1100" dirty="0"/>
+          </a:p>
+        </p:txBody>
+      </p:sp>
+      <p:sp>
+        <p:nvSpPr>
+          <p:cNvPr id="37" name="Text 35"/>
+          <p:cNvSpPr txBox="1"/>
+          <p:nvPr/>
+        </p:nvSpPr>
+        <p:spPr>
+          <a:xfrm>
+            <a:off x="6675120" y="5413248"/>
+            <a:ext cx="4901184" cy="457200"/>
+          </a:xfrm>
+          <a:prstGeom prst="rect">
+            <a:avLst/>
+          </a:prstGeom>
+          <a:noFill/>
+          <a:ln/>
+        </p:spPr>
+        <p:txBody>
+          <a:bodyPr wrap="square" lIns="0" tIns="0" rIns="0" bIns="0" rtlCol="0" anchor="ctr"/>
+          <a:lstStyle/>
+          <a:p>
+            <a:pPr algn="l" indent="0" marL="0">
+              <a:lnSpc>
+                <a:spcPct val="110000"/>
+              </a:lnSpc>
+              <a:buNone/>
+            </a:pPr>
+            <a:r>
+              <a:rPr lang="en-US" sz="950" dirty="0">
+                <a:solidFill>
+                  <a:srgbClr val="A0B4C8"/>
+                </a:solidFill>
+                <a:latin typeface="Calibri" pitchFamily="34" charset="0"/>
+                <a:ea typeface="Calibri" pitchFamily="34" charset="-122"/>
+                <a:cs typeface="Calibri" pitchFamily="34" charset="-120"/>
+              </a:rPr>
+              <a:t>ADK integrates natively with Vertex AI, Cloud Run,</a:t>
+            </a:r>
+            <a:endParaRPr lang="en-US" sz="950" dirty="0"/>
+          </a:p>
+          <a:p>
+            <a:pPr algn="l" indent="0" marL="0">
+              <a:lnSpc>
+                <a:spcPct val="110000"/>
+              </a:lnSpc>
+              <a:buNone/>
+            </a:pPr>
+            <a:r>
+              <a:rPr lang="en-US" sz="950" dirty="0">
+                <a:solidFill>
+                  <a:srgbClr val="A0B4C8"/>
+                </a:solidFill>
+                <a:latin typeface="Calibri" pitchFamily="34" charset="0"/>
+                <a:ea typeface="Calibri" pitchFamily="34" charset="-122"/>
+                <a:cs typeface="Calibri" pitchFamily="34" charset="-120"/>
+              </a:rPr>
+              <a:t>and Google's broader agent tooling roadmap.</a:t>
+            </a:r>
+            <a:endParaRPr lang="en-US" sz="950" dirty="0"/>
+          </a:p>
+        </p:txBody>
+      </p:sp>
+      <p:sp>
+        <p:nvSpPr>
+          <p:cNvPr id="38" name="Shape 36"/>
+          <p:cNvSpPr/>
+          <p:nvPr/>
+        </p:nvSpPr>
+        <p:spPr>
+          <a:xfrm>
+            <a:off x="329184" y="6254496"/>
+            <a:ext cx="11521440" cy="438912"/>
+          </a:xfrm>
+          <a:prstGeom prst="roundRect">
+            <a:avLst>
+              <a:gd name="adj" fmla="val 16667"/>
+            </a:avLst>
+          </a:prstGeom>
+          <a:solidFill>
+            <a:srgbClr val="0E1E2C"/>
+          </a:solidFill>
+          <a:ln w="25400">
+            <a:solidFill>
+              <a:srgbClr val="3A6070"/>
+            </a:solidFill>
+            <a:prstDash val="solid"/>
+          </a:ln>
+        </p:spPr>
+      </p:sp>
+      <p:sp>
+        <p:nvSpPr>
+          <p:cNvPr id="39" name="Text 37"/>
+          <p:cNvSpPr txBox="1"/>
+          <p:nvPr/>
+        </p:nvSpPr>
+        <p:spPr>
+          <a:xfrm>
+            <a:off x="475488" y="6254496"/>
+            <a:ext cx="11228832" cy="438912"/>
+          </a:xfrm>
+          <a:prstGeom prst="rect">
+            <a:avLst/>
+          </a:prstGeom>
+          <a:noFill/>
+          <a:ln/>
+        </p:spPr>
+        <p:txBody>
+          <a:bodyPr wrap="square" lIns="0" tIns="0" rIns="0" bIns="0" rtlCol="0" anchor="ctr"/>
+          <a:lstStyle/>
+          <a:p>
+            <a:pPr algn="l" indent="0" marL="0">
+              <a:lnSpc>
+                <a:spcPct val="110000"/>
+              </a:lnSpc>
+              <a:buNone/>
+            </a:pPr>
+            <a:r>
+              <a:rPr lang="en-US" sz="1000" dirty="0">
+                <a:solidFill>
+                  <a:srgbClr val="A0B4C8"/>
+                </a:solidFill>
+                <a:latin typeface="Calibri" pitchFamily="34" charset="0"/>
+                <a:ea typeface="Calibri" pitchFamily="34" charset="-122"/>
+                <a:cs typeface="Calibri" pitchFamily="34" charset="-120"/>
+              </a:rPr>
+              <a:t>💡  Both share the same SFCC backend, MerchantSessionContext, and staging pattern. A platform swap is a dependency swap + prompt rewrite, not a full rebuild.</a:t>
+            </a:r>
+            <a:endParaRPr lang="en-US" sz="1000" dirty="0"/>
           </a:p>
         </p:txBody>
       </p:sp>
